--- a/산출물/실전반/이론/06회차/실전반_06일차.pptx
+++ b/산출물/실전반/이론/06회차/실전반_06일차.pptx
@@ -4151,7 +4151,7 @@
           <a:lstStyle/>
           <a:p>
             <a:r>
-              <a:t>실행 상태는 두 층으로 읽어요. 화면 위 두 줄은 처리 건 전체의 상태, 아래 두 줄은 단계 하나하나의 상태입니다. 여기서는 이 사례에서 비교할 처리 건의 상태 두 가지를 골랐습니다. 전체 상태 목록을 보여 주는 표는 아니에요. 화면의 RUNNING은 진행 중이라는 상태, COMPLETED는 끝 이벤트에 닿아서 실행이 끝났다는 상태, 줄여서 끝남이죠. 승인을 기다리는 동안에도 처리 건은 진행 중입니다. 단계의 상태는 열려 있다, 끝났다, 아직 닿지 않았다, 이 셋이 기본이에요. 승인 대기 기록에서 본 그대로입니다. 그런데 마지막 줄에 하나가 더 있죠. 화면의 CANCELLED, 취소됨이라는 상태인데요, 이 예에서는 게이트웨이에서 선택되지 않은 갈래의 단계에 붙었습니다. 다른 상황의 취소 사유까지 이 뜻 하나로 읽지는 않습니다. 거절된 처리 건에서는 냉각 명령이 이 상태로 남아요. 그러니까 이 두 처리 건 상태만으로 업무 결과까지 알 수는 없습니다. 어디에서 기다리고 있는지, 어느 갈래로 갔는지는 단계의 상태를 봐야 알 수 있어요.</a:t>
+              <a:t>실행 상태는 두 층으로 읽어요. 화면 위 두 줄은 처리 건 전체의 상태, 아래 두 줄은 단계 하나하나의 상태입니다. 여기서는 이 사례에서 비교할 처리 건의 상태 두 가지를 골랐습니다. 전체 상태 목록을 보여 주는 표는 아니에요. 화면의 RUNNING은 진행 중이라는 상태, COMPLETED는 필요한 흐름이 모두 끝나 처리 건의 실행이 완료됐다는 상태, 줄여서 끝남이죠. 승인을 기다리는 동안에도 처리 건은 진행 중입니다. 단계의 상태는 열려 있다, 끝났다, 아직 닿지 않았다, 이 셋이 기본이에요. 승인 대기 기록에서 본 그대로입니다. 그런데 마지막 줄에 하나가 더 있죠. 화면의 CANCELLED, 취소됨이라는 상태인데요, 이 예에서는 게이트웨이에서 선택되지 않은 갈래의 단계에 붙었습니다. 다른 상황의 취소 사유까지 이 뜻 하나로 읽지는 않습니다. 거절된 처리 건에서는 냉각 명령이 이 상태로 남아요. 그러니까 이 두 처리 건 상태만으로 업무 결과까지 알 수는 없습니다. 어디에서 기다리고 있는지, 어느 갈래로 갔는지는 단계의 상태를 봐야 알 수 있어요.</a:t>
             </a:r>
           </a:p>
         </p:txBody>
@@ -4291,7 +4291,7 @@
           <a:lstStyle/>
           <a:p>
             <a:r>
-              <a:t>BPM의 개선 단계에서 프로세스를 고쳤다고 해 볼게요. 고친 내용은 언제부터 적용될까요? 화면 왼쪽부터 네 칸을 따라가 보겠습니다. 첫 칸, 고친 정의를 새 판본으로 등록합니다. 한번 저장된 판본은 고치지 않아요. 바꿀 때마다 새 판본이 생깁니다. 그러니까 설계도는 하나여도, 고칠 때마다 그 설계도의 판본이 하나씩 쌓이는 거예요. 긴급 대응 프로세스의 정의에도 판본이 여럿 쌓여 있습니다. 왜 고치지 못하게 할까요? 지난 처리 건이 어떤 판본으로 돌았는지 나중에 되짚으려면, 그 판본이 그때 모습 그대로 남아 있어야 하니까요. 그런데 등록만 해서는 바뀌지 않아요. 둘째 칸, 경보를 받을 판본을 지정하는 배포를 해야 합니다. 배포는 어느 흐름이 그 경보를 받을지를 정하는 일이기도 해요. 같은 경보를 받는 흐름이 여러 개 배포돼 있으면, 가장 최근에 배포한 흐름이 경보를 받습니다. 쿨러 사건의 처리 건도 이렇게 배포된 긴급 대응 프로세스로 열렸어요. 배포된 흐름을 모두 거두면, HYD에 원래 들어 있는 기준 흐름이 경보를 받고요. 여섯째 실습에서 내 흐름을 배포하면, 가장 최근에 배포한 흐름이 되니까 쿨러 경보가 그때부터 내 흐름으로 열리게 됩니다. 셋째 칸, 배포한 뒤에 경보가 오면, 그 배포된 판본으로 처리 건이 열립니다. 마지막 칸이 중요해요. 이미 열려 있던 처리 건은, 자기가 열릴 때의 판본으로 끝까지 갑니다. 새 흐름을 배포했다고 진행 중인 건의 순서가 자동으로 바뀌지는 않아요. 다만 흐름 판본 고정이 센서 값이나 연결된 지식·서비스까지 얼린다는 뜻은 아닙니다. 승인할 때 현재 조건을 재확인하는 원칙은 그대로입니다. 고친 흐름이 다음 경보의 처리 건부터 쓰이는 까닭이 이겁니다.</a:t>
+              <a:t>BPM의 개선 단계에서 프로세스를 고쳤다고 해 볼게요. 고친 내용은 언제부터 적용될까요? 화면 왼쪽부터 네 칸을 따라가 보겠습니다. 첫 칸, 고친 정의를 새 판본으로 등록합니다. 한번 저장된 판본은 고치지 않아요. 바꿀 때마다 새 판본이 생깁니다. 그러니까 설계도는 하나여도, 고칠 때마다 그 설계도의 판본이 하나씩 쌓이는 거예요. 긴급 대응 프로세스의 정의에도 판본이 여럿 쌓여 있습니다. 왜 고치지 못하게 할까요? 지난 처리 건이 어떤 판본으로 돌았는지 나중에 되짚으려면, 그 판본이 그때 모습 그대로 남아 있어야 하니까요. 그런데 등록만 해서는 바뀌지 않아요. 둘째 칸, 경보를 받을 판본을 지정하는 배포를 해야 합니다. 배포는 어느 흐름이 그 경보를 받을지를 정하는 일이기도 해요. 같은 운영 영역에서 같은 경보를 받는 흐름이 여러 개 배포돼 있으면, 가장 최근에 배포한 흐름이 경보를 받습니다. 쿨러 사건의 처리 건도 이렇게 배포된 긴급 대응 프로세스로 열렸어요. 배포된 흐름을 모두 거두면, HYD에 원래 들어 있는 기준 흐름이 경보를 받고요. 여섯째 실습에서 내 흐름을 배포하면, 가장 최근에 배포한 흐름이 되니까 쿨러 경보가 그때부터 내 흐름으로 열리게 됩니다. 셋째 칸, 배포한 뒤에 경보가 오면, 그 배포된 판본으로 처리 건이 열립니다. 마지막 칸이 중요해요. 이미 열려 있던 처리 건은, 자기가 열릴 때의 판본으로 끝까지 갑니다. 새 흐름을 배포했다고 진행 중인 건의 순서가 자동으로 바뀌지는 않아요. 다만 흐름 판본 고정이 센서 값이나 연결된 지식·서비스까지 얼린다는 뜻은 아닙니다. 승인할 때 현재 조건을 재확인하는 원칙은 그대로입니다. 고친 흐름이 다음 경보의 처리 건부터 쓰이는 까닭이 이겁니다.</a:t>
             </a:r>
           </a:p>
         </p:txBody>
@@ -4921,7 +4921,7 @@
           <a:lstStyle/>
           <a:p>
             <a:r>
-              <a:t>앞에서 그린 흐름에 승인과 거절, 회복과 미달 경로를 넣겠습니다. 승인 작업에는 비중단형 경계 타이머를 붙여 지연 알림을 보낸 뒤에도 사람의 결정을 기다리게 합니다. 거절 경로가 명령으로 이어지지 않는지, 알림 갈래의 끝과 처리 건 전체의 끝을 혼동하지 않았는지 그림과 설정으로 확인하겠습니다.</a:t>
+              <a:t>앞에서 그린 흐름에 승인과 거절, 회복과 미달 경로를 넣겠습니다. 승인 작업에는 비중단형 경계 타이머를 붙여 지연 알림을 보낸 뒤에도 사람의 결정을 기다리게 합니다. 거절 경로가 명령으로 이어지지 않는지, 알림 갈래의 끝과 처리 건 전체의 끝을 혼동하지 않았는지 그림과 설정으로 확인하겠습니다. 표의 위에서 승인·거절, 회복·미달, 승인 지연을 차례로 대조합니다. cooling.bpmn과 함께 매핑의 조건과 10분 기한도 남기겠습니다.</a:t>
             </a:r>
           </a:p>
         </p:txBody>
@@ -51512,7 +51512,7 @@
                 <a:ea typeface="맑은 고딕"/>
                 <a:cs typeface="맑은 고딕"/>
               </a:rPr>
-              <a:t>저장한 그림을 다시 열어 작업 내용을 확인한다.</a:t>
+              <a:t>배치·연결한 그림을 basics.bpmn으로 저장하고 다시 열어 같은 구조인지 확인한다.</a:t>
             </a:r>
           </a:p>
         </p:txBody>
@@ -51593,112 +51593,16 @@
         </p:nvSpPr>
         <p:spPr>
           <a:xfrm>
-            <a:off x="548640" y="2995866"/>
-            <a:ext cx="2567863" cy="1990978"/>
+            <a:off x="548640" y="3009265"/>
+            <a:ext cx="2485567" cy="1964181"/>
           </a:xfrm>
           <a:prstGeom prst="roundRect">
             <a:avLst>
-              <a:gd name="adj" fmla="val 4000"/>
+              <a:gd name="adj" fmla="val 5000"/>
             </a:avLst>
           </a:prstGeom>
           <a:solidFill>
-            <a:srgbClr val="FFFFFF"/>
-          </a:solidFill>
-          <a:ln w="15875">
-            <a:solidFill>
-              <a:srgbClr val="D3D9E1"/>
-            </a:solidFill>
-          </a:ln>
-        </p:spPr>
-        <p:txBody>
-          <a:bodyPr rtlCol="0" anchor="ctr"/>
-          <a:lstStyle/>
-          <a:p>
-            <a:pPr algn="ctr"/>
-          </a:p>
-        </p:txBody>
-      </p:sp>
-      <p:sp>
-        <p:nvSpPr>
-          <p:cNvPr id="7" name="TextBox 6"/>
-          <p:cNvSpPr txBox="1"/>
-          <p:nvPr/>
-        </p:nvSpPr>
-        <p:spPr>
-          <a:xfrm>
-            <a:off x="713232" y="3197034"/>
-            <a:ext cx="2238679" cy="1286890"/>
-          </a:xfrm>
-          <a:prstGeom prst="rect">
-            <a:avLst/>
-          </a:prstGeom>
-          <a:noFill/>
-        </p:spPr>
-        <p:txBody>
-          <a:bodyPr wrap="square" anchor="t"/>
-          <a:lstStyle/>
-          <a:p>
-            <a:pPr algn="l" eaLnBrk="0">
-              <a:lnSpc>
-                <a:spcPct val="110000"/>
-              </a:lnSpc>
-              <a:spcAft>
-                <a:spcPts val="400"/>
-              </a:spcAft>
-            </a:pPr>
-            <a:r>
-              <a:rPr sz="2150" b="1">
-                <a:solidFill>
-                  <a:srgbClr val="13294B"/>
-                </a:solidFill>
-                <a:latin typeface="맑은 고딕"/>
-                <a:ea typeface="맑은 고딕"/>
-                <a:cs typeface="맑은 고딕"/>
-              </a:rPr>
-              <a:t>새 다이어그램</a:t>
-            </a:r>
-          </a:p>
-          <a:p>
-            <a:pPr algn="l" eaLnBrk="0">
-              <a:lnSpc>
-                <a:spcPct val="110000"/>
-              </a:lnSpc>
-              <a:spcAft>
-                <a:spcPts val="400"/>
-              </a:spcAft>
-            </a:pPr>
-            <a:r>
-              <a:rPr sz="1750" b="0">
-                <a:solidFill>
-                  <a:srgbClr val="1F2A3A"/>
-                </a:solidFill>
-                <a:latin typeface="맑은 고딕"/>
-                <a:ea typeface="맑은 고딕"/>
-                <a:cs typeface="맑은 고딕"/>
-              </a:rPr>
-              <a:t>시작·작업·끝을 배치한다</a:t>
-            </a:r>
-          </a:p>
-        </p:txBody>
-      </p:sp>
-      <p:sp>
-        <p:nvSpPr>
-          <p:cNvPr id="8" name="Rounded Rectangle 7"/>
-          <p:cNvSpPr/>
-          <p:nvPr/>
-        </p:nvSpPr>
-        <p:spPr>
-          <a:xfrm>
-            <a:off x="777240" y="4557077"/>
-            <a:ext cx="822960" cy="292608"/>
-          </a:xfrm>
-          <a:prstGeom prst="roundRect">
-            <a:avLst>
-              <a:gd name="adj" fmla="val 50000"/>
-            </a:avLst>
-          </a:prstGeom>
-          <a:solidFill>
-            <a:srgbClr val="D3D9E1"/>
+            <a:srgbClr val="F3F6F9"/>
           </a:solidFill>
           <a:ln>
             <a:noFill/>
@@ -51714,97 +51618,25 @@
       </p:sp>
       <p:sp>
         <p:nvSpPr>
-          <p:cNvPr id="9" name="TextBox 8"/>
-          <p:cNvSpPr txBox="1"/>
-          <p:nvPr/>
-        </p:nvSpPr>
-        <p:spPr>
-          <a:xfrm>
-            <a:off x="777240" y="4557077"/>
-            <a:ext cx="822960" cy="292608"/>
-          </a:xfrm>
-          <a:prstGeom prst="rect">
-            <a:avLst/>
-          </a:prstGeom>
-          <a:noFill/>
-        </p:spPr>
-        <p:txBody>
-          <a:bodyPr wrap="square" anchor="ctr"/>
+          <p:cNvPr id="7" name="TextBox 6"/>
+          <p:cNvSpPr txBox="1"/>
+          <p:nvPr/>
+        </p:nvSpPr>
+        <p:spPr>
+          <a:xfrm>
+            <a:off x="621792" y="3192145"/>
+            <a:ext cx="2339263" cy="1708149"/>
+          </a:xfrm>
+          <a:prstGeom prst="rect">
+            <a:avLst/>
+          </a:prstGeom>
+          <a:noFill/>
+        </p:spPr>
+        <p:txBody>
+          <a:bodyPr wrap="square" anchor="t"/>
           <a:lstStyle/>
           <a:p>
             <a:pPr algn="ctr" eaLnBrk="0">
-              <a:lnSpc>
-                <a:spcPct val="110000"/>
-              </a:lnSpc>
-            </a:pPr>
-            <a:r>
-              <a:rPr sz="1200" b="1">
-                <a:solidFill>
-                  <a:srgbClr val="13294B"/>
-                </a:solidFill>
-                <a:latin typeface="맑은 고딕"/>
-                <a:ea typeface="맑은 고딕"/>
-                <a:cs typeface="맑은 고딕"/>
-              </a:rPr>
-              <a:t>입력</a:t>
-            </a:r>
-          </a:p>
-        </p:txBody>
-      </p:sp>
-      <p:sp>
-        <p:nvSpPr>
-          <p:cNvPr id="10" name="Rounded Rectangle 9"/>
-          <p:cNvSpPr/>
-          <p:nvPr/>
-        </p:nvSpPr>
-        <p:spPr>
-          <a:xfrm>
-            <a:off x="3390823" y="2995866"/>
-            <a:ext cx="2567863" cy="1990978"/>
-          </a:xfrm>
-          <a:prstGeom prst="roundRect">
-            <a:avLst>
-              <a:gd name="adj" fmla="val 4000"/>
-            </a:avLst>
-          </a:prstGeom>
-          <a:solidFill>
-            <a:srgbClr val="FFFFFF"/>
-          </a:solidFill>
-          <a:ln w="15875">
-            <a:solidFill>
-              <a:srgbClr val="D3D9E1"/>
-            </a:solidFill>
-          </a:ln>
-        </p:spPr>
-        <p:txBody>
-          <a:bodyPr rtlCol="0" anchor="ctr"/>
-          <a:lstStyle/>
-          <a:p>
-            <a:pPr algn="ctr"/>
-          </a:p>
-        </p:txBody>
-      </p:sp>
-      <p:sp>
-        <p:nvSpPr>
-          <p:cNvPr id="11" name="TextBox 10"/>
-          <p:cNvSpPr txBox="1"/>
-          <p:nvPr/>
-        </p:nvSpPr>
-        <p:spPr>
-          <a:xfrm>
-            <a:off x="3555415" y="3197034"/>
-            <a:ext cx="2238679" cy="1286890"/>
-          </a:xfrm>
-          <a:prstGeom prst="rect">
-            <a:avLst/>
-          </a:prstGeom>
-          <a:noFill/>
-        </p:spPr>
-        <p:txBody>
-          <a:bodyPr wrap="square" anchor="t"/>
-          <a:lstStyle/>
-          <a:p>
-            <a:pPr algn="l" eaLnBrk="0">
               <a:lnSpc>
                 <a:spcPct val="110000"/>
               </a:lnSpc>
@@ -51813,7 +51645,7 @@
               </a:spcAft>
             </a:pPr>
             <a:r>
-              <a:rPr sz="2150" b="1">
+              <a:rPr sz="2000" b="1">
                 <a:solidFill>
                   <a:srgbClr val="13294B"/>
                 </a:solidFill>
@@ -51821,11 +51653,11 @@
                 <a:ea typeface="맑은 고딕"/>
                 <a:cs typeface="맑은 고딕"/>
               </a:rPr>
-              <a:t>배치와 연결</a:t>
-            </a:r>
-          </a:p>
-          <a:p>
-            <a:pPr algn="l" eaLnBrk="0">
+              <a:t>새 다이어그램</a:t>
+            </a:r>
+          </a:p>
+          <a:p>
+            <a:pPr algn="ctr" eaLnBrk="0">
               <a:lnSpc>
                 <a:spcPct val="110000"/>
               </a:lnSpc>
@@ -51834,7 +51666,7 @@
               </a:spcAft>
             </a:pPr>
             <a:r>
-              <a:rPr sz="1750" b="0">
+              <a:rPr sz="1650" b="0">
                 <a:solidFill>
                   <a:srgbClr val="1F2A3A"/>
                 </a:solidFill>
@@ -51842,29 +51674,48 @@
                 <a:ea typeface="맑은 고딕"/>
                 <a:cs typeface="맑은 고딕"/>
               </a:rPr>
-              <a:t>요소 이름과 종류를 고친다</a:t>
-            </a:r>
-          </a:p>
-        </p:txBody>
-      </p:sp>
-      <p:sp>
-        <p:nvSpPr>
-          <p:cNvPr id="12" name="Rounded Rectangle 11"/>
+              <a:t>시작·작업·끝</a:t>
+            </a:r>
+          </a:p>
+          <a:p>
+            <a:pPr algn="ctr" eaLnBrk="0">
+              <a:lnSpc>
+                <a:spcPct val="110000"/>
+              </a:lnSpc>
+              <a:spcAft>
+                <a:spcPts val="400"/>
+              </a:spcAft>
+            </a:pPr>
+            <a:r>
+              <a:rPr sz="1650" b="0">
+                <a:solidFill>
+                  <a:srgbClr val="1F2A3A"/>
+                </a:solidFill>
+                <a:latin typeface="맑은 고딕"/>
+                <a:ea typeface="맑은 고딕"/>
+                <a:cs typeface="맑은 고딕"/>
+              </a:rPr>
+              <a:t>배치</a:t>
+            </a:r>
+          </a:p>
+        </p:txBody>
+      </p:sp>
+      <p:sp>
+        <p:nvSpPr>
+          <p:cNvPr id="8" name="Right Arrow 7"/>
           <p:cNvSpPr/>
           <p:nvPr/>
         </p:nvSpPr>
         <p:spPr>
           <a:xfrm>
-            <a:off x="3619423" y="4557077"/>
-            <a:ext cx="822960" cy="292608"/>
-          </a:xfrm>
-          <a:prstGeom prst="roundRect">
-            <a:avLst>
-              <a:gd name="adj" fmla="val 50000"/>
-            </a:avLst>
+            <a:off x="3098215" y="3854196"/>
+            <a:ext cx="256031" cy="274320"/>
+          </a:xfrm>
+          <a:prstGeom prst="rightArrow">
+            <a:avLst/>
           </a:prstGeom>
           <a:solidFill>
-            <a:srgbClr val="D3D9E1"/>
+            <a:srgbClr val="13294B"/>
           </a:solidFill>
           <a:ln>
             <a:noFill/>
@@ -51880,157 +51731,22 @@
       </p:sp>
       <p:sp>
         <p:nvSpPr>
-          <p:cNvPr id="13" name="TextBox 12"/>
-          <p:cNvSpPr txBox="1"/>
-          <p:nvPr/>
-        </p:nvSpPr>
-        <p:spPr>
-          <a:xfrm>
-            <a:off x="3619423" y="4557077"/>
-            <a:ext cx="822960" cy="292608"/>
-          </a:xfrm>
-          <a:prstGeom prst="rect">
-            <a:avLst/>
-          </a:prstGeom>
-          <a:noFill/>
-        </p:spPr>
-        <p:txBody>
-          <a:bodyPr wrap="square" anchor="ctr"/>
-          <a:lstStyle/>
-          <a:p>
-            <a:pPr algn="ctr" eaLnBrk="0">
-              <a:lnSpc>
-                <a:spcPct val="110000"/>
-              </a:lnSpc>
-            </a:pPr>
-            <a:r>
-              <a:rPr sz="1200" b="1">
-                <a:solidFill>
-                  <a:srgbClr val="13294B"/>
-                </a:solidFill>
-                <a:latin typeface="맑은 고딕"/>
-                <a:ea typeface="맑은 고딕"/>
-                <a:cs typeface="맑은 고딕"/>
-              </a:rPr>
-              <a:t>범위</a:t>
-            </a:r>
-          </a:p>
-        </p:txBody>
-      </p:sp>
-      <p:sp>
-        <p:nvSpPr>
-          <p:cNvPr id="14" name="Rounded Rectangle 13"/>
+          <p:cNvPr id="9" name="Rounded Rectangle 8"/>
           <p:cNvSpPr/>
           <p:nvPr/>
         </p:nvSpPr>
         <p:spPr>
           <a:xfrm>
-            <a:off x="6233007" y="2995866"/>
-            <a:ext cx="2567863" cy="1990978"/>
+            <a:off x="3418255" y="3009265"/>
+            <a:ext cx="2485567" cy="1964181"/>
           </a:xfrm>
           <a:prstGeom prst="roundRect">
             <a:avLst>
-              <a:gd name="adj" fmla="val 4000"/>
+              <a:gd name="adj" fmla="val 5000"/>
             </a:avLst>
           </a:prstGeom>
           <a:solidFill>
-            <a:srgbClr val="FFFFFF"/>
-          </a:solidFill>
-          <a:ln w="15875">
-            <a:solidFill>
-              <a:srgbClr val="D3D9E1"/>
-            </a:solidFill>
-          </a:ln>
-        </p:spPr>
-        <p:txBody>
-          <a:bodyPr rtlCol="0" anchor="ctr"/>
-          <a:lstStyle/>
-          <a:p>
-            <a:pPr algn="ctr"/>
-          </a:p>
-        </p:txBody>
-      </p:sp>
-      <p:sp>
-        <p:nvSpPr>
-          <p:cNvPr id="15" name="TextBox 14"/>
-          <p:cNvSpPr txBox="1"/>
-          <p:nvPr/>
-        </p:nvSpPr>
-        <p:spPr>
-          <a:xfrm>
-            <a:off x="6397599" y="3197034"/>
-            <a:ext cx="2238679" cy="1286890"/>
-          </a:xfrm>
-          <a:prstGeom prst="rect">
-            <a:avLst/>
-          </a:prstGeom>
-          <a:noFill/>
-        </p:spPr>
-        <p:txBody>
-          <a:bodyPr wrap="square" anchor="t"/>
-          <a:lstStyle/>
-          <a:p>
-            <a:pPr algn="l" eaLnBrk="0">
-              <a:lnSpc>
-                <a:spcPct val="110000"/>
-              </a:lnSpc>
-              <a:spcAft>
-                <a:spcPts val="400"/>
-              </a:spcAft>
-            </a:pPr>
-            <a:r>
-              <a:rPr sz="2150" b="1">
-                <a:solidFill>
-                  <a:srgbClr val="13294B"/>
-                </a:solidFill>
-                <a:latin typeface="맑은 고딕"/>
-                <a:ea typeface="맑은 고딕"/>
-                <a:cs typeface="맑은 고딕"/>
-              </a:rPr>
-              <a:t>저장 파일</a:t>
-            </a:r>
-          </a:p>
-          <a:p>
-            <a:pPr algn="l" eaLnBrk="0">
-              <a:lnSpc>
-                <a:spcPct val="110000"/>
-              </a:lnSpc>
-              <a:spcAft>
-                <a:spcPts val="400"/>
-              </a:spcAft>
-            </a:pPr>
-            <a:r>
-              <a:rPr sz="1750" b="0">
-                <a:solidFill>
-                  <a:srgbClr val="1F2A3A"/>
-                </a:solidFill>
-                <a:latin typeface="맑은 고딕"/>
-                <a:ea typeface="맑은 고딕"/>
-                <a:cs typeface="맑은 고딕"/>
-              </a:rPr>
-              <a:t>basics.bpmn</a:t>
-            </a:r>
-          </a:p>
-        </p:txBody>
-      </p:sp>
-      <p:sp>
-        <p:nvSpPr>
-          <p:cNvPr id="16" name="Rounded Rectangle 15"/>
-          <p:cNvSpPr/>
-          <p:nvPr/>
-        </p:nvSpPr>
-        <p:spPr>
-          <a:xfrm>
-            <a:off x="6461607" y="4557077"/>
-            <a:ext cx="822960" cy="292608"/>
-          </a:xfrm>
-          <a:prstGeom prst="roundRect">
-            <a:avLst>
-              <a:gd name="adj" fmla="val 50000"/>
-            </a:avLst>
-          </a:prstGeom>
-          <a:solidFill>
-            <a:srgbClr val="D3D9E1"/>
+            <a:srgbClr val="F3F6F9"/>
           </a:solidFill>
           <a:ln>
             <a:noFill/>
@@ -52046,97 +51762,25 @@
       </p:sp>
       <p:sp>
         <p:nvSpPr>
-          <p:cNvPr id="17" name="TextBox 16"/>
-          <p:cNvSpPr txBox="1"/>
-          <p:nvPr/>
-        </p:nvSpPr>
-        <p:spPr>
-          <a:xfrm>
-            <a:off x="6461607" y="4557077"/>
-            <a:ext cx="822960" cy="292608"/>
-          </a:xfrm>
-          <a:prstGeom prst="rect">
-            <a:avLst/>
-          </a:prstGeom>
-          <a:noFill/>
-        </p:spPr>
-        <p:txBody>
-          <a:bodyPr wrap="square" anchor="ctr"/>
+          <p:cNvPr id="10" name="TextBox 9"/>
+          <p:cNvSpPr txBox="1"/>
+          <p:nvPr/>
+        </p:nvSpPr>
+        <p:spPr>
+          <a:xfrm>
+            <a:off x="3491407" y="3192145"/>
+            <a:ext cx="2339263" cy="1708149"/>
+          </a:xfrm>
+          <a:prstGeom prst="rect">
+            <a:avLst/>
+          </a:prstGeom>
+          <a:noFill/>
+        </p:spPr>
+        <p:txBody>
+          <a:bodyPr wrap="square" anchor="t"/>
           <a:lstStyle/>
           <a:p>
             <a:pPr algn="ctr" eaLnBrk="0">
-              <a:lnSpc>
-                <a:spcPct val="110000"/>
-              </a:lnSpc>
-            </a:pPr>
-            <a:r>
-              <a:rPr sz="1200" b="1">
-                <a:solidFill>
-                  <a:srgbClr val="13294B"/>
-                </a:solidFill>
-                <a:latin typeface="맑은 고딕"/>
-                <a:ea typeface="맑은 고딕"/>
-                <a:cs typeface="맑은 고딕"/>
-              </a:rPr>
-              <a:t>산출물</a:t>
-            </a:r>
-          </a:p>
-        </p:txBody>
-      </p:sp>
-      <p:sp>
-        <p:nvSpPr>
-          <p:cNvPr id="18" name="Rounded Rectangle 17"/>
-          <p:cNvSpPr/>
-          <p:nvPr/>
-        </p:nvSpPr>
-        <p:spPr>
-          <a:xfrm>
-            <a:off x="9075191" y="2995866"/>
-            <a:ext cx="2567863" cy="1990978"/>
-          </a:xfrm>
-          <a:prstGeom prst="roundRect">
-            <a:avLst>
-              <a:gd name="adj" fmla="val 4000"/>
-            </a:avLst>
-          </a:prstGeom>
-          <a:solidFill>
-            <a:srgbClr val="FFFFFF"/>
-          </a:solidFill>
-          <a:ln w="15875">
-            <a:solidFill>
-              <a:srgbClr val="D3D9E1"/>
-            </a:solidFill>
-          </a:ln>
-        </p:spPr>
-        <p:txBody>
-          <a:bodyPr rtlCol="0" anchor="ctr"/>
-          <a:lstStyle/>
-          <a:p>
-            <a:pPr algn="ctr"/>
-          </a:p>
-        </p:txBody>
-      </p:sp>
-      <p:sp>
-        <p:nvSpPr>
-          <p:cNvPr id="19" name="TextBox 18"/>
-          <p:cNvSpPr txBox="1"/>
-          <p:nvPr/>
-        </p:nvSpPr>
-        <p:spPr>
-          <a:xfrm>
-            <a:off x="9239783" y="3197034"/>
-            <a:ext cx="2238679" cy="1286890"/>
-          </a:xfrm>
-          <a:prstGeom prst="rect">
-            <a:avLst/>
-          </a:prstGeom>
-          <a:noFill/>
-        </p:spPr>
-        <p:txBody>
-          <a:bodyPr wrap="square" anchor="t"/>
-          <a:lstStyle/>
-          <a:p>
-            <a:pPr algn="l" eaLnBrk="0">
               <a:lnSpc>
                 <a:spcPct val="110000"/>
               </a:lnSpc>
@@ -52145,7 +51789,7 @@
               </a:spcAft>
             </a:pPr>
             <a:r>
-              <a:rPr sz="2150" b="1">
+              <a:rPr sz="2000" b="1">
                 <a:solidFill>
                   <a:srgbClr val="13294B"/>
                 </a:solidFill>
@@ -52153,11 +51797,11 @@
                 <a:ea typeface="맑은 고딕"/>
                 <a:cs typeface="맑은 고딕"/>
               </a:rPr>
-              <a:t>다시 열기</a:t>
-            </a:r>
-          </a:p>
-          <a:p>
-            <a:pPr algn="l" eaLnBrk="0">
+              <a:t>배치와 연결</a:t>
+            </a:r>
+          </a:p>
+          <a:p>
+            <a:pPr algn="ctr" eaLnBrk="0">
               <a:lnSpc>
                 <a:spcPct val="110000"/>
               </a:lnSpc>
@@ -52166,7 +51810,7 @@
               </a:spcAft>
             </a:pPr>
             <a:r>
-              <a:rPr sz="1750" b="0">
+              <a:rPr sz="1650" b="0">
                 <a:solidFill>
                   <a:srgbClr val="1F2A3A"/>
                 </a:solidFill>
@@ -52174,29 +51818,48 @@
                 <a:ea typeface="맑은 고딕"/>
                 <a:cs typeface="맑은 고딕"/>
               </a:rPr>
-              <a:t>요소·선·이름이 유지된다</a:t>
-            </a:r>
-          </a:p>
-        </p:txBody>
-      </p:sp>
-      <p:sp>
-        <p:nvSpPr>
-          <p:cNvPr id="20" name="Rounded Rectangle 19"/>
+              <a:t>요소 이름·종류</a:t>
+            </a:r>
+          </a:p>
+          <a:p>
+            <a:pPr algn="ctr" eaLnBrk="0">
+              <a:lnSpc>
+                <a:spcPct val="110000"/>
+              </a:lnSpc>
+              <a:spcAft>
+                <a:spcPts val="400"/>
+              </a:spcAft>
+            </a:pPr>
+            <a:r>
+              <a:rPr sz="1650" b="0">
+                <a:solidFill>
+                  <a:srgbClr val="1F2A3A"/>
+                </a:solidFill>
+                <a:latin typeface="맑은 고딕"/>
+                <a:ea typeface="맑은 고딕"/>
+                <a:cs typeface="맑은 고딕"/>
+              </a:rPr>
+              <a:t>수정</a:t>
+            </a:r>
+          </a:p>
+        </p:txBody>
+      </p:sp>
+      <p:sp>
+        <p:nvSpPr>
+          <p:cNvPr id="11" name="Right Arrow 10"/>
           <p:cNvSpPr/>
           <p:nvPr/>
         </p:nvSpPr>
         <p:spPr>
           <a:xfrm>
-            <a:off x="9303791" y="4557077"/>
-            <a:ext cx="822960" cy="292608"/>
-          </a:xfrm>
-          <a:prstGeom prst="roundRect">
-            <a:avLst>
-              <a:gd name="adj" fmla="val 50000"/>
-            </a:avLst>
+            <a:off x="5967831" y="3854196"/>
+            <a:ext cx="256031" cy="274320"/>
+          </a:xfrm>
+          <a:prstGeom prst="rightArrow">
+            <a:avLst/>
           </a:prstGeom>
           <a:solidFill>
-            <a:srgbClr val="D3D9E1"/>
+            <a:srgbClr val="13294B"/>
           </a:solidFill>
           <a:ln>
             <a:noFill/>
@@ -52212,31 +51875,65 @@
       </p:sp>
       <p:sp>
         <p:nvSpPr>
-          <p:cNvPr id="21" name="TextBox 20"/>
-          <p:cNvSpPr txBox="1"/>
-          <p:nvPr/>
-        </p:nvSpPr>
-        <p:spPr>
-          <a:xfrm>
-            <a:off x="9303791" y="4557077"/>
-            <a:ext cx="822960" cy="292608"/>
-          </a:xfrm>
-          <a:prstGeom prst="rect">
-            <a:avLst/>
-          </a:prstGeom>
-          <a:noFill/>
-        </p:spPr>
-        <p:txBody>
-          <a:bodyPr wrap="square" anchor="ctr"/>
+          <p:cNvPr id="12" name="Rounded Rectangle 11"/>
+          <p:cNvSpPr/>
+          <p:nvPr/>
+        </p:nvSpPr>
+        <p:spPr>
+          <a:xfrm>
+            <a:off x="6287871" y="3009265"/>
+            <a:ext cx="2485567" cy="1964181"/>
+          </a:xfrm>
+          <a:prstGeom prst="roundRect">
+            <a:avLst>
+              <a:gd name="adj" fmla="val 5000"/>
+            </a:avLst>
+          </a:prstGeom>
+          <a:solidFill>
+            <a:srgbClr val="F3F6F9"/>
+          </a:solidFill>
+          <a:ln>
+            <a:noFill/>
+          </a:ln>
+        </p:spPr>
+        <p:txBody>
+          <a:bodyPr rtlCol="0" anchor="ctr"/>
+          <a:lstStyle/>
+          <a:p>
+            <a:pPr algn="ctr"/>
+          </a:p>
+        </p:txBody>
+      </p:sp>
+      <p:sp>
+        <p:nvSpPr>
+          <p:cNvPr id="13" name="TextBox 12"/>
+          <p:cNvSpPr txBox="1"/>
+          <p:nvPr/>
+        </p:nvSpPr>
+        <p:spPr>
+          <a:xfrm>
+            <a:off x="6361023" y="3192145"/>
+            <a:ext cx="2339263" cy="1708149"/>
+          </a:xfrm>
+          <a:prstGeom prst="rect">
+            <a:avLst/>
+          </a:prstGeom>
+          <a:noFill/>
+        </p:spPr>
+        <p:txBody>
+          <a:bodyPr wrap="square" anchor="t"/>
           <a:lstStyle/>
           <a:p>
             <a:pPr algn="ctr" eaLnBrk="0">
               <a:lnSpc>
                 <a:spcPct val="110000"/>
               </a:lnSpc>
-            </a:pPr>
-            <a:r>
-              <a:rPr sz="1200" b="1">
+              <a:spcAft>
+                <a:spcPts val="400"/>
+              </a:spcAft>
+            </a:pPr>
+            <a:r>
+              <a:rPr sz="2000" b="1">
                 <a:solidFill>
                   <a:srgbClr val="13294B"/>
                 </a:solidFill>
@@ -52244,7 +51941,172 @@
                 <a:ea typeface="맑은 고딕"/>
                 <a:cs typeface="맑은 고딕"/>
               </a:rPr>
-              <a:t>판정</a:t>
+              <a:t>저장 파일</a:t>
+            </a:r>
+          </a:p>
+          <a:p>
+            <a:pPr algn="ctr" eaLnBrk="0">
+              <a:lnSpc>
+                <a:spcPct val="110000"/>
+              </a:lnSpc>
+              <a:spcAft>
+                <a:spcPts val="400"/>
+              </a:spcAft>
+            </a:pPr>
+            <a:r>
+              <a:rPr sz="1650" b="0">
+                <a:solidFill>
+                  <a:srgbClr val="1F2A3A"/>
+                </a:solidFill>
+                <a:latin typeface="맑은 고딕"/>
+                <a:ea typeface="맑은 고딕"/>
+                <a:cs typeface="맑은 고딕"/>
+              </a:rPr>
+              <a:t>basics.bpmn</a:t>
+            </a:r>
+          </a:p>
+        </p:txBody>
+      </p:sp>
+      <p:sp>
+        <p:nvSpPr>
+          <p:cNvPr id="14" name="Right Arrow 13"/>
+          <p:cNvSpPr/>
+          <p:nvPr/>
+        </p:nvSpPr>
+        <p:spPr>
+          <a:xfrm>
+            <a:off x="8837447" y="3854196"/>
+            <a:ext cx="256031" cy="274320"/>
+          </a:xfrm>
+          <a:prstGeom prst="rightArrow">
+            <a:avLst/>
+          </a:prstGeom>
+          <a:solidFill>
+            <a:srgbClr val="13294B"/>
+          </a:solidFill>
+          <a:ln>
+            <a:noFill/>
+          </a:ln>
+        </p:spPr>
+        <p:txBody>
+          <a:bodyPr rtlCol="0" anchor="ctr"/>
+          <a:lstStyle/>
+          <a:p>
+            <a:pPr algn="ctr"/>
+          </a:p>
+        </p:txBody>
+      </p:sp>
+      <p:sp>
+        <p:nvSpPr>
+          <p:cNvPr id="15" name="Rounded Rectangle 14"/>
+          <p:cNvSpPr/>
+          <p:nvPr/>
+        </p:nvSpPr>
+        <p:spPr>
+          <a:xfrm>
+            <a:off x="9157487" y="3009265"/>
+            <a:ext cx="2485567" cy="1964181"/>
+          </a:xfrm>
+          <a:prstGeom prst="roundRect">
+            <a:avLst>
+              <a:gd name="adj" fmla="val 5000"/>
+            </a:avLst>
+          </a:prstGeom>
+          <a:solidFill>
+            <a:srgbClr val="F3F6F9"/>
+          </a:solidFill>
+          <a:ln>
+            <a:noFill/>
+          </a:ln>
+        </p:spPr>
+        <p:txBody>
+          <a:bodyPr rtlCol="0" anchor="ctr"/>
+          <a:lstStyle/>
+          <a:p>
+            <a:pPr algn="ctr"/>
+          </a:p>
+        </p:txBody>
+      </p:sp>
+      <p:sp>
+        <p:nvSpPr>
+          <p:cNvPr id="16" name="TextBox 15"/>
+          <p:cNvSpPr txBox="1"/>
+          <p:nvPr/>
+        </p:nvSpPr>
+        <p:spPr>
+          <a:xfrm>
+            <a:off x="9230639" y="3192145"/>
+            <a:ext cx="2339263" cy="1708149"/>
+          </a:xfrm>
+          <a:prstGeom prst="rect">
+            <a:avLst/>
+          </a:prstGeom>
+          <a:noFill/>
+        </p:spPr>
+        <p:txBody>
+          <a:bodyPr wrap="square" anchor="t"/>
+          <a:lstStyle/>
+          <a:p>
+            <a:pPr algn="ctr" eaLnBrk="0">
+              <a:lnSpc>
+                <a:spcPct val="110000"/>
+              </a:lnSpc>
+              <a:spcAft>
+                <a:spcPts val="400"/>
+              </a:spcAft>
+            </a:pPr>
+            <a:r>
+              <a:rPr sz="2000" b="1">
+                <a:solidFill>
+                  <a:srgbClr val="13294B"/>
+                </a:solidFill>
+                <a:latin typeface="맑은 고딕"/>
+                <a:ea typeface="맑은 고딕"/>
+                <a:cs typeface="맑은 고딕"/>
+              </a:rPr>
+              <a:t>다시 열기</a:t>
+            </a:r>
+          </a:p>
+          <a:p>
+            <a:pPr algn="ctr" eaLnBrk="0">
+              <a:lnSpc>
+                <a:spcPct val="110000"/>
+              </a:lnSpc>
+              <a:spcAft>
+                <a:spcPts val="400"/>
+              </a:spcAft>
+            </a:pPr>
+            <a:r>
+              <a:rPr sz="1650" b="0">
+                <a:solidFill>
+                  <a:srgbClr val="1F2A3A"/>
+                </a:solidFill>
+                <a:latin typeface="맑은 고딕"/>
+                <a:ea typeface="맑은 고딕"/>
+                <a:cs typeface="맑은 고딕"/>
+              </a:rPr>
+              <a:t>요소·선·이름</a:t>
+            </a:r>
+          </a:p>
+          <a:p>
+            <a:pPr algn="ctr" eaLnBrk="0">
+              <a:lnSpc>
+                <a:spcPct val="110000"/>
+              </a:lnSpc>
+              <a:spcAft>
+                <a:spcPts val="400"/>
+              </a:spcAft>
+            </a:pPr>
+            <a:r>
+              <a:rPr sz="1650" b="0">
+                <a:solidFill>
+                  <a:srgbClr val="1F2A3A"/>
+                </a:solidFill>
+                <a:latin typeface="맑은 고딕"/>
+                <a:ea typeface="맑은 고딕"/>
+                <a:cs typeface="맑은 고딕"/>
+              </a:rPr>
+              <a:t>유지 확인</a:t>
             </a:r>
           </a:p>
         </p:txBody>
@@ -53590,7 +53452,7 @@
                 <a:ea typeface="맑은 고딕"/>
                 <a:cs typeface="맑은 고딕"/>
               </a:rPr>
-              <a:t>앞 단계의 결과를 이어 받아 흐름과 근거를 확인한다.</a:t>
+              <a:t>승인 흐름을 세 레인의 냉각 대응으로 확장하고 제안·승인·명령·재관측·보고의 책임을 확인한다.</a:t>
             </a:r>
           </a:p>
         </p:txBody>
@@ -53671,112 +53533,16 @@
         </p:nvSpPr>
         <p:spPr>
           <a:xfrm>
-            <a:off x="548640" y="3007487"/>
-            <a:ext cx="2567863" cy="1967737"/>
+            <a:off x="548640" y="3009265"/>
+            <a:ext cx="2485567" cy="1964181"/>
           </a:xfrm>
           <a:prstGeom prst="roundRect">
             <a:avLst>
-              <a:gd name="adj" fmla="val 4000"/>
+              <a:gd name="adj" fmla="val 5000"/>
             </a:avLst>
           </a:prstGeom>
           <a:solidFill>
-            <a:srgbClr val="FFFFFF"/>
-          </a:solidFill>
-          <a:ln w="15875">
-            <a:solidFill>
-              <a:srgbClr val="D3D9E1"/>
-            </a:solidFill>
-          </a:ln>
-        </p:spPr>
-        <p:txBody>
-          <a:bodyPr rtlCol="0" anchor="ctr"/>
-          <a:lstStyle/>
-          <a:p>
-            <a:pPr algn="ctr"/>
-          </a:p>
-        </p:txBody>
-      </p:sp>
-      <p:sp>
-        <p:nvSpPr>
-          <p:cNvPr id="7" name="TextBox 6"/>
-          <p:cNvSpPr txBox="1"/>
-          <p:nvPr/>
-        </p:nvSpPr>
-        <p:spPr>
-          <a:xfrm>
-            <a:off x="713232" y="3208655"/>
-            <a:ext cx="2238679" cy="1263649"/>
-          </a:xfrm>
-          <a:prstGeom prst="rect">
-            <a:avLst/>
-          </a:prstGeom>
-          <a:noFill/>
-        </p:spPr>
-        <p:txBody>
-          <a:bodyPr wrap="square" anchor="t"/>
-          <a:lstStyle/>
-          <a:p>
-            <a:pPr algn="l" eaLnBrk="0">
-              <a:lnSpc>
-                <a:spcPct val="110000"/>
-              </a:lnSpc>
-              <a:spcAft>
-                <a:spcPts val="400"/>
-              </a:spcAft>
-            </a:pPr>
-            <a:r>
-              <a:rPr sz="2100" b="1">
-                <a:solidFill>
-                  <a:srgbClr val="13294B"/>
-                </a:solidFill>
-                <a:latin typeface="맑은 고딕"/>
-                <a:ea typeface="맑은 고딕"/>
-                <a:cs typeface="맑은 고딕"/>
-              </a:rPr>
-              <a:t>쿨러 경보</a:t>
-            </a:r>
-          </a:p>
-          <a:p>
-            <a:pPr algn="l" eaLnBrk="0">
-              <a:lnSpc>
-                <a:spcPct val="110000"/>
-              </a:lnSpc>
-              <a:spcAft>
-                <a:spcPts val="400"/>
-              </a:spcAft>
-            </a:pPr>
-            <a:r>
-              <a:rPr sz="1700" b="0">
-                <a:solidFill>
-                  <a:srgbClr val="1F2A3A"/>
-                </a:solidFill>
-                <a:latin typeface="맑은 고딕"/>
-                <a:ea typeface="맑은 고딕"/>
-                <a:cs typeface="맑은 고딕"/>
-              </a:rPr>
-              <a:t>앞 회차의 진단·제안 에이전트</a:t>
-            </a:r>
-          </a:p>
-        </p:txBody>
-      </p:sp>
-      <p:sp>
-        <p:nvSpPr>
-          <p:cNvPr id="8" name="Rounded Rectangle 7"/>
-          <p:cNvSpPr/>
-          <p:nvPr/>
-        </p:nvSpPr>
-        <p:spPr>
-          <a:xfrm>
-            <a:off x="777240" y="4545457"/>
-            <a:ext cx="822960" cy="292608"/>
-          </a:xfrm>
-          <a:prstGeom prst="roundRect">
-            <a:avLst>
-              <a:gd name="adj" fmla="val 50000"/>
-            </a:avLst>
-          </a:prstGeom>
-          <a:solidFill>
-            <a:srgbClr val="D3D9E1"/>
+            <a:srgbClr val="F3F6F9"/>
           </a:solidFill>
           <a:ln>
             <a:noFill/>
@@ -53792,97 +53558,25 @@
       </p:sp>
       <p:sp>
         <p:nvSpPr>
-          <p:cNvPr id="9" name="TextBox 8"/>
-          <p:cNvSpPr txBox="1"/>
-          <p:nvPr/>
-        </p:nvSpPr>
-        <p:spPr>
-          <a:xfrm>
-            <a:off x="777240" y="4545457"/>
-            <a:ext cx="822960" cy="292608"/>
-          </a:xfrm>
-          <a:prstGeom prst="rect">
-            <a:avLst/>
-          </a:prstGeom>
-          <a:noFill/>
-        </p:spPr>
-        <p:txBody>
-          <a:bodyPr wrap="square" anchor="ctr"/>
+          <p:cNvPr id="7" name="TextBox 6"/>
+          <p:cNvSpPr txBox="1"/>
+          <p:nvPr/>
+        </p:nvSpPr>
+        <p:spPr>
+          <a:xfrm>
+            <a:off x="621792" y="3192145"/>
+            <a:ext cx="2339263" cy="1708149"/>
+          </a:xfrm>
+          <a:prstGeom prst="rect">
+            <a:avLst/>
+          </a:prstGeom>
+          <a:noFill/>
+        </p:spPr>
+        <p:txBody>
+          <a:bodyPr wrap="square" anchor="t"/>
           <a:lstStyle/>
           <a:p>
             <a:pPr algn="ctr" eaLnBrk="0">
-              <a:lnSpc>
-                <a:spcPct val="110000"/>
-              </a:lnSpc>
-            </a:pPr>
-            <a:r>
-              <a:rPr sz="1200" b="1">
-                <a:solidFill>
-                  <a:srgbClr val="13294B"/>
-                </a:solidFill>
-                <a:latin typeface="맑은 고딕"/>
-                <a:ea typeface="맑은 고딕"/>
-                <a:cs typeface="맑은 고딕"/>
-              </a:rPr>
-              <a:t>입력</a:t>
-            </a:r>
-          </a:p>
-        </p:txBody>
-      </p:sp>
-      <p:sp>
-        <p:nvSpPr>
-          <p:cNvPr id="10" name="Rounded Rectangle 9"/>
-          <p:cNvSpPr/>
-          <p:nvPr/>
-        </p:nvSpPr>
-        <p:spPr>
-          <a:xfrm>
-            <a:off x="3390823" y="3007487"/>
-            <a:ext cx="2567863" cy="1967737"/>
-          </a:xfrm>
-          <a:prstGeom prst="roundRect">
-            <a:avLst>
-              <a:gd name="adj" fmla="val 4000"/>
-            </a:avLst>
-          </a:prstGeom>
-          <a:solidFill>
-            <a:srgbClr val="FFFFFF"/>
-          </a:solidFill>
-          <a:ln w="15875">
-            <a:solidFill>
-              <a:srgbClr val="D3D9E1"/>
-            </a:solidFill>
-          </a:ln>
-        </p:spPr>
-        <p:txBody>
-          <a:bodyPr rtlCol="0" anchor="ctr"/>
-          <a:lstStyle/>
-          <a:p>
-            <a:pPr algn="ctr"/>
-          </a:p>
-        </p:txBody>
-      </p:sp>
-      <p:sp>
-        <p:nvSpPr>
-          <p:cNvPr id="11" name="TextBox 10"/>
-          <p:cNvSpPr txBox="1"/>
-          <p:nvPr/>
-        </p:nvSpPr>
-        <p:spPr>
-          <a:xfrm>
-            <a:off x="3555415" y="3208655"/>
-            <a:ext cx="2238679" cy="1263649"/>
-          </a:xfrm>
-          <a:prstGeom prst="rect">
-            <a:avLst/>
-          </a:prstGeom>
-          <a:noFill/>
-        </p:spPr>
-        <p:txBody>
-          <a:bodyPr wrap="square" anchor="t"/>
-          <a:lstStyle/>
-          <a:p>
-            <a:pPr algn="l" eaLnBrk="0">
               <a:lnSpc>
                 <a:spcPct val="110000"/>
               </a:lnSpc>
@@ -53891,7 +53585,7 @@
               </a:spcAft>
             </a:pPr>
             <a:r>
-              <a:rPr sz="2100" b="1">
+              <a:rPr sz="2000" b="1">
                 <a:solidFill>
                   <a:srgbClr val="13294B"/>
                 </a:solidFill>
@@ -53899,11 +53593,11 @@
                 <a:ea typeface="맑은 고딕"/>
                 <a:cs typeface="맑은 고딕"/>
               </a:rPr>
-              <a:t>역할과 순서</a:t>
-            </a:r>
-          </a:p>
-          <a:p>
-            <a:pPr algn="l" eaLnBrk="0">
+              <a:t>쿨러 경보</a:t>
+            </a:r>
+          </a:p>
+          <a:p>
+            <a:pPr algn="ctr" eaLnBrk="0">
               <a:lnSpc>
                 <a:spcPct val="110000"/>
               </a:lnSpc>
@@ -53912,7 +53606,7 @@
               </a:spcAft>
             </a:pPr>
             <a:r>
-              <a:rPr sz="1700" b="0">
+              <a:rPr sz="1650" b="0">
                 <a:solidFill>
                   <a:srgbClr val="1F2A3A"/>
                 </a:solidFill>
@@ -53920,29 +53614,48 @@
                 <a:ea typeface="맑은 고딕"/>
                 <a:cs typeface="맑은 고딕"/>
               </a:rPr>
-              <a:t>에이전트 · 담당자 · 시스템</a:t>
-            </a:r>
-          </a:p>
-        </p:txBody>
-      </p:sp>
-      <p:sp>
-        <p:nvSpPr>
-          <p:cNvPr id="12" name="Rounded Rectangle 11"/>
+              <a:t>앞 회차의 에이전트</a:t>
+            </a:r>
+          </a:p>
+          <a:p>
+            <a:pPr algn="ctr" eaLnBrk="0">
+              <a:lnSpc>
+                <a:spcPct val="110000"/>
+              </a:lnSpc>
+              <a:spcAft>
+                <a:spcPts val="400"/>
+              </a:spcAft>
+            </a:pPr>
+            <a:r>
+              <a:rPr sz="1650" b="0">
+                <a:solidFill>
+                  <a:srgbClr val="1F2A3A"/>
+                </a:solidFill>
+                <a:latin typeface="맑은 고딕"/>
+                <a:ea typeface="맑은 고딕"/>
+                <a:cs typeface="맑은 고딕"/>
+              </a:rPr>
+              <a:t>진단·제안</a:t>
+            </a:r>
+          </a:p>
+        </p:txBody>
+      </p:sp>
+      <p:sp>
+        <p:nvSpPr>
+          <p:cNvPr id="8" name="Right Arrow 7"/>
           <p:cNvSpPr/>
           <p:nvPr/>
         </p:nvSpPr>
         <p:spPr>
           <a:xfrm>
-            <a:off x="3619423" y="4545457"/>
-            <a:ext cx="822960" cy="292608"/>
-          </a:xfrm>
-          <a:prstGeom prst="roundRect">
-            <a:avLst>
-              <a:gd name="adj" fmla="val 50000"/>
-            </a:avLst>
+            <a:off x="3098215" y="3854196"/>
+            <a:ext cx="256031" cy="274320"/>
+          </a:xfrm>
+          <a:prstGeom prst="rightArrow">
+            <a:avLst/>
           </a:prstGeom>
           <a:solidFill>
-            <a:srgbClr val="D3D9E1"/>
+            <a:srgbClr val="13294B"/>
           </a:solidFill>
           <a:ln>
             <a:noFill/>
@@ -53958,157 +53671,22 @@
       </p:sp>
       <p:sp>
         <p:nvSpPr>
-          <p:cNvPr id="13" name="TextBox 12"/>
-          <p:cNvSpPr txBox="1"/>
-          <p:nvPr/>
-        </p:nvSpPr>
-        <p:spPr>
-          <a:xfrm>
-            <a:off x="3619423" y="4545457"/>
-            <a:ext cx="822960" cy="292608"/>
-          </a:xfrm>
-          <a:prstGeom prst="rect">
-            <a:avLst/>
-          </a:prstGeom>
-          <a:noFill/>
-        </p:spPr>
-        <p:txBody>
-          <a:bodyPr wrap="square" anchor="ctr"/>
-          <a:lstStyle/>
-          <a:p>
-            <a:pPr algn="ctr" eaLnBrk="0">
-              <a:lnSpc>
-                <a:spcPct val="110000"/>
-              </a:lnSpc>
-            </a:pPr>
-            <a:r>
-              <a:rPr sz="1200" b="1">
-                <a:solidFill>
-                  <a:srgbClr val="13294B"/>
-                </a:solidFill>
-                <a:latin typeface="맑은 고딕"/>
-                <a:ea typeface="맑은 고딕"/>
-                <a:cs typeface="맑은 고딕"/>
-              </a:rPr>
-              <a:t>범위</a:t>
-            </a:r>
-          </a:p>
-        </p:txBody>
-      </p:sp>
-      <p:sp>
-        <p:nvSpPr>
-          <p:cNvPr id="14" name="Rounded Rectangle 13"/>
+          <p:cNvPr id="9" name="Rounded Rectangle 8"/>
           <p:cNvSpPr/>
           <p:nvPr/>
         </p:nvSpPr>
         <p:spPr>
           <a:xfrm>
-            <a:off x="6233007" y="3007487"/>
-            <a:ext cx="2567863" cy="1967737"/>
+            <a:off x="3418255" y="3009265"/>
+            <a:ext cx="2485567" cy="1964181"/>
           </a:xfrm>
           <a:prstGeom prst="roundRect">
             <a:avLst>
-              <a:gd name="adj" fmla="val 4000"/>
+              <a:gd name="adj" fmla="val 5000"/>
             </a:avLst>
           </a:prstGeom>
           <a:solidFill>
-            <a:srgbClr val="FFFFFF"/>
-          </a:solidFill>
-          <a:ln w="15875">
-            <a:solidFill>
-              <a:srgbClr val="D3D9E1"/>
-            </a:solidFill>
-          </a:ln>
-        </p:spPr>
-        <p:txBody>
-          <a:bodyPr rtlCol="0" anchor="ctr"/>
-          <a:lstStyle/>
-          <a:p>
-            <a:pPr algn="ctr"/>
-          </a:p>
-        </p:txBody>
-      </p:sp>
-      <p:sp>
-        <p:nvSpPr>
-          <p:cNvPr id="15" name="TextBox 14"/>
-          <p:cNvSpPr txBox="1"/>
-          <p:nvPr/>
-        </p:nvSpPr>
-        <p:spPr>
-          <a:xfrm>
-            <a:off x="6397599" y="3208655"/>
-            <a:ext cx="2238679" cy="1263649"/>
-          </a:xfrm>
-          <a:prstGeom prst="rect">
-            <a:avLst/>
-          </a:prstGeom>
-          <a:noFill/>
-        </p:spPr>
-        <p:txBody>
-          <a:bodyPr wrap="square" anchor="t"/>
-          <a:lstStyle/>
-          <a:p>
-            <a:pPr algn="l" eaLnBrk="0">
-              <a:lnSpc>
-                <a:spcPct val="110000"/>
-              </a:lnSpc>
-              <a:spcAft>
-                <a:spcPts val="400"/>
-              </a:spcAft>
-            </a:pPr>
-            <a:r>
-              <a:rPr sz="2100" b="1">
-                <a:solidFill>
-                  <a:srgbClr val="13294B"/>
-                </a:solidFill>
-                <a:latin typeface="맑은 고딕"/>
-                <a:ea typeface="맑은 고딕"/>
-                <a:cs typeface="맑은 고딕"/>
-              </a:rPr>
-              <a:t>기본 흐름</a:t>
-            </a:r>
-          </a:p>
-          <a:p>
-            <a:pPr algn="l" eaLnBrk="0">
-              <a:lnSpc>
-                <a:spcPct val="110000"/>
-              </a:lnSpc>
-              <a:spcAft>
-                <a:spcPts val="400"/>
-              </a:spcAft>
-            </a:pPr>
-            <a:r>
-              <a:rPr sz="1700" b="0">
-                <a:solidFill>
-                  <a:srgbClr val="1F2A3A"/>
-                </a:solidFill>
-                <a:latin typeface="맑은 고딕"/>
-                <a:ea typeface="맑은 고딕"/>
-                <a:cs typeface="맑은 고딕"/>
-              </a:rPr>
-              <a:t>cooling-draft.bpmn</a:t>
-            </a:r>
-          </a:p>
-        </p:txBody>
-      </p:sp>
-      <p:sp>
-        <p:nvSpPr>
-          <p:cNvPr id="16" name="Rounded Rectangle 15"/>
-          <p:cNvSpPr/>
-          <p:nvPr/>
-        </p:nvSpPr>
-        <p:spPr>
-          <a:xfrm>
-            <a:off x="6461607" y="4545457"/>
-            <a:ext cx="822960" cy="292608"/>
-          </a:xfrm>
-          <a:prstGeom prst="roundRect">
-            <a:avLst>
-              <a:gd name="adj" fmla="val 50000"/>
-            </a:avLst>
-          </a:prstGeom>
-          <a:solidFill>
-            <a:srgbClr val="D3D9E1"/>
+            <a:srgbClr val="F3F6F9"/>
           </a:solidFill>
           <a:ln>
             <a:noFill/>
@@ -54124,97 +53702,25 @@
       </p:sp>
       <p:sp>
         <p:nvSpPr>
-          <p:cNvPr id="17" name="TextBox 16"/>
-          <p:cNvSpPr txBox="1"/>
-          <p:nvPr/>
-        </p:nvSpPr>
-        <p:spPr>
-          <a:xfrm>
-            <a:off x="6461607" y="4545457"/>
-            <a:ext cx="822960" cy="292608"/>
-          </a:xfrm>
-          <a:prstGeom prst="rect">
-            <a:avLst/>
-          </a:prstGeom>
-          <a:noFill/>
-        </p:spPr>
-        <p:txBody>
-          <a:bodyPr wrap="square" anchor="ctr"/>
+          <p:cNvPr id="10" name="TextBox 9"/>
+          <p:cNvSpPr txBox="1"/>
+          <p:nvPr/>
+        </p:nvSpPr>
+        <p:spPr>
+          <a:xfrm>
+            <a:off x="3491407" y="3192145"/>
+            <a:ext cx="2339263" cy="1708149"/>
+          </a:xfrm>
+          <a:prstGeom prst="rect">
+            <a:avLst/>
+          </a:prstGeom>
+          <a:noFill/>
+        </p:spPr>
+        <p:txBody>
+          <a:bodyPr wrap="square" anchor="t"/>
           <a:lstStyle/>
           <a:p>
             <a:pPr algn="ctr" eaLnBrk="0">
-              <a:lnSpc>
-                <a:spcPct val="110000"/>
-              </a:lnSpc>
-            </a:pPr>
-            <a:r>
-              <a:rPr sz="1200" b="1">
-                <a:solidFill>
-                  <a:srgbClr val="13294B"/>
-                </a:solidFill>
-                <a:latin typeface="맑은 고딕"/>
-                <a:ea typeface="맑은 고딕"/>
-                <a:cs typeface="맑은 고딕"/>
-              </a:rPr>
-              <a:t>산출물</a:t>
-            </a:r>
-          </a:p>
-        </p:txBody>
-      </p:sp>
-      <p:sp>
-        <p:nvSpPr>
-          <p:cNvPr id="18" name="Rounded Rectangle 17"/>
-          <p:cNvSpPr/>
-          <p:nvPr/>
-        </p:nvSpPr>
-        <p:spPr>
-          <a:xfrm>
-            <a:off x="9075191" y="3007487"/>
-            <a:ext cx="2567863" cy="1967737"/>
-          </a:xfrm>
-          <a:prstGeom prst="roundRect">
-            <a:avLst>
-              <a:gd name="adj" fmla="val 4000"/>
-            </a:avLst>
-          </a:prstGeom>
-          <a:solidFill>
-            <a:srgbClr val="FFFFFF"/>
-          </a:solidFill>
-          <a:ln w="15875">
-            <a:solidFill>
-              <a:srgbClr val="D3D9E1"/>
-            </a:solidFill>
-          </a:ln>
-        </p:spPr>
-        <p:txBody>
-          <a:bodyPr rtlCol="0" anchor="ctr"/>
-          <a:lstStyle/>
-          <a:p>
-            <a:pPr algn="ctr"/>
-          </a:p>
-        </p:txBody>
-      </p:sp>
-      <p:sp>
-        <p:nvSpPr>
-          <p:cNvPr id="19" name="TextBox 18"/>
-          <p:cNvSpPr txBox="1"/>
-          <p:nvPr/>
-        </p:nvSpPr>
-        <p:spPr>
-          <a:xfrm>
-            <a:off x="9239783" y="3208655"/>
-            <a:ext cx="2238679" cy="1263649"/>
-          </a:xfrm>
-          <a:prstGeom prst="rect">
-            <a:avLst/>
-          </a:prstGeom>
-          <a:noFill/>
-        </p:spPr>
-        <p:txBody>
-          <a:bodyPr wrap="square" anchor="t"/>
-          <a:lstStyle/>
-          <a:p>
-            <a:pPr algn="l" eaLnBrk="0">
               <a:lnSpc>
                 <a:spcPct val="110000"/>
               </a:lnSpc>
@@ -54223,7 +53729,7 @@
               </a:spcAft>
             </a:pPr>
             <a:r>
-              <a:rPr sz="2100" b="1">
+              <a:rPr sz="2000" b="1">
                 <a:solidFill>
                   <a:srgbClr val="13294B"/>
                 </a:solidFill>
@@ -54231,11 +53737,11 @@
                 <a:ea typeface="맑은 고딕"/>
                 <a:cs typeface="맑은 고딕"/>
               </a:rPr>
-              <a:t>책임 확인</a:t>
-            </a:r>
-          </a:p>
-          <a:p>
-            <a:pPr algn="l" eaLnBrk="0">
+              <a:t>역할과 순서</a:t>
+            </a:r>
+          </a:p>
+          <a:p>
+            <a:pPr algn="ctr" eaLnBrk="0">
               <a:lnSpc>
                 <a:spcPct val="110000"/>
               </a:lnSpc>
@@ -54244,7 +53750,7 @@
               </a:spcAft>
             </a:pPr>
             <a:r>
-              <a:rPr sz="1700" b="0">
+              <a:rPr sz="1650" b="0">
                 <a:solidFill>
                   <a:srgbClr val="1F2A3A"/>
                 </a:solidFill>
@@ -54252,29 +53758,48 @@
                 <a:ea typeface="맑은 고딕"/>
                 <a:cs typeface="맑은 고딕"/>
               </a:rPr>
-              <a:t>제안 · 승인 · 명령 · 재관측 · 보고</a:t>
-            </a:r>
-          </a:p>
-        </p:txBody>
-      </p:sp>
-      <p:sp>
-        <p:nvSpPr>
-          <p:cNvPr id="20" name="Rounded Rectangle 19"/>
+              <a:t>에이전트·담당자</a:t>
+            </a:r>
+          </a:p>
+          <a:p>
+            <a:pPr algn="ctr" eaLnBrk="0">
+              <a:lnSpc>
+                <a:spcPct val="110000"/>
+              </a:lnSpc>
+              <a:spcAft>
+                <a:spcPts val="400"/>
+              </a:spcAft>
+            </a:pPr>
+            <a:r>
+              <a:rPr sz="1650" b="0">
+                <a:solidFill>
+                  <a:srgbClr val="1F2A3A"/>
+                </a:solidFill>
+                <a:latin typeface="맑은 고딕"/>
+                <a:ea typeface="맑은 고딕"/>
+                <a:cs typeface="맑은 고딕"/>
+              </a:rPr>
+              <a:t>시스템</a:t>
+            </a:r>
+          </a:p>
+        </p:txBody>
+      </p:sp>
+      <p:sp>
+        <p:nvSpPr>
+          <p:cNvPr id="11" name="Right Arrow 10"/>
           <p:cNvSpPr/>
           <p:nvPr/>
         </p:nvSpPr>
         <p:spPr>
           <a:xfrm>
-            <a:off x="9303791" y="4545457"/>
-            <a:ext cx="822960" cy="292608"/>
-          </a:xfrm>
-          <a:prstGeom prst="roundRect">
-            <a:avLst>
-              <a:gd name="adj" fmla="val 50000"/>
-            </a:avLst>
+            <a:off x="5967831" y="3854196"/>
+            <a:ext cx="256031" cy="274320"/>
+          </a:xfrm>
+          <a:prstGeom prst="rightArrow">
+            <a:avLst/>
           </a:prstGeom>
           <a:solidFill>
-            <a:srgbClr val="D3D9E1"/>
+            <a:srgbClr val="13294B"/>
           </a:solidFill>
           <a:ln>
             <a:noFill/>
@@ -54290,31 +53815,65 @@
       </p:sp>
       <p:sp>
         <p:nvSpPr>
-          <p:cNvPr id="21" name="TextBox 20"/>
-          <p:cNvSpPr txBox="1"/>
-          <p:nvPr/>
-        </p:nvSpPr>
-        <p:spPr>
-          <a:xfrm>
-            <a:off x="9303791" y="4545457"/>
-            <a:ext cx="822960" cy="292608"/>
-          </a:xfrm>
-          <a:prstGeom prst="rect">
-            <a:avLst/>
-          </a:prstGeom>
-          <a:noFill/>
-        </p:spPr>
-        <p:txBody>
-          <a:bodyPr wrap="square" anchor="ctr"/>
+          <p:cNvPr id="12" name="Rounded Rectangle 11"/>
+          <p:cNvSpPr/>
+          <p:nvPr/>
+        </p:nvSpPr>
+        <p:spPr>
+          <a:xfrm>
+            <a:off x="6287871" y="3009265"/>
+            <a:ext cx="2485567" cy="1964181"/>
+          </a:xfrm>
+          <a:prstGeom prst="roundRect">
+            <a:avLst>
+              <a:gd name="adj" fmla="val 5000"/>
+            </a:avLst>
+          </a:prstGeom>
+          <a:solidFill>
+            <a:srgbClr val="F3F6F9"/>
+          </a:solidFill>
+          <a:ln>
+            <a:noFill/>
+          </a:ln>
+        </p:spPr>
+        <p:txBody>
+          <a:bodyPr rtlCol="0" anchor="ctr"/>
+          <a:lstStyle/>
+          <a:p>
+            <a:pPr algn="ctr"/>
+          </a:p>
+        </p:txBody>
+      </p:sp>
+      <p:sp>
+        <p:nvSpPr>
+          <p:cNvPr id="13" name="TextBox 12"/>
+          <p:cNvSpPr txBox="1"/>
+          <p:nvPr/>
+        </p:nvSpPr>
+        <p:spPr>
+          <a:xfrm>
+            <a:off x="6361023" y="3192145"/>
+            <a:ext cx="2339263" cy="1708149"/>
+          </a:xfrm>
+          <a:prstGeom prst="rect">
+            <a:avLst/>
+          </a:prstGeom>
+          <a:noFill/>
+        </p:spPr>
+        <p:txBody>
+          <a:bodyPr wrap="square" anchor="t"/>
           <a:lstStyle/>
           <a:p>
             <a:pPr algn="ctr" eaLnBrk="0">
               <a:lnSpc>
                 <a:spcPct val="110000"/>
               </a:lnSpc>
-            </a:pPr>
-            <a:r>
-              <a:rPr sz="1200" b="1">
+              <a:spcAft>
+                <a:spcPts val="400"/>
+              </a:spcAft>
+            </a:pPr>
+            <a:r>
+              <a:rPr sz="2000" b="1">
                 <a:solidFill>
                   <a:srgbClr val="13294B"/>
                 </a:solidFill>
@@ -54322,7 +53881,172 @@
                 <a:ea typeface="맑은 고딕"/>
                 <a:cs typeface="맑은 고딕"/>
               </a:rPr>
-              <a:t>판정</a:t>
+              <a:t>기본 흐름</a:t>
+            </a:r>
+          </a:p>
+          <a:p>
+            <a:pPr algn="ctr" eaLnBrk="0">
+              <a:lnSpc>
+                <a:spcPct val="110000"/>
+              </a:lnSpc>
+              <a:spcAft>
+                <a:spcPts val="400"/>
+              </a:spcAft>
+            </a:pPr>
+            <a:r>
+              <a:rPr sz="1650" b="0">
+                <a:solidFill>
+                  <a:srgbClr val="1F2A3A"/>
+                </a:solidFill>
+                <a:latin typeface="맑은 고딕"/>
+                <a:ea typeface="맑은 고딕"/>
+                <a:cs typeface="맑은 고딕"/>
+              </a:rPr>
+              <a:t>cooling-draft.bpmn</a:t>
+            </a:r>
+          </a:p>
+        </p:txBody>
+      </p:sp>
+      <p:sp>
+        <p:nvSpPr>
+          <p:cNvPr id="14" name="Right Arrow 13"/>
+          <p:cNvSpPr/>
+          <p:nvPr/>
+        </p:nvSpPr>
+        <p:spPr>
+          <a:xfrm>
+            <a:off x="8837447" y="3854196"/>
+            <a:ext cx="256031" cy="274320"/>
+          </a:xfrm>
+          <a:prstGeom prst="rightArrow">
+            <a:avLst/>
+          </a:prstGeom>
+          <a:solidFill>
+            <a:srgbClr val="13294B"/>
+          </a:solidFill>
+          <a:ln>
+            <a:noFill/>
+          </a:ln>
+        </p:spPr>
+        <p:txBody>
+          <a:bodyPr rtlCol="0" anchor="ctr"/>
+          <a:lstStyle/>
+          <a:p>
+            <a:pPr algn="ctr"/>
+          </a:p>
+        </p:txBody>
+      </p:sp>
+      <p:sp>
+        <p:nvSpPr>
+          <p:cNvPr id="15" name="Rounded Rectangle 14"/>
+          <p:cNvSpPr/>
+          <p:nvPr/>
+        </p:nvSpPr>
+        <p:spPr>
+          <a:xfrm>
+            <a:off x="9157487" y="3009265"/>
+            <a:ext cx="2485567" cy="1964181"/>
+          </a:xfrm>
+          <a:prstGeom prst="roundRect">
+            <a:avLst>
+              <a:gd name="adj" fmla="val 5000"/>
+            </a:avLst>
+          </a:prstGeom>
+          <a:solidFill>
+            <a:srgbClr val="F3F6F9"/>
+          </a:solidFill>
+          <a:ln>
+            <a:noFill/>
+          </a:ln>
+        </p:spPr>
+        <p:txBody>
+          <a:bodyPr rtlCol="0" anchor="ctr"/>
+          <a:lstStyle/>
+          <a:p>
+            <a:pPr algn="ctr"/>
+          </a:p>
+        </p:txBody>
+      </p:sp>
+      <p:sp>
+        <p:nvSpPr>
+          <p:cNvPr id="16" name="TextBox 15"/>
+          <p:cNvSpPr txBox="1"/>
+          <p:nvPr/>
+        </p:nvSpPr>
+        <p:spPr>
+          <a:xfrm>
+            <a:off x="9230639" y="3192145"/>
+            <a:ext cx="2339263" cy="1708149"/>
+          </a:xfrm>
+          <a:prstGeom prst="rect">
+            <a:avLst/>
+          </a:prstGeom>
+          <a:noFill/>
+        </p:spPr>
+        <p:txBody>
+          <a:bodyPr wrap="square" anchor="t"/>
+          <a:lstStyle/>
+          <a:p>
+            <a:pPr algn="ctr" eaLnBrk="0">
+              <a:lnSpc>
+                <a:spcPct val="110000"/>
+              </a:lnSpc>
+              <a:spcAft>
+                <a:spcPts val="400"/>
+              </a:spcAft>
+            </a:pPr>
+            <a:r>
+              <a:rPr sz="2000" b="1">
+                <a:solidFill>
+                  <a:srgbClr val="13294B"/>
+                </a:solidFill>
+                <a:latin typeface="맑은 고딕"/>
+                <a:ea typeface="맑은 고딕"/>
+                <a:cs typeface="맑은 고딕"/>
+              </a:rPr>
+              <a:t>책임 확인</a:t>
+            </a:r>
+          </a:p>
+          <a:p>
+            <a:pPr algn="ctr" eaLnBrk="0">
+              <a:lnSpc>
+                <a:spcPct val="110000"/>
+              </a:lnSpc>
+              <a:spcAft>
+                <a:spcPts val="400"/>
+              </a:spcAft>
+            </a:pPr>
+            <a:r>
+              <a:rPr sz="1650" b="0">
+                <a:solidFill>
+                  <a:srgbClr val="1F2A3A"/>
+                </a:solidFill>
+                <a:latin typeface="맑은 고딕"/>
+                <a:ea typeface="맑은 고딕"/>
+                <a:cs typeface="맑은 고딕"/>
+              </a:rPr>
+              <a:t>제안·승인·명령</a:t>
+            </a:r>
+          </a:p>
+          <a:p>
+            <a:pPr algn="ctr" eaLnBrk="0">
+              <a:lnSpc>
+                <a:spcPct val="110000"/>
+              </a:lnSpc>
+              <a:spcAft>
+                <a:spcPts val="400"/>
+              </a:spcAft>
+            </a:pPr>
+            <a:r>
+              <a:rPr sz="1650" b="0">
+                <a:solidFill>
+                  <a:srgbClr val="1F2A3A"/>
+                </a:solidFill>
+                <a:latin typeface="맑은 고딕"/>
+                <a:ea typeface="맑은 고딕"/>
+                <a:cs typeface="맑은 고딕"/>
+              </a:rPr>
+              <a:t>재관측·보고</a:t>
             </a:r>
           </a:p>
         </p:txBody>
@@ -54629,7 +54353,7 @@
                 <a:ea typeface="맑은 고딕"/>
                 <a:cs typeface="맑은 고딕"/>
               </a:rPr>
-              <a:t>앞 단계의 결과를 이어 받아 흐름과 근거를 확인한다.</a:t>
+              <a:t>기본 흐름에 조건·예외를 더해 cooling.bpmn을 만들고, 실행 조건과 기한은 매핑에도 남긴다.</a:t>
             </a:r>
           </a:p>
         </p:txBody>
@@ -54710,112 +54434,16 @@
         </p:nvSpPr>
         <p:spPr>
           <a:xfrm>
-            <a:off x="548640" y="2964878"/>
-            <a:ext cx="2567863" cy="2052954"/>
+            <a:off x="548640" y="2418587"/>
+            <a:ext cx="11094415" cy="347472"/>
           </a:xfrm>
           <a:prstGeom prst="roundRect">
             <a:avLst>
-              <a:gd name="adj" fmla="val 4000"/>
+              <a:gd name="adj" fmla="val 12000"/>
             </a:avLst>
           </a:prstGeom>
           <a:solidFill>
-            <a:srgbClr val="FFFFFF"/>
-          </a:solidFill>
-          <a:ln w="15875">
-            <a:solidFill>
-              <a:srgbClr val="D3D9E1"/>
-            </a:solidFill>
-          </a:ln>
-        </p:spPr>
-        <p:txBody>
-          <a:bodyPr rtlCol="0" anchor="ctr"/>
-          <a:lstStyle/>
-          <a:p>
-            <a:pPr algn="ctr"/>
-          </a:p>
-        </p:txBody>
-      </p:sp>
-      <p:sp>
-        <p:nvSpPr>
-          <p:cNvPr id="7" name="TextBox 6"/>
-          <p:cNvSpPr txBox="1"/>
-          <p:nvPr/>
-        </p:nvSpPr>
-        <p:spPr>
-          <a:xfrm>
-            <a:off x="713232" y="3166046"/>
-            <a:ext cx="2238679" cy="1348866"/>
-          </a:xfrm>
-          <a:prstGeom prst="rect">
-            <a:avLst/>
-          </a:prstGeom>
-          <a:noFill/>
-        </p:spPr>
-        <p:txBody>
-          <a:bodyPr wrap="square" anchor="t"/>
-          <a:lstStyle/>
-          <a:p>
-            <a:pPr algn="l" eaLnBrk="0">
-              <a:lnSpc>
-                <a:spcPct val="110000"/>
-              </a:lnSpc>
-              <a:spcAft>
-                <a:spcPts val="400"/>
-              </a:spcAft>
-            </a:pPr>
-            <a:r>
-              <a:rPr sz="2150" b="1">
-                <a:solidFill>
-                  <a:srgbClr val="13294B"/>
-                </a:solidFill>
-                <a:latin typeface="맑은 고딕"/>
-                <a:ea typeface="맑은 고딕"/>
-                <a:cs typeface="맑은 고딕"/>
-              </a:rPr>
-              <a:t>기본 흐름</a:t>
-            </a:r>
-          </a:p>
-          <a:p>
-            <a:pPr algn="l" eaLnBrk="0">
-              <a:lnSpc>
-                <a:spcPct val="110000"/>
-              </a:lnSpc>
-              <a:spcAft>
-                <a:spcPts val="400"/>
-              </a:spcAft>
-            </a:pPr>
-            <a:r>
-              <a:rPr sz="1750" b="0">
-                <a:solidFill>
-                  <a:srgbClr val="1F2A3A"/>
-                </a:solidFill>
-                <a:latin typeface="맑은 고딕"/>
-                <a:ea typeface="맑은 고딕"/>
-                <a:cs typeface="맑은 고딕"/>
-              </a:rPr>
-              <a:t>승인 · 회복 여부의 갈림</a:t>
-            </a:r>
-          </a:p>
-        </p:txBody>
-      </p:sp>
-      <p:sp>
-        <p:nvSpPr>
-          <p:cNvPr id="8" name="Rounded Rectangle 7"/>
-          <p:cNvSpPr/>
-          <p:nvPr/>
-        </p:nvSpPr>
-        <p:spPr>
-          <a:xfrm>
-            <a:off x="777240" y="4588065"/>
-            <a:ext cx="822960" cy="292608"/>
-          </a:xfrm>
-          <a:prstGeom prst="roundRect">
-            <a:avLst>
-              <a:gd name="adj" fmla="val 50000"/>
-            </a:avLst>
-          </a:prstGeom>
-          <a:solidFill>
-            <a:srgbClr val="D3D9E1"/>
+            <a:srgbClr val="13294B"/>
           </a:solidFill>
           <a:ln>
             <a:noFill/>
@@ -54831,14 +54459,92 @@
       </p:sp>
       <p:sp>
         <p:nvSpPr>
+          <p:cNvPr id="7" name="TextBox 6"/>
+          <p:cNvSpPr txBox="1"/>
+          <p:nvPr/>
+        </p:nvSpPr>
+        <p:spPr>
+          <a:xfrm>
+            <a:off x="685800" y="2418587"/>
+            <a:ext cx="2514600" cy="347472"/>
+          </a:xfrm>
+          <a:prstGeom prst="rect">
+            <a:avLst/>
+          </a:prstGeom>
+          <a:noFill/>
+        </p:spPr>
+        <p:txBody>
+          <a:bodyPr wrap="square" anchor="ctr"/>
+          <a:lstStyle/>
+          <a:p>
+            <a:pPr algn="l" eaLnBrk="0">
+              <a:lnSpc>
+                <a:spcPct val="110000"/>
+              </a:lnSpc>
+            </a:pPr>
+            <a:r>
+              <a:rPr sz="1300" b="1">
+                <a:solidFill>
+                  <a:srgbClr val="FFFFFF"/>
+                </a:solidFill>
+                <a:latin typeface="맑은 고딕"/>
+                <a:ea typeface="맑은 고딕"/>
+                <a:cs typeface="맑은 고딕"/>
+              </a:rPr>
+              <a:t>구분</a:t>
+            </a:r>
+          </a:p>
+        </p:txBody>
+      </p:sp>
+      <p:sp>
+        <p:nvSpPr>
+          <p:cNvPr id="8" name="TextBox 7"/>
+          <p:cNvSpPr txBox="1"/>
+          <p:nvPr/>
+        </p:nvSpPr>
+        <p:spPr>
+          <a:xfrm>
+            <a:off x="3200400" y="2418587"/>
+            <a:ext cx="6248095" cy="347472"/>
+          </a:xfrm>
+          <a:prstGeom prst="rect">
+            <a:avLst/>
+          </a:prstGeom>
+          <a:noFill/>
+        </p:spPr>
+        <p:txBody>
+          <a:bodyPr wrap="square" anchor="ctr"/>
+          <a:lstStyle/>
+          <a:p>
+            <a:pPr algn="l" eaLnBrk="0">
+              <a:lnSpc>
+                <a:spcPct val="110000"/>
+              </a:lnSpc>
+            </a:pPr>
+            <a:r>
+              <a:rPr sz="1300" b="1">
+                <a:solidFill>
+                  <a:srgbClr val="FFFFFF"/>
+                </a:solidFill>
+                <a:latin typeface="맑은 고딕"/>
+                <a:ea typeface="맑은 고딕"/>
+                <a:cs typeface="맑은 고딕"/>
+              </a:rPr>
+              <a:t>조건과 경로</a:t>
+            </a:r>
+          </a:p>
+        </p:txBody>
+      </p:sp>
+      <p:sp>
+        <p:nvSpPr>
           <p:cNvPr id="9" name="TextBox 8"/>
           <p:cNvSpPr txBox="1"/>
           <p:nvPr/>
         </p:nvSpPr>
         <p:spPr>
           <a:xfrm>
-            <a:off x="777240" y="4588065"/>
-            <a:ext cx="822960" cy="292608"/>
+            <a:off x="9448495" y="2418587"/>
+            <a:ext cx="2194560" cy="347472"/>
           </a:xfrm>
           <a:prstGeom prst="rect">
             <a:avLst/>
@@ -54849,21 +54555,21 @@
           <a:bodyPr wrap="square" anchor="ctr"/>
           <a:lstStyle/>
           <a:p>
-            <a:pPr algn="ctr" eaLnBrk="0">
-              <a:lnSpc>
-                <a:spcPct val="110000"/>
-              </a:lnSpc>
-            </a:pPr>
-            <a:r>
-              <a:rPr sz="1200" b="1">
-                <a:solidFill>
-                  <a:srgbClr val="13294B"/>
-                </a:solidFill>
-                <a:latin typeface="맑은 고딕"/>
-                <a:ea typeface="맑은 고딕"/>
-                <a:cs typeface="맑은 고딕"/>
-              </a:rPr>
-              <a:t>입력</a:t>
+            <a:pPr algn="l" eaLnBrk="0">
+              <a:lnSpc>
+                <a:spcPct val="110000"/>
+              </a:lnSpc>
+            </a:pPr>
+            <a:r>
+              <a:rPr sz="1300" b="1">
+                <a:solidFill>
+                  <a:srgbClr val="FFFFFF"/>
+                </a:solidFill>
+                <a:latin typeface="맑은 고딕"/>
+                <a:ea typeface="맑은 고딕"/>
+                <a:cs typeface="맑은 고딕"/>
+              </a:rPr>
+              <a:t>확인할 경계</a:t>
             </a:r>
           </a:p>
         </p:txBody>
@@ -54876,112 +54582,16 @@
         </p:nvSpPr>
         <p:spPr>
           <a:xfrm>
-            <a:off x="3390823" y="2964878"/>
-            <a:ext cx="2567863" cy="2052954"/>
+            <a:off x="548640" y="2852927"/>
+            <a:ext cx="11094415" cy="850392"/>
           </a:xfrm>
           <a:prstGeom prst="roundRect">
             <a:avLst>
-              <a:gd name="adj" fmla="val 4000"/>
+              <a:gd name="adj" fmla="val 8000"/>
             </a:avLst>
           </a:prstGeom>
           <a:solidFill>
-            <a:srgbClr val="FFFFFF"/>
-          </a:solidFill>
-          <a:ln w="15875">
-            <a:solidFill>
-              <a:srgbClr val="D3D9E1"/>
-            </a:solidFill>
-          </a:ln>
-        </p:spPr>
-        <p:txBody>
-          <a:bodyPr rtlCol="0" anchor="ctr"/>
-          <a:lstStyle/>
-          <a:p>
-            <a:pPr algn="ctr"/>
-          </a:p>
-        </p:txBody>
-      </p:sp>
-      <p:sp>
-        <p:nvSpPr>
-          <p:cNvPr id="11" name="TextBox 10"/>
-          <p:cNvSpPr txBox="1"/>
-          <p:nvPr/>
-        </p:nvSpPr>
-        <p:spPr>
-          <a:xfrm>
-            <a:off x="3555415" y="3166046"/>
-            <a:ext cx="2238679" cy="1348866"/>
-          </a:xfrm>
-          <a:prstGeom prst="rect">
-            <a:avLst/>
-          </a:prstGeom>
-          <a:noFill/>
-        </p:spPr>
-        <p:txBody>
-          <a:bodyPr wrap="square" anchor="t"/>
-          <a:lstStyle/>
-          <a:p>
-            <a:pPr algn="l" eaLnBrk="0">
-              <a:lnSpc>
-                <a:spcPct val="110000"/>
-              </a:lnSpc>
-              <a:spcAft>
-                <a:spcPts val="400"/>
-              </a:spcAft>
-            </a:pPr>
-            <a:r>
-              <a:rPr sz="2150" b="1">
-                <a:solidFill>
-                  <a:srgbClr val="13294B"/>
-                </a:solidFill>
-                <a:latin typeface="맑은 고딕"/>
-                <a:ea typeface="맑은 고딕"/>
-                <a:cs typeface="맑은 고딕"/>
-              </a:rPr>
-              <a:t>예외 처리</a:t>
-            </a:r>
-          </a:p>
-          <a:p>
-            <a:pPr algn="l" eaLnBrk="0">
-              <a:lnSpc>
-                <a:spcPct val="110000"/>
-              </a:lnSpc>
-              <a:spcAft>
-                <a:spcPts val="400"/>
-              </a:spcAft>
-            </a:pPr>
-            <a:r>
-              <a:rPr sz="1750" b="0">
-                <a:solidFill>
-                  <a:srgbClr val="1F2A3A"/>
-                </a:solidFill>
-                <a:latin typeface="맑은 고딕"/>
-                <a:ea typeface="맑은 고딕"/>
-                <a:cs typeface="맑은 고딕"/>
-              </a:rPr>
-              <a:t>거절 종결 · 승인 지연 알림</a:t>
-            </a:r>
-          </a:p>
-        </p:txBody>
-      </p:sp>
-      <p:sp>
-        <p:nvSpPr>
-          <p:cNvPr id="12" name="Rounded Rectangle 11"/>
-          <p:cNvSpPr/>
-          <p:nvPr/>
-        </p:nvSpPr>
-        <p:spPr>
-          <a:xfrm>
-            <a:off x="3619423" y="4588065"/>
-            <a:ext cx="822960" cy="292608"/>
-          </a:xfrm>
-          <a:prstGeom prst="roundRect">
-            <a:avLst>
-              <a:gd name="adj" fmla="val 50000"/>
-            </a:avLst>
-          </a:prstGeom>
-          <a:solidFill>
-            <a:srgbClr val="D3D9E1"/>
+            <a:srgbClr val="F3F6F9"/>
           </a:solidFill>
           <a:ln>
             <a:noFill/>
@@ -54997,14 +54607,110 @@
       </p:sp>
       <p:sp>
         <p:nvSpPr>
+          <p:cNvPr id="11" name="TextBox 10"/>
+          <p:cNvSpPr txBox="1"/>
+          <p:nvPr/>
+        </p:nvSpPr>
+        <p:spPr>
+          <a:xfrm>
+            <a:off x="685800" y="2820923"/>
+            <a:ext cx="2514600" cy="914400"/>
+          </a:xfrm>
+          <a:prstGeom prst="rect">
+            <a:avLst/>
+          </a:prstGeom>
+          <a:noFill/>
+        </p:spPr>
+        <p:txBody>
+          <a:bodyPr wrap="square" anchor="ctr"/>
+          <a:lstStyle/>
+          <a:p>
+            <a:pPr algn="l" eaLnBrk="0">
+              <a:lnSpc>
+                <a:spcPct val="110000"/>
+              </a:lnSpc>
+            </a:pPr>
+            <a:r>
+              <a:rPr sz="1600" b="1">
+                <a:solidFill>
+                  <a:srgbClr val="13294B"/>
+                </a:solidFill>
+                <a:latin typeface="맑은 고딕"/>
+                <a:ea typeface="맑은 고딕"/>
+                <a:cs typeface="맑은 고딕"/>
+              </a:rPr>
+              <a:t>승인 · 거절</a:t>
+            </a:r>
+          </a:p>
+        </p:txBody>
+      </p:sp>
+      <p:sp>
+        <p:nvSpPr>
+          <p:cNvPr id="12" name="TextBox 11"/>
+          <p:cNvSpPr txBox="1"/>
+          <p:nvPr/>
+        </p:nvSpPr>
+        <p:spPr>
+          <a:xfrm>
+            <a:off x="3200400" y="2820923"/>
+            <a:ext cx="6156655" cy="914400"/>
+          </a:xfrm>
+          <a:prstGeom prst="rect">
+            <a:avLst/>
+          </a:prstGeom>
+          <a:noFill/>
+        </p:spPr>
+        <p:txBody>
+          <a:bodyPr wrap="square" anchor="ctr"/>
+          <a:lstStyle/>
+          <a:p>
+            <a:pPr algn="l" eaLnBrk="0">
+              <a:lnSpc>
+                <a:spcPct val="110000"/>
+              </a:lnSpc>
+            </a:pPr>
+            <a:r>
+              <a:rPr sz="1400" b="0">
+                <a:solidFill>
+                  <a:srgbClr val="1F2A3A"/>
+                </a:solidFill>
+                <a:latin typeface="맑은 고딕"/>
+                <a:ea typeface="맑은 고딕"/>
+                <a:cs typeface="맑은 고딕"/>
+              </a:rPr>
+              <a:t>승인 → 냉각 명령</a:t>
+            </a:r>
+          </a:p>
+          <a:p>
+            <a:pPr algn="l" eaLnBrk="0">
+              <a:lnSpc>
+                <a:spcPct val="110000"/>
+              </a:lnSpc>
+            </a:pPr>
+            <a:r>
+              <a:rPr sz="1400" b="0">
+                <a:solidFill>
+                  <a:srgbClr val="1F2A3A"/>
+                </a:solidFill>
+                <a:latin typeface="맑은 고딕"/>
+                <a:ea typeface="맑은 고딕"/>
+                <a:cs typeface="맑은 고딕"/>
+              </a:rPr>
+              <a:t>그 밖의 경우 → 거절 보고·종결</a:t>
+            </a:r>
+          </a:p>
+        </p:txBody>
+      </p:sp>
+      <p:sp>
+        <p:nvSpPr>
           <p:cNvPr id="13" name="TextBox 12"/>
           <p:cNvSpPr txBox="1"/>
           <p:nvPr/>
         </p:nvSpPr>
         <p:spPr>
           <a:xfrm>
-            <a:off x="3619423" y="4588065"/>
-            <a:ext cx="822960" cy="292608"/>
+            <a:off x="9448495" y="2820923"/>
+            <a:ext cx="2103120" cy="914400"/>
           </a:xfrm>
           <a:prstGeom prst="rect">
             <a:avLst/>
@@ -55015,21 +54721,21 @@
           <a:bodyPr wrap="square" anchor="ctr"/>
           <a:lstStyle/>
           <a:p>
-            <a:pPr algn="ctr" eaLnBrk="0">
-              <a:lnSpc>
-                <a:spcPct val="110000"/>
-              </a:lnSpc>
-            </a:pPr>
-            <a:r>
-              <a:rPr sz="1200" b="1">
-                <a:solidFill>
-                  <a:srgbClr val="13294B"/>
-                </a:solidFill>
-                <a:latin typeface="맑은 고딕"/>
-                <a:ea typeface="맑은 고딕"/>
-                <a:cs typeface="맑은 고딕"/>
-              </a:rPr>
-              <a:t>범위</a:t>
+            <a:pPr algn="l" eaLnBrk="0">
+              <a:lnSpc>
+                <a:spcPct val="110000"/>
+              </a:lnSpc>
+            </a:pPr>
+            <a:r>
+              <a:rPr sz="1250" b="1">
+                <a:solidFill>
+                  <a:srgbClr val="556175"/>
+                </a:solidFill>
+                <a:latin typeface="맑은 고딕"/>
+                <a:ea typeface="맑은 고딕"/>
+                <a:cs typeface="맑은 고딕"/>
+              </a:rPr>
+              <a:t>거절 경로에 명령이 없다</a:t>
             </a:r>
           </a:p>
         </p:txBody>
@@ -55042,112 +54748,16 @@
         </p:nvSpPr>
         <p:spPr>
           <a:xfrm>
-            <a:off x="6233007" y="2964878"/>
-            <a:ext cx="2567863" cy="2052954"/>
+            <a:off x="548640" y="3767327"/>
+            <a:ext cx="11094415" cy="850392"/>
           </a:xfrm>
           <a:prstGeom prst="roundRect">
             <a:avLst>
-              <a:gd name="adj" fmla="val 4000"/>
+              <a:gd name="adj" fmla="val 8000"/>
             </a:avLst>
           </a:prstGeom>
           <a:solidFill>
-            <a:srgbClr val="FFFFFF"/>
-          </a:solidFill>
-          <a:ln w="15875">
-            <a:solidFill>
-              <a:srgbClr val="D3D9E1"/>
-            </a:solidFill>
-          </a:ln>
-        </p:spPr>
-        <p:txBody>
-          <a:bodyPr rtlCol="0" anchor="ctr"/>
-          <a:lstStyle/>
-          <a:p>
-            <a:pPr algn="ctr"/>
-          </a:p>
-        </p:txBody>
-      </p:sp>
-      <p:sp>
-        <p:nvSpPr>
-          <p:cNvPr id="15" name="TextBox 14"/>
-          <p:cNvSpPr txBox="1"/>
-          <p:nvPr/>
-        </p:nvSpPr>
-        <p:spPr>
-          <a:xfrm>
-            <a:off x="6397599" y="3166046"/>
-            <a:ext cx="2238679" cy="1348866"/>
-          </a:xfrm>
-          <a:prstGeom prst="rect">
-            <a:avLst/>
-          </a:prstGeom>
-          <a:noFill/>
-        </p:spPr>
-        <p:txBody>
-          <a:bodyPr wrap="square" anchor="t"/>
-          <a:lstStyle/>
-          <a:p>
-            <a:pPr algn="l" eaLnBrk="0">
-              <a:lnSpc>
-                <a:spcPct val="110000"/>
-              </a:lnSpc>
-              <a:spcAft>
-                <a:spcPts val="400"/>
-              </a:spcAft>
-            </a:pPr>
-            <a:r>
-              <a:rPr sz="2150" b="1">
-                <a:solidFill>
-                  <a:srgbClr val="13294B"/>
-                </a:solidFill>
-                <a:latin typeface="맑은 고딕"/>
-                <a:ea typeface="맑은 고딕"/>
-                <a:cs typeface="맑은 고딕"/>
-              </a:rPr>
-              <a:t>조건을 갖춘 흐름</a:t>
-            </a:r>
-          </a:p>
-          <a:p>
-            <a:pPr algn="l" eaLnBrk="0">
-              <a:lnSpc>
-                <a:spcPct val="110000"/>
-              </a:lnSpc>
-              <a:spcAft>
-                <a:spcPts val="400"/>
-              </a:spcAft>
-            </a:pPr>
-            <a:r>
-              <a:rPr sz="1750" b="0">
-                <a:solidFill>
-                  <a:srgbClr val="1F2A3A"/>
-                </a:solidFill>
-                <a:latin typeface="맑은 고딕"/>
-                <a:ea typeface="맑은 고딕"/>
-                <a:cs typeface="맑은 고딕"/>
-              </a:rPr>
-              <a:t>cooling.bpmn</a:t>
-            </a:r>
-          </a:p>
-        </p:txBody>
-      </p:sp>
-      <p:sp>
-        <p:nvSpPr>
-          <p:cNvPr id="16" name="Rounded Rectangle 15"/>
-          <p:cNvSpPr/>
-          <p:nvPr/>
-        </p:nvSpPr>
-        <p:spPr>
-          <a:xfrm>
-            <a:off x="6461607" y="4588065"/>
-            <a:ext cx="822960" cy="292608"/>
-          </a:xfrm>
-          <a:prstGeom prst="roundRect">
-            <a:avLst>
-              <a:gd name="adj" fmla="val 50000"/>
-            </a:avLst>
-          </a:prstGeom>
-          <a:solidFill>
-            <a:srgbClr val="D3D9E1"/>
+            <a:srgbClr val="F3F6F9"/>
           </a:solidFill>
           <a:ln>
             <a:noFill/>
@@ -55163,14 +54773,110 @@
       </p:sp>
       <p:sp>
         <p:nvSpPr>
+          <p:cNvPr id="15" name="TextBox 14"/>
+          <p:cNvSpPr txBox="1"/>
+          <p:nvPr/>
+        </p:nvSpPr>
+        <p:spPr>
+          <a:xfrm>
+            <a:off x="685800" y="3735323"/>
+            <a:ext cx="2514600" cy="914400"/>
+          </a:xfrm>
+          <a:prstGeom prst="rect">
+            <a:avLst/>
+          </a:prstGeom>
+          <a:noFill/>
+        </p:spPr>
+        <p:txBody>
+          <a:bodyPr wrap="square" anchor="ctr"/>
+          <a:lstStyle/>
+          <a:p>
+            <a:pPr algn="l" eaLnBrk="0">
+              <a:lnSpc>
+                <a:spcPct val="110000"/>
+              </a:lnSpc>
+            </a:pPr>
+            <a:r>
+              <a:rPr sz="1600" b="1">
+                <a:solidFill>
+                  <a:srgbClr val="13294B"/>
+                </a:solidFill>
+                <a:latin typeface="맑은 고딕"/>
+                <a:ea typeface="맑은 고딕"/>
+                <a:cs typeface="맑은 고딕"/>
+              </a:rPr>
+              <a:t>회복 · 미달</a:t>
+            </a:r>
+          </a:p>
+        </p:txBody>
+      </p:sp>
+      <p:sp>
+        <p:nvSpPr>
+          <p:cNvPr id="16" name="TextBox 15"/>
+          <p:cNvSpPr txBox="1"/>
+          <p:nvPr/>
+        </p:nvSpPr>
+        <p:spPr>
+          <a:xfrm>
+            <a:off x="3200400" y="3735323"/>
+            <a:ext cx="6156655" cy="914400"/>
+          </a:xfrm>
+          <a:prstGeom prst="rect">
+            <a:avLst/>
+          </a:prstGeom>
+          <a:noFill/>
+        </p:spPr>
+        <p:txBody>
+          <a:bodyPr wrap="square" anchor="ctr"/>
+          <a:lstStyle/>
+          <a:p>
+            <a:pPr algn="l" eaLnBrk="0">
+              <a:lnSpc>
+                <a:spcPct val="110000"/>
+              </a:lnSpc>
+            </a:pPr>
+            <a:r>
+              <a:rPr sz="1400" b="0">
+                <a:solidFill>
+                  <a:srgbClr val="1F2A3A"/>
+                </a:solidFill>
+                <a:latin typeface="맑은 고딕"/>
+                <a:ea typeface="맑은 고딕"/>
+                <a:cs typeface="맑은 고딕"/>
+              </a:rPr>
+              <a:t>회복 → 작업지시·정상 보고</a:t>
+            </a:r>
+          </a:p>
+          <a:p>
+            <a:pPr algn="l" eaLnBrk="0">
+              <a:lnSpc>
+                <a:spcPct val="110000"/>
+              </a:lnSpc>
+            </a:pPr>
+            <a:r>
+              <a:rPr sz="1400" b="0">
+                <a:solidFill>
+                  <a:srgbClr val="1F2A3A"/>
+                </a:solidFill>
+                <a:latin typeface="맑은 고딕"/>
+                <a:ea typeface="맑은 고딕"/>
+                <a:cs typeface="맑은 고딕"/>
+              </a:rPr>
+              <a:t>그 밖의 경우 → 미달 보고</a:t>
+            </a:r>
+          </a:p>
+        </p:txBody>
+      </p:sp>
+      <p:sp>
+        <p:nvSpPr>
           <p:cNvPr id="17" name="TextBox 16"/>
           <p:cNvSpPr txBox="1"/>
           <p:nvPr/>
         </p:nvSpPr>
         <p:spPr>
           <a:xfrm>
-            <a:off x="6461607" y="4588065"/>
-            <a:ext cx="822960" cy="292608"/>
+            <a:off x="9448495" y="3735323"/>
+            <a:ext cx="2103120" cy="914400"/>
           </a:xfrm>
           <a:prstGeom prst="rect">
             <a:avLst/>
@@ -55181,21 +54887,21 @@
           <a:bodyPr wrap="square" anchor="ctr"/>
           <a:lstStyle/>
           <a:p>
-            <a:pPr algn="ctr" eaLnBrk="0">
-              <a:lnSpc>
-                <a:spcPct val="110000"/>
-              </a:lnSpc>
-            </a:pPr>
-            <a:r>
-              <a:rPr sz="1200" b="1">
-                <a:solidFill>
-                  <a:srgbClr val="13294B"/>
-                </a:solidFill>
-                <a:latin typeface="맑은 고딕"/>
-                <a:ea typeface="맑은 고딕"/>
-                <a:cs typeface="맑은 고딕"/>
-              </a:rPr>
-              <a:t>산출물</a:t>
+            <a:pPr algn="l" eaLnBrk="0">
+              <a:lnSpc>
+                <a:spcPct val="110000"/>
+              </a:lnSpc>
+            </a:pPr>
+            <a:r>
+              <a:rPr sz="1250" b="1">
+                <a:solidFill>
+                  <a:srgbClr val="556175"/>
+                </a:solidFill>
+                <a:latin typeface="맑은 고딕"/>
+                <a:ea typeface="맑은 고딕"/>
+                <a:cs typeface="맑은 고딕"/>
+              </a:rPr>
+              <a:t>보고 결과를 구별한다</a:t>
             </a:r>
           </a:p>
         </p:txBody>
@@ -55208,112 +54914,16 @@
         </p:nvSpPr>
         <p:spPr>
           <a:xfrm>
-            <a:off x="9075191" y="2964878"/>
-            <a:ext cx="2567863" cy="2052954"/>
+            <a:off x="548640" y="4681727"/>
+            <a:ext cx="11094415" cy="850392"/>
           </a:xfrm>
           <a:prstGeom prst="roundRect">
             <a:avLst>
-              <a:gd name="adj" fmla="val 4000"/>
+              <a:gd name="adj" fmla="val 8000"/>
             </a:avLst>
           </a:prstGeom>
           <a:solidFill>
-            <a:srgbClr val="FFFFFF"/>
-          </a:solidFill>
-          <a:ln w="15875">
-            <a:solidFill>
-              <a:srgbClr val="D3D9E1"/>
-            </a:solidFill>
-          </a:ln>
-        </p:spPr>
-        <p:txBody>
-          <a:bodyPr rtlCol="0" anchor="ctr"/>
-          <a:lstStyle/>
-          <a:p>
-            <a:pPr algn="ctr"/>
-          </a:p>
-        </p:txBody>
-      </p:sp>
-      <p:sp>
-        <p:nvSpPr>
-          <p:cNvPr id="19" name="TextBox 18"/>
-          <p:cNvSpPr txBox="1"/>
-          <p:nvPr/>
-        </p:nvSpPr>
-        <p:spPr>
-          <a:xfrm>
-            <a:off x="9239783" y="3166046"/>
-            <a:ext cx="2238679" cy="1348866"/>
-          </a:xfrm>
-          <a:prstGeom prst="rect">
-            <a:avLst/>
-          </a:prstGeom>
-          <a:noFill/>
-        </p:spPr>
-        <p:txBody>
-          <a:bodyPr wrap="square" anchor="t"/>
-          <a:lstStyle/>
-          <a:p>
-            <a:pPr algn="l" eaLnBrk="0">
-              <a:lnSpc>
-                <a:spcPct val="110000"/>
-              </a:lnSpc>
-              <a:spcAft>
-                <a:spcPts val="400"/>
-              </a:spcAft>
-            </a:pPr>
-            <a:r>
-              <a:rPr sz="2150" b="1">
-                <a:solidFill>
-                  <a:srgbClr val="13294B"/>
-                </a:solidFill>
-                <a:latin typeface="맑은 고딕"/>
-                <a:ea typeface="맑은 고딕"/>
-                <a:cs typeface="맑은 고딕"/>
-              </a:rPr>
-              <a:t>경계 확인</a:t>
-            </a:r>
-          </a:p>
-          <a:p>
-            <a:pPr algn="l" eaLnBrk="0">
-              <a:lnSpc>
-                <a:spcPct val="110000"/>
-              </a:lnSpc>
-              <a:spcAft>
-                <a:spcPts val="400"/>
-              </a:spcAft>
-            </a:pPr>
-            <a:r>
-              <a:rPr sz="1750" b="0">
-                <a:solidFill>
-                  <a:srgbClr val="1F2A3A"/>
-                </a:solidFill>
-                <a:latin typeface="맑은 고딕"/>
-                <a:ea typeface="맑은 고딕"/>
-                <a:cs typeface="맑은 고딕"/>
-              </a:rPr>
-              <a:t>거절에 명령 없음 · 알림 뒤 승인 대기</a:t>
-            </a:r>
-          </a:p>
-        </p:txBody>
-      </p:sp>
-      <p:sp>
-        <p:nvSpPr>
-          <p:cNvPr id="20" name="Rounded Rectangle 19"/>
-          <p:cNvSpPr/>
-          <p:nvPr/>
-        </p:nvSpPr>
-        <p:spPr>
-          <a:xfrm>
-            <a:off x="9303791" y="4588065"/>
-            <a:ext cx="822960" cy="292608"/>
-          </a:xfrm>
-          <a:prstGeom prst="roundRect">
-            <a:avLst>
-              <a:gd name="adj" fmla="val 50000"/>
-            </a:avLst>
-          </a:prstGeom>
-          <a:solidFill>
-            <a:srgbClr val="D3D9E1"/>
+            <a:srgbClr val="F3F6F9"/>
           </a:solidFill>
           <a:ln>
             <a:noFill/>
@@ -55329,14 +54939,92 @@
       </p:sp>
       <p:sp>
         <p:nvSpPr>
+          <p:cNvPr id="19" name="TextBox 18"/>
+          <p:cNvSpPr txBox="1"/>
+          <p:nvPr/>
+        </p:nvSpPr>
+        <p:spPr>
+          <a:xfrm>
+            <a:off x="685800" y="4649723"/>
+            <a:ext cx="2514600" cy="914400"/>
+          </a:xfrm>
+          <a:prstGeom prst="rect">
+            <a:avLst/>
+          </a:prstGeom>
+          <a:noFill/>
+        </p:spPr>
+        <p:txBody>
+          <a:bodyPr wrap="square" anchor="ctr"/>
+          <a:lstStyle/>
+          <a:p>
+            <a:pPr algn="l" eaLnBrk="0">
+              <a:lnSpc>
+                <a:spcPct val="110000"/>
+              </a:lnSpc>
+            </a:pPr>
+            <a:r>
+              <a:rPr sz="1600" b="1">
+                <a:solidFill>
+                  <a:srgbClr val="13294B"/>
+                </a:solidFill>
+                <a:latin typeface="맑은 고딕"/>
+                <a:ea typeface="맑은 고딕"/>
+                <a:cs typeface="맑은 고딕"/>
+              </a:rPr>
+              <a:t>승인 지연</a:t>
+            </a:r>
+          </a:p>
+        </p:txBody>
+      </p:sp>
+      <p:sp>
+        <p:nvSpPr>
+          <p:cNvPr id="20" name="TextBox 19"/>
+          <p:cNvSpPr txBox="1"/>
+          <p:nvPr/>
+        </p:nvSpPr>
+        <p:spPr>
+          <a:xfrm>
+            <a:off x="3200400" y="4649723"/>
+            <a:ext cx="6156655" cy="914400"/>
+          </a:xfrm>
+          <a:prstGeom prst="rect">
+            <a:avLst/>
+          </a:prstGeom>
+          <a:noFill/>
+        </p:spPr>
+        <p:txBody>
+          <a:bodyPr wrap="square" anchor="ctr"/>
+          <a:lstStyle/>
+          <a:p>
+            <a:pPr algn="l" eaLnBrk="0">
+              <a:lnSpc>
+                <a:spcPct val="110000"/>
+              </a:lnSpc>
+            </a:pPr>
+            <a:r>
+              <a:rPr sz="1400" b="0">
+                <a:solidFill>
+                  <a:srgbClr val="1F2A3A"/>
+                </a:solidFill>
+                <a:latin typeface="맑은 고딕"/>
+                <a:ea typeface="맑은 고딕"/>
+                <a:cs typeface="맑은 고딕"/>
+              </a:rPr>
+              <a:t>비중단형 경계 타이머 PT10M → 지연 알림</a:t>
+            </a:r>
+          </a:p>
+        </p:txBody>
+      </p:sp>
+      <p:sp>
+        <p:nvSpPr>
           <p:cNvPr id="21" name="TextBox 20"/>
           <p:cNvSpPr txBox="1"/>
           <p:nvPr/>
         </p:nvSpPr>
         <p:spPr>
           <a:xfrm>
-            <a:off x="9303791" y="4588065"/>
-            <a:ext cx="822960" cy="292608"/>
+            <a:off x="9448495" y="4649723"/>
+            <a:ext cx="2103120" cy="914400"/>
           </a:xfrm>
           <a:prstGeom prst="rect">
             <a:avLst/>
@@ -55347,21 +55035,21 @@
           <a:bodyPr wrap="square" anchor="ctr"/>
           <a:lstStyle/>
           <a:p>
-            <a:pPr algn="ctr" eaLnBrk="0">
-              <a:lnSpc>
-                <a:spcPct val="110000"/>
-              </a:lnSpc>
-            </a:pPr>
-            <a:r>
-              <a:rPr sz="1200" b="1">
-                <a:solidFill>
-                  <a:srgbClr val="13294B"/>
-                </a:solidFill>
-                <a:latin typeface="맑은 고딕"/>
-                <a:ea typeface="맑은 고딕"/>
-                <a:cs typeface="맑은 고딕"/>
-              </a:rPr>
-              <a:t>판정</a:t>
+            <a:pPr algn="l" eaLnBrk="0">
+              <a:lnSpc>
+                <a:spcPct val="110000"/>
+              </a:lnSpc>
+            </a:pPr>
+            <a:r>
+              <a:rPr sz="1250" b="1">
+                <a:solidFill>
+                  <a:srgbClr val="556175"/>
+                </a:solidFill>
+                <a:latin typeface="맑은 고딕"/>
+                <a:ea typeface="맑은 고딕"/>
+                <a:cs typeface="맑은 고딕"/>
+              </a:rPr>
+              <a:t>알림 뒤에도 승인 대기</a:t>
             </a:r>
           </a:p>
         </p:txBody>
@@ -55668,7 +55356,7 @@
                 <a:ea typeface="맑은 고딕"/>
                 <a:cs typeface="맑은 고딕"/>
               </a:rPr>
-              <a:t>앞 단계의 결과를 이어 받아 흐름과 근거를 확인한다.</a:t>
+              <a:t>참조의 연결 값을 내 BPMN 요소 ID에 맞춰 mapping.json으로 정리하고 모든 작업의 연결을 대조한다.</a:t>
             </a:r>
           </a:p>
         </p:txBody>
@@ -55981,7 +55669,7 @@
             </a:r>
           </a:p>
           <a:p>
-            <a:pPr algn="l" eaLnBrk="0">
+            <a:pPr algn="l" eaLnBrk="0" marL="200025" indent="-200025">
               <a:lnSpc>
                 <a:spcPct val="110000"/>
               </a:lnSpc>
@@ -55998,7 +55686,28 @@
                 <a:ea typeface="맑은 고딕"/>
                 <a:cs typeface="맑은 고딕"/>
               </a:rPr>
-              <a:t>경보 · 에이전트 · 역할 · 시스템</a:t>
+              <a:t>• 경보·에이전트</a:t>
+            </a:r>
+          </a:p>
+          <a:p>
+            <a:pPr algn="l" eaLnBrk="0" marL="200025" indent="-200025">
+              <a:lnSpc>
+                <a:spcPct val="110000"/>
+              </a:lnSpc>
+              <a:spcAft>
+                <a:spcPts val="400"/>
+              </a:spcAft>
+            </a:pPr>
+            <a:r>
+              <a:rPr sz="1750" b="0">
+                <a:solidFill>
+                  <a:srgbClr val="1F2A3A"/>
+                </a:solidFill>
+                <a:latin typeface="맑은 고딕"/>
+                <a:ea typeface="맑은 고딕"/>
+                <a:cs typeface="맑은 고딕"/>
+              </a:rPr>
+              <a:t>• 역할·시스템</a:t>
             </a:r>
           </a:p>
         </p:txBody>
@@ -57557,7 +57266,7 @@
                 <a:ea typeface="맑은 고딕"/>
                 <a:cs typeface="맑은 고딕"/>
               </a:rPr>
-              <a:t>앞 단계의 결과를 이어 받아 흐름과 근거를 확인한다.</a:t>
+              <a:t>매핑 초안을 검사·수정한 뒤 정의와 판본을 등록·배포하고 경보 경로를 확인한다.</a:t>
             </a:r>
           </a:p>
         </p:txBody>
@@ -57638,112 +57347,16 @@
         </p:nvSpPr>
         <p:spPr>
           <a:xfrm>
-            <a:off x="548640" y="2995866"/>
-            <a:ext cx="2567863" cy="1990978"/>
+            <a:off x="548640" y="3009265"/>
+            <a:ext cx="2485567" cy="1964181"/>
           </a:xfrm>
           <a:prstGeom prst="roundRect">
             <a:avLst>
-              <a:gd name="adj" fmla="val 4000"/>
+              <a:gd name="adj" fmla="val 5000"/>
             </a:avLst>
           </a:prstGeom>
           <a:solidFill>
-            <a:srgbClr val="FFFFFF"/>
-          </a:solidFill>
-          <a:ln w="15875">
-            <a:solidFill>
-              <a:srgbClr val="D3D9E1"/>
-            </a:solidFill>
-          </a:ln>
-        </p:spPr>
-        <p:txBody>
-          <a:bodyPr rtlCol="0" anchor="ctr"/>
-          <a:lstStyle/>
-          <a:p>
-            <a:pPr algn="ctr"/>
-          </a:p>
-        </p:txBody>
-      </p:sp>
-      <p:sp>
-        <p:nvSpPr>
-          <p:cNvPr id="7" name="TextBox 6"/>
-          <p:cNvSpPr txBox="1"/>
-          <p:nvPr/>
-        </p:nvSpPr>
-        <p:spPr>
-          <a:xfrm>
-            <a:off x="713232" y="3197034"/>
-            <a:ext cx="2238679" cy="1286890"/>
-          </a:xfrm>
-          <a:prstGeom prst="rect">
-            <a:avLst/>
-          </a:prstGeom>
-          <a:noFill/>
-        </p:spPr>
-        <p:txBody>
-          <a:bodyPr wrap="square" anchor="t"/>
-          <a:lstStyle/>
-          <a:p>
-            <a:pPr algn="l" eaLnBrk="0">
-              <a:lnSpc>
-                <a:spcPct val="110000"/>
-              </a:lnSpc>
-              <a:spcAft>
-                <a:spcPts val="400"/>
-              </a:spcAft>
-            </a:pPr>
-            <a:r>
-              <a:rPr sz="2150" b="1">
-                <a:solidFill>
-                  <a:srgbClr val="13294B"/>
-                </a:solidFill>
-                <a:latin typeface="맑은 고딕"/>
-                <a:ea typeface="맑은 고딕"/>
-                <a:cs typeface="맑은 고딕"/>
-              </a:rPr>
-              <a:t>매핑 초안</a:t>
-            </a:r>
-          </a:p>
-          <a:p>
-            <a:pPr algn="l" eaLnBrk="0">
-              <a:lnSpc>
-                <a:spcPct val="110000"/>
-              </a:lnSpc>
-              <a:spcAft>
-                <a:spcPts val="400"/>
-              </a:spcAft>
-            </a:pPr>
-            <a:r>
-              <a:rPr sz="1750" b="0">
-                <a:solidFill>
-                  <a:srgbClr val="1F2A3A"/>
-                </a:solidFill>
-                <a:latin typeface="맑은 고딕"/>
-                <a:ea typeface="맑은 고딕"/>
-                <a:cs typeface="맑은 고딕"/>
-              </a:rPr>
-              <a:t>작업 부품과 분기 조건</a:t>
-            </a:r>
-          </a:p>
-        </p:txBody>
-      </p:sp>
-      <p:sp>
-        <p:nvSpPr>
-          <p:cNvPr id="8" name="Rounded Rectangle 7"/>
-          <p:cNvSpPr/>
-          <p:nvPr/>
-        </p:nvSpPr>
-        <p:spPr>
-          <a:xfrm>
-            <a:off x="777240" y="4557077"/>
-            <a:ext cx="822960" cy="292608"/>
-          </a:xfrm>
-          <a:prstGeom prst="roundRect">
-            <a:avLst>
-              <a:gd name="adj" fmla="val 50000"/>
-            </a:avLst>
-          </a:prstGeom>
-          <a:solidFill>
-            <a:srgbClr val="D3D9E1"/>
+            <a:srgbClr val="F3F6F9"/>
           </a:solidFill>
           <a:ln>
             <a:noFill/>
@@ -57759,97 +57372,25 @@
       </p:sp>
       <p:sp>
         <p:nvSpPr>
-          <p:cNvPr id="9" name="TextBox 8"/>
-          <p:cNvSpPr txBox="1"/>
-          <p:nvPr/>
-        </p:nvSpPr>
-        <p:spPr>
-          <a:xfrm>
-            <a:off x="777240" y="4557077"/>
-            <a:ext cx="822960" cy="292608"/>
-          </a:xfrm>
-          <a:prstGeom prst="rect">
-            <a:avLst/>
-          </a:prstGeom>
-          <a:noFill/>
-        </p:spPr>
-        <p:txBody>
-          <a:bodyPr wrap="square" anchor="ctr"/>
+          <p:cNvPr id="7" name="TextBox 6"/>
+          <p:cNvSpPr txBox="1"/>
+          <p:nvPr/>
+        </p:nvSpPr>
+        <p:spPr>
+          <a:xfrm>
+            <a:off x="621792" y="3192145"/>
+            <a:ext cx="2339263" cy="1708149"/>
+          </a:xfrm>
+          <a:prstGeom prst="rect">
+            <a:avLst/>
+          </a:prstGeom>
+          <a:noFill/>
+        </p:spPr>
+        <p:txBody>
+          <a:bodyPr wrap="square" anchor="t"/>
           <a:lstStyle/>
           <a:p>
             <a:pPr algn="ctr" eaLnBrk="0">
-              <a:lnSpc>
-                <a:spcPct val="110000"/>
-              </a:lnSpc>
-            </a:pPr>
-            <a:r>
-              <a:rPr sz="1200" b="1">
-                <a:solidFill>
-                  <a:srgbClr val="13294B"/>
-                </a:solidFill>
-                <a:latin typeface="맑은 고딕"/>
-                <a:ea typeface="맑은 고딕"/>
-                <a:cs typeface="맑은 고딕"/>
-              </a:rPr>
-              <a:t>입력</a:t>
-            </a:r>
-          </a:p>
-        </p:txBody>
-      </p:sp>
-      <p:sp>
-        <p:nvSpPr>
-          <p:cNvPr id="10" name="Rounded Rectangle 9"/>
-          <p:cNvSpPr/>
-          <p:nvPr/>
-        </p:nvSpPr>
-        <p:spPr>
-          <a:xfrm>
-            <a:off x="3390823" y="2995866"/>
-            <a:ext cx="2567863" cy="1990978"/>
-          </a:xfrm>
-          <a:prstGeom prst="roundRect">
-            <a:avLst>
-              <a:gd name="adj" fmla="val 4000"/>
-            </a:avLst>
-          </a:prstGeom>
-          <a:solidFill>
-            <a:srgbClr val="FFFFFF"/>
-          </a:solidFill>
-          <a:ln w="15875">
-            <a:solidFill>
-              <a:srgbClr val="D3D9E1"/>
-            </a:solidFill>
-          </a:ln>
-        </p:spPr>
-        <p:txBody>
-          <a:bodyPr rtlCol="0" anchor="ctr"/>
-          <a:lstStyle/>
-          <a:p>
-            <a:pPr algn="ctr"/>
-          </a:p>
-        </p:txBody>
-      </p:sp>
-      <p:sp>
-        <p:nvSpPr>
-          <p:cNvPr id="11" name="TextBox 10"/>
-          <p:cNvSpPr txBox="1"/>
-          <p:nvPr/>
-        </p:nvSpPr>
-        <p:spPr>
-          <a:xfrm>
-            <a:off x="3555415" y="3197034"/>
-            <a:ext cx="2238679" cy="1286890"/>
-          </a:xfrm>
-          <a:prstGeom prst="rect">
-            <a:avLst/>
-          </a:prstGeom>
-          <a:noFill/>
-        </p:spPr>
-        <p:txBody>
-          <a:bodyPr wrap="square" anchor="t"/>
-          <a:lstStyle/>
-          <a:p>
-            <a:pPr algn="l" eaLnBrk="0">
               <a:lnSpc>
                 <a:spcPct val="110000"/>
               </a:lnSpc>
@@ -57858,7 +57399,7 @@
               </a:spcAft>
             </a:pPr>
             <a:r>
-              <a:rPr sz="2150" b="1">
+              <a:rPr sz="2000" b="1">
                 <a:solidFill>
                   <a:srgbClr val="13294B"/>
                 </a:solidFill>
@@ -57866,11 +57407,11 @@
                 <a:ea typeface="맑은 고딕"/>
                 <a:cs typeface="맑은 고딕"/>
               </a:rPr>
-              <a:t>검사와 수정</a:t>
-            </a:r>
-          </a:p>
-          <a:p>
-            <a:pPr algn="l" eaLnBrk="0">
+              <a:t>매핑 초안</a:t>
+            </a:r>
+          </a:p>
+          <a:p>
+            <a:pPr algn="ctr" eaLnBrk="0">
               <a:lnSpc>
                 <a:spcPct val="110000"/>
               </a:lnSpc>
@@ -57879,7 +57420,7 @@
               </a:spcAft>
             </a:pPr>
             <a:r>
-              <a:rPr sz="1750" b="0">
+              <a:rPr sz="1650" b="0">
                 <a:solidFill>
                   <a:srgbClr val="1F2A3A"/>
                 </a:solidFill>
@@ -57887,29 +57428,27 @@
                 <a:ea typeface="맑은 고딕"/>
                 <a:cs typeface="맑은 고딕"/>
               </a:rPr>
-              <a:t>누락 위치 · 사유 · 재검사</a:t>
-            </a:r>
-          </a:p>
-        </p:txBody>
-      </p:sp>
-      <p:sp>
-        <p:nvSpPr>
-          <p:cNvPr id="12" name="Rounded Rectangle 11"/>
+              <a:t>작업 부품과 분기 조건</a:t>
+            </a:r>
+          </a:p>
+        </p:txBody>
+      </p:sp>
+      <p:sp>
+        <p:nvSpPr>
+          <p:cNvPr id="8" name="Right Arrow 7"/>
           <p:cNvSpPr/>
           <p:nvPr/>
         </p:nvSpPr>
         <p:spPr>
           <a:xfrm>
-            <a:off x="3619423" y="4557077"/>
-            <a:ext cx="822960" cy="292608"/>
-          </a:xfrm>
-          <a:prstGeom prst="roundRect">
-            <a:avLst>
-              <a:gd name="adj" fmla="val 50000"/>
-            </a:avLst>
+            <a:off x="3098215" y="3854196"/>
+            <a:ext cx="256031" cy="274320"/>
+          </a:xfrm>
+          <a:prstGeom prst="rightArrow">
+            <a:avLst/>
           </a:prstGeom>
           <a:solidFill>
-            <a:srgbClr val="D3D9E1"/>
+            <a:srgbClr val="13294B"/>
           </a:solidFill>
           <a:ln>
             <a:noFill/>
@@ -57925,157 +57464,22 @@
       </p:sp>
       <p:sp>
         <p:nvSpPr>
-          <p:cNvPr id="13" name="TextBox 12"/>
-          <p:cNvSpPr txBox="1"/>
-          <p:nvPr/>
-        </p:nvSpPr>
-        <p:spPr>
-          <a:xfrm>
-            <a:off x="3619423" y="4557077"/>
-            <a:ext cx="822960" cy="292608"/>
-          </a:xfrm>
-          <a:prstGeom prst="rect">
-            <a:avLst/>
-          </a:prstGeom>
-          <a:noFill/>
-        </p:spPr>
-        <p:txBody>
-          <a:bodyPr wrap="square" anchor="ctr"/>
-          <a:lstStyle/>
-          <a:p>
-            <a:pPr algn="ctr" eaLnBrk="0">
-              <a:lnSpc>
-                <a:spcPct val="110000"/>
-              </a:lnSpc>
-            </a:pPr>
-            <a:r>
-              <a:rPr sz="1200" b="1">
-                <a:solidFill>
-                  <a:srgbClr val="13294B"/>
-                </a:solidFill>
-                <a:latin typeface="맑은 고딕"/>
-                <a:ea typeface="맑은 고딕"/>
-                <a:cs typeface="맑은 고딕"/>
-              </a:rPr>
-              <a:t>범위</a:t>
-            </a:r>
-          </a:p>
-        </p:txBody>
-      </p:sp>
-      <p:sp>
-        <p:nvSpPr>
-          <p:cNvPr id="14" name="Rounded Rectangle 13"/>
+          <p:cNvPr id="9" name="Rounded Rectangle 8"/>
           <p:cNvSpPr/>
           <p:nvPr/>
         </p:nvSpPr>
         <p:spPr>
           <a:xfrm>
-            <a:off x="6233007" y="2995866"/>
-            <a:ext cx="2567863" cy="1990978"/>
+            <a:off x="3418255" y="3009265"/>
+            <a:ext cx="2485567" cy="1964181"/>
           </a:xfrm>
           <a:prstGeom prst="roundRect">
             <a:avLst>
-              <a:gd name="adj" fmla="val 4000"/>
+              <a:gd name="adj" fmla="val 5000"/>
             </a:avLst>
           </a:prstGeom>
           <a:solidFill>
-            <a:srgbClr val="FFFFFF"/>
-          </a:solidFill>
-          <a:ln w="15875">
-            <a:solidFill>
-              <a:srgbClr val="D3D9E1"/>
-            </a:solidFill>
-          </a:ln>
-        </p:spPr>
-        <p:txBody>
-          <a:bodyPr rtlCol="0" anchor="ctr"/>
-          <a:lstStyle/>
-          <a:p>
-            <a:pPr algn="ctr"/>
-          </a:p>
-        </p:txBody>
-      </p:sp>
-      <p:sp>
-        <p:nvSpPr>
-          <p:cNvPr id="15" name="TextBox 14"/>
-          <p:cNvSpPr txBox="1"/>
-          <p:nvPr/>
-        </p:nvSpPr>
-        <p:spPr>
-          <a:xfrm>
-            <a:off x="6397599" y="3197034"/>
-            <a:ext cx="2238679" cy="1286890"/>
-          </a:xfrm>
-          <a:prstGeom prst="rect">
-            <a:avLst/>
-          </a:prstGeom>
-          <a:noFill/>
-        </p:spPr>
-        <p:txBody>
-          <a:bodyPr wrap="square" anchor="t"/>
-          <a:lstStyle/>
-          <a:p>
-            <a:pPr algn="l" eaLnBrk="0">
-              <a:lnSpc>
-                <a:spcPct val="110000"/>
-              </a:lnSpc>
-              <a:spcAft>
-                <a:spcPts val="400"/>
-              </a:spcAft>
-            </a:pPr>
-            <a:r>
-              <a:rPr sz="2150" b="1">
-                <a:solidFill>
-                  <a:srgbClr val="13294B"/>
-                </a:solidFill>
-                <a:latin typeface="맑은 고딕"/>
-                <a:ea typeface="맑은 고딕"/>
-                <a:cs typeface="맑은 고딕"/>
-              </a:rPr>
-              <a:t>등록과 배포</a:t>
-            </a:r>
-          </a:p>
-          <a:p>
-            <a:pPr algn="l" eaLnBrk="0">
-              <a:lnSpc>
-                <a:spcPct val="110000"/>
-              </a:lnSpc>
-              <a:spcAft>
-                <a:spcPts val="400"/>
-              </a:spcAft>
-            </a:pPr>
-            <a:r>
-              <a:rPr sz="1750" b="0">
-                <a:solidFill>
-                  <a:srgbClr val="1F2A3A"/>
-                </a:solidFill>
-                <a:latin typeface="맑은 고딕"/>
-                <a:ea typeface="맑은 고딕"/>
-                <a:cs typeface="맑은 고딕"/>
-              </a:rPr>
-              <a:t>정의 ID · 판본 · 경보 경로</a:t>
-            </a:r>
-          </a:p>
-        </p:txBody>
-      </p:sp>
-      <p:sp>
-        <p:nvSpPr>
-          <p:cNvPr id="16" name="Rounded Rectangle 15"/>
-          <p:cNvSpPr/>
-          <p:nvPr/>
-        </p:nvSpPr>
-        <p:spPr>
-          <a:xfrm>
-            <a:off x="6461607" y="4557077"/>
-            <a:ext cx="822960" cy="292608"/>
-          </a:xfrm>
-          <a:prstGeom prst="roundRect">
-            <a:avLst>
-              <a:gd name="adj" fmla="val 50000"/>
-            </a:avLst>
-          </a:prstGeom>
-          <a:solidFill>
-            <a:srgbClr val="D3D9E1"/>
+            <a:srgbClr val="F3F6F9"/>
           </a:solidFill>
           <a:ln>
             <a:noFill/>
@@ -58091,97 +57495,25 @@
       </p:sp>
       <p:sp>
         <p:nvSpPr>
-          <p:cNvPr id="17" name="TextBox 16"/>
-          <p:cNvSpPr txBox="1"/>
-          <p:nvPr/>
-        </p:nvSpPr>
-        <p:spPr>
-          <a:xfrm>
-            <a:off x="6461607" y="4557077"/>
-            <a:ext cx="822960" cy="292608"/>
-          </a:xfrm>
-          <a:prstGeom prst="rect">
-            <a:avLst/>
-          </a:prstGeom>
-          <a:noFill/>
-        </p:spPr>
-        <p:txBody>
-          <a:bodyPr wrap="square" anchor="ctr"/>
+          <p:cNvPr id="10" name="TextBox 9"/>
+          <p:cNvSpPr txBox="1"/>
+          <p:nvPr/>
+        </p:nvSpPr>
+        <p:spPr>
+          <a:xfrm>
+            <a:off x="3491407" y="3192145"/>
+            <a:ext cx="2339263" cy="1708149"/>
+          </a:xfrm>
+          <a:prstGeom prst="rect">
+            <a:avLst/>
+          </a:prstGeom>
+          <a:noFill/>
+        </p:spPr>
+        <p:txBody>
+          <a:bodyPr wrap="square" anchor="t"/>
           <a:lstStyle/>
           <a:p>
             <a:pPr algn="ctr" eaLnBrk="0">
-              <a:lnSpc>
-                <a:spcPct val="110000"/>
-              </a:lnSpc>
-            </a:pPr>
-            <a:r>
-              <a:rPr sz="1200" b="1">
-                <a:solidFill>
-                  <a:srgbClr val="13294B"/>
-                </a:solidFill>
-                <a:latin typeface="맑은 고딕"/>
-                <a:ea typeface="맑은 고딕"/>
-                <a:cs typeface="맑은 고딕"/>
-              </a:rPr>
-              <a:t>산출물</a:t>
-            </a:r>
-          </a:p>
-        </p:txBody>
-      </p:sp>
-      <p:sp>
-        <p:nvSpPr>
-          <p:cNvPr id="18" name="Rounded Rectangle 17"/>
-          <p:cNvSpPr/>
-          <p:nvPr/>
-        </p:nvSpPr>
-        <p:spPr>
-          <a:xfrm>
-            <a:off x="9075191" y="2995866"/>
-            <a:ext cx="2567863" cy="1990978"/>
-          </a:xfrm>
-          <a:prstGeom prst="roundRect">
-            <a:avLst>
-              <a:gd name="adj" fmla="val 4000"/>
-            </a:avLst>
-          </a:prstGeom>
-          <a:solidFill>
-            <a:srgbClr val="FFFFFF"/>
-          </a:solidFill>
-          <a:ln w="15875">
-            <a:solidFill>
-              <a:srgbClr val="D3D9E1"/>
-            </a:solidFill>
-          </a:ln>
-        </p:spPr>
-        <p:txBody>
-          <a:bodyPr rtlCol="0" anchor="ctr"/>
-          <a:lstStyle/>
-          <a:p>
-            <a:pPr algn="ctr"/>
-          </a:p>
-        </p:txBody>
-      </p:sp>
-      <p:sp>
-        <p:nvSpPr>
-          <p:cNvPr id="19" name="TextBox 18"/>
-          <p:cNvSpPr txBox="1"/>
-          <p:nvPr/>
-        </p:nvSpPr>
-        <p:spPr>
-          <a:xfrm>
-            <a:off x="9239783" y="3197034"/>
-            <a:ext cx="2238679" cy="1286890"/>
-          </a:xfrm>
-          <a:prstGeom prst="rect">
-            <a:avLst/>
-          </a:prstGeom>
-          <a:noFill/>
-        </p:spPr>
-        <p:txBody>
-          <a:bodyPr wrap="square" anchor="t"/>
-          <a:lstStyle/>
-          <a:p>
-            <a:pPr algn="l" eaLnBrk="0">
               <a:lnSpc>
                 <a:spcPct val="110000"/>
               </a:lnSpc>
@@ -58190,7 +57522,7 @@
               </a:spcAft>
             </a:pPr>
             <a:r>
-              <a:rPr sz="2150" b="1">
+              <a:rPr sz="2000" b="1">
                 <a:solidFill>
                   <a:srgbClr val="13294B"/>
                 </a:solidFill>
@@ -58198,11 +57530,11 @@
                 <a:ea typeface="맑은 고딕"/>
                 <a:cs typeface="맑은 고딕"/>
               </a:rPr>
-              <a:t>배포 확인</a:t>
-            </a:r>
-          </a:p>
-          <a:p>
-            <a:pPr algn="l" eaLnBrk="0">
+              <a:t>검사와 수정</a:t>
+            </a:r>
+          </a:p>
+          <a:p>
+            <a:pPr algn="ctr" eaLnBrk="0">
               <a:lnSpc>
                 <a:spcPct val="110000"/>
               </a:lnSpc>
@@ -58211,7 +57543,7 @@
               </a:spcAft>
             </a:pPr>
             <a:r>
-              <a:rPr sz="1750" b="0">
+              <a:rPr sz="1650" b="0">
                 <a:solidFill>
                   <a:srgbClr val="1F2A3A"/>
                 </a:solidFill>
@@ -58219,29 +57551,48 @@
                 <a:ea typeface="맑은 고딕"/>
                 <a:cs typeface="맑은 고딕"/>
               </a:rPr>
-              <a:t>검사 통과와 실행 성공을 구별</a:t>
-            </a:r>
-          </a:p>
-        </p:txBody>
-      </p:sp>
-      <p:sp>
-        <p:nvSpPr>
-          <p:cNvPr id="20" name="Rounded Rectangle 19"/>
+              <a:t>누락 위치·사유</a:t>
+            </a:r>
+          </a:p>
+          <a:p>
+            <a:pPr algn="ctr" eaLnBrk="0">
+              <a:lnSpc>
+                <a:spcPct val="110000"/>
+              </a:lnSpc>
+              <a:spcAft>
+                <a:spcPts val="400"/>
+              </a:spcAft>
+            </a:pPr>
+            <a:r>
+              <a:rPr sz="1650" b="0">
+                <a:solidFill>
+                  <a:srgbClr val="1F2A3A"/>
+                </a:solidFill>
+                <a:latin typeface="맑은 고딕"/>
+                <a:ea typeface="맑은 고딕"/>
+                <a:cs typeface="맑은 고딕"/>
+              </a:rPr>
+              <a:t>수정 후 재검사</a:t>
+            </a:r>
+          </a:p>
+        </p:txBody>
+      </p:sp>
+      <p:sp>
+        <p:nvSpPr>
+          <p:cNvPr id="11" name="Right Arrow 10"/>
           <p:cNvSpPr/>
           <p:nvPr/>
         </p:nvSpPr>
         <p:spPr>
           <a:xfrm>
-            <a:off x="9303791" y="4557077"/>
-            <a:ext cx="822960" cy="292608"/>
-          </a:xfrm>
-          <a:prstGeom prst="roundRect">
-            <a:avLst>
-              <a:gd name="adj" fmla="val 50000"/>
-            </a:avLst>
+            <a:off x="5967831" y="3854196"/>
+            <a:ext cx="256031" cy="274320"/>
+          </a:xfrm>
+          <a:prstGeom prst="rightArrow">
+            <a:avLst/>
           </a:prstGeom>
           <a:solidFill>
-            <a:srgbClr val="D3D9E1"/>
+            <a:srgbClr val="13294B"/>
           </a:solidFill>
           <a:ln>
             <a:noFill/>
@@ -58257,31 +57608,65 @@
       </p:sp>
       <p:sp>
         <p:nvSpPr>
-          <p:cNvPr id="21" name="TextBox 20"/>
-          <p:cNvSpPr txBox="1"/>
-          <p:nvPr/>
-        </p:nvSpPr>
-        <p:spPr>
-          <a:xfrm>
-            <a:off x="9303791" y="4557077"/>
-            <a:ext cx="822960" cy="292608"/>
-          </a:xfrm>
-          <a:prstGeom prst="rect">
-            <a:avLst/>
-          </a:prstGeom>
-          <a:noFill/>
-        </p:spPr>
-        <p:txBody>
-          <a:bodyPr wrap="square" anchor="ctr"/>
+          <p:cNvPr id="12" name="Rounded Rectangle 11"/>
+          <p:cNvSpPr/>
+          <p:nvPr/>
+        </p:nvSpPr>
+        <p:spPr>
+          <a:xfrm>
+            <a:off x="6287871" y="3009265"/>
+            <a:ext cx="2485567" cy="1964181"/>
+          </a:xfrm>
+          <a:prstGeom prst="roundRect">
+            <a:avLst>
+              <a:gd name="adj" fmla="val 5000"/>
+            </a:avLst>
+          </a:prstGeom>
+          <a:solidFill>
+            <a:srgbClr val="F3F6F9"/>
+          </a:solidFill>
+          <a:ln>
+            <a:noFill/>
+          </a:ln>
+        </p:spPr>
+        <p:txBody>
+          <a:bodyPr rtlCol="0" anchor="ctr"/>
+          <a:lstStyle/>
+          <a:p>
+            <a:pPr algn="ctr"/>
+          </a:p>
+        </p:txBody>
+      </p:sp>
+      <p:sp>
+        <p:nvSpPr>
+          <p:cNvPr id="13" name="TextBox 12"/>
+          <p:cNvSpPr txBox="1"/>
+          <p:nvPr/>
+        </p:nvSpPr>
+        <p:spPr>
+          <a:xfrm>
+            <a:off x="6361023" y="3192145"/>
+            <a:ext cx="2339263" cy="1708149"/>
+          </a:xfrm>
+          <a:prstGeom prst="rect">
+            <a:avLst/>
+          </a:prstGeom>
+          <a:noFill/>
+        </p:spPr>
+        <p:txBody>
+          <a:bodyPr wrap="square" anchor="t"/>
           <a:lstStyle/>
           <a:p>
             <a:pPr algn="ctr" eaLnBrk="0">
               <a:lnSpc>
                 <a:spcPct val="110000"/>
               </a:lnSpc>
-            </a:pPr>
-            <a:r>
-              <a:rPr sz="1200" b="1">
+              <a:spcAft>
+                <a:spcPts val="400"/>
+              </a:spcAft>
+            </a:pPr>
+            <a:r>
+              <a:rPr sz="2000" b="1">
                 <a:solidFill>
                   <a:srgbClr val="13294B"/>
                 </a:solidFill>
@@ -58289,7 +57674,193 @@
                 <a:ea typeface="맑은 고딕"/>
                 <a:cs typeface="맑은 고딕"/>
               </a:rPr>
-              <a:t>판정</a:t>
+              <a:t>등록과 배포</a:t>
+            </a:r>
+          </a:p>
+          <a:p>
+            <a:pPr algn="ctr" eaLnBrk="0">
+              <a:lnSpc>
+                <a:spcPct val="110000"/>
+              </a:lnSpc>
+              <a:spcAft>
+                <a:spcPts val="400"/>
+              </a:spcAft>
+            </a:pPr>
+            <a:r>
+              <a:rPr sz="1650" b="0">
+                <a:solidFill>
+                  <a:srgbClr val="1F2A3A"/>
+                </a:solidFill>
+                <a:latin typeface="맑은 고딕"/>
+                <a:ea typeface="맑은 고딕"/>
+                <a:cs typeface="맑은 고딕"/>
+              </a:rPr>
+              <a:t>정의 ID·판본</a:t>
+            </a:r>
+          </a:p>
+          <a:p>
+            <a:pPr algn="ctr" eaLnBrk="0">
+              <a:lnSpc>
+                <a:spcPct val="110000"/>
+              </a:lnSpc>
+              <a:spcAft>
+                <a:spcPts val="400"/>
+              </a:spcAft>
+            </a:pPr>
+            <a:r>
+              <a:rPr sz="1650" b="0">
+                <a:solidFill>
+                  <a:srgbClr val="1F2A3A"/>
+                </a:solidFill>
+                <a:latin typeface="맑은 고딕"/>
+                <a:ea typeface="맑은 고딕"/>
+                <a:cs typeface="맑은 고딕"/>
+              </a:rPr>
+              <a:t>경보 경로</a:t>
+            </a:r>
+          </a:p>
+        </p:txBody>
+      </p:sp>
+      <p:sp>
+        <p:nvSpPr>
+          <p:cNvPr id="14" name="Right Arrow 13"/>
+          <p:cNvSpPr/>
+          <p:nvPr/>
+        </p:nvSpPr>
+        <p:spPr>
+          <a:xfrm>
+            <a:off x="8837447" y="3854196"/>
+            <a:ext cx="256031" cy="274320"/>
+          </a:xfrm>
+          <a:prstGeom prst="rightArrow">
+            <a:avLst/>
+          </a:prstGeom>
+          <a:solidFill>
+            <a:srgbClr val="13294B"/>
+          </a:solidFill>
+          <a:ln>
+            <a:noFill/>
+          </a:ln>
+        </p:spPr>
+        <p:txBody>
+          <a:bodyPr rtlCol="0" anchor="ctr"/>
+          <a:lstStyle/>
+          <a:p>
+            <a:pPr algn="ctr"/>
+          </a:p>
+        </p:txBody>
+      </p:sp>
+      <p:sp>
+        <p:nvSpPr>
+          <p:cNvPr id="15" name="Rounded Rectangle 14"/>
+          <p:cNvSpPr/>
+          <p:nvPr/>
+        </p:nvSpPr>
+        <p:spPr>
+          <a:xfrm>
+            <a:off x="9157487" y="3009265"/>
+            <a:ext cx="2485567" cy="1964181"/>
+          </a:xfrm>
+          <a:prstGeom prst="roundRect">
+            <a:avLst>
+              <a:gd name="adj" fmla="val 5000"/>
+            </a:avLst>
+          </a:prstGeom>
+          <a:solidFill>
+            <a:srgbClr val="F3F6F9"/>
+          </a:solidFill>
+          <a:ln>
+            <a:noFill/>
+          </a:ln>
+        </p:spPr>
+        <p:txBody>
+          <a:bodyPr rtlCol="0" anchor="ctr"/>
+          <a:lstStyle/>
+          <a:p>
+            <a:pPr algn="ctr"/>
+          </a:p>
+        </p:txBody>
+      </p:sp>
+      <p:sp>
+        <p:nvSpPr>
+          <p:cNvPr id="16" name="TextBox 15"/>
+          <p:cNvSpPr txBox="1"/>
+          <p:nvPr/>
+        </p:nvSpPr>
+        <p:spPr>
+          <a:xfrm>
+            <a:off x="9230639" y="3192145"/>
+            <a:ext cx="2339263" cy="1708149"/>
+          </a:xfrm>
+          <a:prstGeom prst="rect">
+            <a:avLst/>
+          </a:prstGeom>
+          <a:noFill/>
+        </p:spPr>
+        <p:txBody>
+          <a:bodyPr wrap="square" anchor="t"/>
+          <a:lstStyle/>
+          <a:p>
+            <a:pPr algn="ctr" eaLnBrk="0">
+              <a:lnSpc>
+                <a:spcPct val="110000"/>
+              </a:lnSpc>
+              <a:spcAft>
+                <a:spcPts val="400"/>
+              </a:spcAft>
+            </a:pPr>
+            <a:r>
+              <a:rPr sz="2000" b="1">
+                <a:solidFill>
+                  <a:srgbClr val="13294B"/>
+                </a:solidFill>
+                <a:latin typeface="맑은 고딕"/>
+                <a:ea typeface="맑은 고딕"/>
+                <a:cs typeface="맑은 고딕"/>
+              </a:rPr>
+              <a:t>배포 확인</a:t>
+            </a:r>
+          </a:p>
+          <a:p>
+            <a:pPr algn="ctr" eaLnBrk="0">
+              <a:lnSpc>
+                <a:spcPct val="110000"/>
+              </a:lnSpc>
+              <a:spcAft>
+                <a:spcPts val="400"/>
+              </a:spcAft>
+            </a:pPr>
+            <a:r>
+              <a:rPr sz="1650" b="0">
+                <a:solidFill>
+                  <a:srgbClr val="1F2A3A"/>
+                </a:solidFill>
+                <a:latin typeface="맑은 고딕"/>
+                <a:ea typeface="맑은 고딕"/>
+                <a:cs typeface="맑은 고딕"/>
+              </a:rPr>
+              <a:t>검사 통과</a:t>
+            </a:r>
+          </a:p>
+          <a:p>
+            <a:pPr algn="ctr" eaLnBrk="0">
+              <a:lnSpc>
+                <a:spcPct val="110000"/>
+              </a:lnSpc>
+              <a:spcAft>
+                <a:spcPts val="400"/>
+              </a:spcAft>
+            </a:pPr>
+            <a:r>
+              <a:rPr sz="1650" b="0">
+                <a:solidFill>
+                  <a:srgbClr val="1F2A3A"/>
+                </a:solidFill>
+                <a:latin typeface="맑은 고딕"/>
+                <a:ea typeface="맑은 고딕"/>
+                <a:cs typeface="맑은 고딕"/>
+              </a:rPr>
+              <a:t>실행 성공과 구별</a:t>
             </a:r>
           </a:p>
         </p:txBody>
@@ -58596,7 +58167,7 @@
                 <a:ea typeface="맑은 고딕"/>
                 <a:cs typeface="맑은 고딕"/>
               </a:rPr>
-              <a:t>앞 단계의 결과를 이어 받아 흐름과 근거를 확인한다.</a:t>
+              <a:t>배포된 판본으로 열린 처리 건의 기록에서 승인 대기와 정상·거절·미달 결과를 구분한다.</a:t>
             </a:r>
           </a:p>
         </p:txBody>
@@ -58677,12 +58248,12 @@
         </p:nvSpPr>
         <p:spPr>
           <a:xfrm>
-            <a:off x="548640" y="2995866"/>
-            <a:ext cx="2567863" cy="1990978"/>
+            <a:off x="548640" y="1691640"/>
+            <a:ext cx="5422392" cy="2103120"/>
           </a:xfrm>
           <a:prstGeom prst="roundRect">
             <a:avLst>
-              <a:gd name="adj" fmla="val 4000"/>
+              <a:gd name="adj" fmla="val 6000"/>
             </a:avLst>
           </a:prstGeom>
           <a:solidFill>
@@ -58710,8 +58281,8 @@
         </p:nvSpPr>
         <p:spPr>
           <a:xfrm>
-            <a:off x="713232" y="3197034"/>
-            <a:ext cx="2238679" cy="1286890"/>
+            <a:off x="758952" y="1856232"/>
+            <a:ext cx="5001768" cy="438912"/>
           </a:xfrm>
           <a:prstGeom prst="rect">
             <a:avLst/>
@@ -58726,12 +58297,9 @@
               <a:lnSpc>
                 <a:spcPct val="110000"/>
               </a:lnSpc>
-              <a:spcAft>
-                <a:spcPts val="400"/>
-              </a:spcAft>
-            </a:pPr>
-            <a:r>
-              <a:rPr sz="2150" b="1">
+            </a:pPr>
+            <a:r>
+              <a:rPr sz="1800" b="1">
                 <a:solidFill>
                   <a:srgbClr val="13294B"/>
                 </a:solidFill>
@@ -58742,113 +58310,100 @@
               <a:t>배포한 판본</a:t>
             </a:r>
           </a:p>
+        </p:txBody>
+      </p:sp>
+      <p:sp>
+        <p:nvSpPr>
+          <p:cNvPr id="8" name="TextBox 7"/>
+          <p:cNvSpPr txBox="1"/>
+          <p:nvPr/>
+        </p:nvSpPr>
+        <p:spPr>
+          <a:xfrm>
+            <a:off x="758952" y="2386584"/>
+            <a:ext cx="5001768" cy="502920"/>
+          </a:xfrm>
+          <a:prstGeom prst="rect">
+            <a:avLst/>
+          </a:prstGeom>
+          <a:noFill/>
+        </p:spPr>
+        <p:txBody>
+          <a:bodyPr wrap="square" anchor="t"/>
+          <a:lstStyle/>
           <a:p>
             <a:pPr algn="l" eaLnBrk="0">
               <a:lnSpc>
                 <a:spcPct val="110000"/>
               </a:lnSpc>
-              <a:spcAft>
-                <a:spcPts val="400"/>
-              </a:spcAft>
-            </a:pPr>
-            <a:r>
-              <a:rPr sz="1750" b="0">
-                <a:solidFill>
-                  <a:srgbClr val="1F2A3A"/>
-                </a:solidFill>
-                <a:latin typeface="맑은 고딕"/>
-                <a:ea typeface="맑은 고딕"/>
-                <a:cs typeface="맑은 고딕"/>
-              </a:rPr>
-              <a:t>교육 환경의 쿨러 열화 이벤트</a:t>
-            </a:r>
-          </a:p>
-        </p:txBody>
-      </p:sp>
-      <p:sp>
-        <p:nvSpPr>
-          <p:cNvPr id="8" name="Rounded Rectangle 7"/>
+            </a:pPr>
+            <a:r>
+              <a:rPr sz="1700" b="0">
+                <a:solidFill>
+                  <a:srgbClr val="13294B"/>
+                </a:solidFill>
+                <a:latin typeface="맑은 고딕"/>
+                <a:ea typeface="맑은 고딕"/>
+                <a:cs typeface="맑은 고딕"/>
+              </a:rPr>
+              <a:t>교육 환경의</a:t>
+            </a:r>
+          </a:p>
+        </p:txBody>
+      </p:sp>
+      <p:sp>
+        <p:nvSpPr>
+          <p:cNvPr id="9" name="TextBox 8"/>
+          <p:cNvSpPr txBox="1"/>
+          <p:nvPr/>
+        </p:nvSpPr>
+        <p:spPr>
+          <a:xfrm>
+            <a:off x="758952" y="2935224"/>
+            <a:ext cx="5001768" cy="411480"/>
+          </a:xfrm>
+          <a:prstGeom prst="rect">
+            <a:avLst/>
+          </a:prstGeom>
+          <a:noFill/>
+        </p:spPr>
+        <p:txBody>
+          <a:bodyPr wrap="square" anchor="t"/>
+          <a:lstStyle/>
+          <a:p>
+            <a:pPr algn="l" eaLnBrk="0">
+              <a:lnSpc>
+                <a:spcPct val="110000"/>
+              </a:lnSpc>
+            </a:pPr>
+            <a:r>
+              <a:rPr sz="1600" b="1">
+                <a:solidFill>
+                  <a:srgbClr val="1A6FC4"/>
+                </a:solidFill>
+                <a:latin typeface="맑은 고딕"/>
+                <a:ea typeface="맑은 고딕"/>
+                <a:cs typeface="맑은 고딕"/>
+              </a:rPr>
+              <a:t>쿨러 열화 이벤트</a:t>
+            </a:r>
+          </a:p>
+        </p:txBody>
+      </p:sp>
+      <p:sp>
+        <p:nvSpPr>
+          <p:cNvPr id="10" name="Rounded Rectangle 9"/>
           <p:cNvSpPr/>
           <p:nvPr/>
         </p:nvSpPr>
         <p:spPr>
           <a:xfrm>
-            <a:off x="777240" y="4557077"/>
-            <a:ext cx="822960" cy="292608"/>
+            <a:off x="6217920" y="1691640"/>
+            <a:ext cx="5422392" cy="2103120"/>
           </a:xfrm>
           <a:prstGeom prst="roundRect">
             <a:avLst>
-              <a:gd name="adj" fmla="val 50000"/>
-            </a:avLst>
-          </a:prstGeom>
-          <a:solidFill>
-            <a:srgbClr val="D3D9E1"/>
-          </a:solidFill>
-          <a:ln>
-            <a:noFill/>
-          </a:ln>
-        </p:spPr>
-        <p:txBody>
-          <a:bodyPr rtlCol="0" anchor="ctr"/>
-          <a:lstStyle/>
-          <a:p>
-            <a:pPr algn="ctr"/>
-          </a:p>
-        </p:txBody>
-      </p:sp>
-      <p:sp>
-        <p:nvSpPr>
-          <p:cNvPr id="9" name="TextBox 8"/>
-          <p:cNvSpPr txBox="1"/>
-          <p:nvPr/>
-        </p:nvSpPr>
-        <p:spPr>
-          <a:xfrm>
-            <a:off x="777240" y="4557077"/>
-            <a:ext cx="822960" cy="292608"/>
-          </a:xfrm>
-          <a:prstGeom prst="rect">
-            <a:avLst/>
-          </a:prstGeom>
-          <a:noFill/>
-        </p:spPr>
-        <p:txBody>
-          <a:bodyPr wrap="square" anchor="ctr"/>
-          <a:lstStyle/>
-          <a:p>
-            <a:pPr algn="ctr" eaLnBrk="0">
-              <a:lnSpc>
-                <a:spcPct val="110000"/>
-              </a:lnSpc>
-            </a:pPr>
-            <a:r>
-              <a:rPr sz="1200" b="1">
-                <a:solidFill>
-                  <a:srgbClr val="13294B"/>
-                </a:solidFill>
-                <a:latin typeface="맑은 고딕"/>
-                <a:ea typeface="맑은 고딕"/>
-                <a:cs typeface="맑은 고딕"/>
-              </a:rPr>
-              <a:t>입력</a:t>
-            </a:r>
-          </a:p>
-        </p:txBody>
-      </p:sp>
-      <p:sp>
-        <p:nvSpPr>
-          <p:cNvPr id="10" name="Rounded Rectangle 9"/>
-          <p:cNvSpPr/>
-          <p:nvPr/>
-        </p:nvSpPr>
-        <p:spPr>
-          <a:xfrm>
-            <a:off x="3390823" y="2995866"/>
-            <a:ext cx="2567863" cy="1990978"/>
-          </a:xfrm>
-          <a:prstGeom prst="roundRect">
-            <a:avLst>
-              <a:gd name="adj" fmla="val 4000"/>
+              <a:gd name="adj" fmla="val 6000"/>
             </a:avLst>
           </a:prstGeom>
           <a:solidFill>
@@ -58876,8 +58431,8 @@
         </p:nvSpPr>
         <p:spPr>
           <a:xfrm>
-            <a:off x="3555415" y="3197034"/>
-            <a:ext cx="2238679" cy="1286890"/>
+            <a:off x="6428232" y="1856232"/>
+            <a:ext cx="5001768" cy="438912"/>
           </a:xfrm>
           <a:prstGeom prst="rect">
             <a:avLst/>
@@ -58892,12 +58447,9 @@
               <a:lnSpc>
                 <a:spcPct val="110000"/>
               </a:lnSpc>
-              <a:spcAft>
-                <a:spcPts val="400"/>
-              </a:spcAft>
-            </a:pPr>
-            <a:r>
-              <a:rPr sz="2150" b="1">
+            </a:pPr>
+            <a:r>
+              <a:rPr sz="1800" b="1">
                 <a:solidFill>
                   <a:srgbClr val="13294B"/>
                 </a:solidFill>
@@ -58908,113 +58460,100 @@
               <a:t>처리 경로</a:t>
             </a:r>
           </a:p>
+        </p:txBody>
+      </p:sp>
+      <p:sp>
+        <p:nvSpPr>
+          <p:cNvPr id="12" name="TextBox 11"/>
+          <p:cNvSpPr txBox="1"/>
+          <p:nvPr/>
+        </p:nvSpPr>
+        <p:spPr>
+          <a:xfrm>
+            <a:off x="6428232" y="2386584"/>
+            <a:ext cx="5001768" cy="502920"/>
+          </a:xfrm>
+          <a:prstGeom prst="rect">
+            <a:avLst/>
+          </a:prstGeom>
+          <a:noFill/>
+        </p:spPr>
+        <p:txBody>
+          <a:bodyPr wrap="square" anchor="t"/>
+          <a:lstStyle/>
           <a:p>
             <a:pPr algn="l" eaLnBrk="0">
               <a:lnSpc>
                 <a:spcPct val="110000"/>
               </a:lnSpc>
-              <a:spcAft>
-                <a:spcPts val="400"/>
-              </a:spcAft>
-            </a:pPr>
-            <a:r>
-              <a:rPr sz="1750" b="0">
-                <a:solidFill>
-                  <a:srgbClr val="1F2A3A"/>
-                </a:solidFill>
-                <a:latin typeface="맑은 고딕"/>
-                <a:ea typeface="맑은 고딕"/>
-                <a:cs typeface="맑은 고딕"/>
-              </a:rPr>
-              <a:t>제안 · 승인 · 명령 · 재관측 · 보고</a:t>
-            </a:r>
-          </a:p>
-        </p:txBody>
-      </p:sp>
-      <p:sp>
-        <p:nvSpPr>
-          <p:cNvPr id="12" name="Rounded Rectangle 11"/>
+            </a:pPr>
+            <a:r>
+              <a:rPr sz="1700" b="0">
+                <a:solidFill>
+                  <a:srgbClr val="13294B"/>
+                </a:solidFill>
+                <a:latin typeface="맑은 고딕"/>
+                <a:ea typeface="맑은 고딕"/>
+                <a:cs typeface="맑은 고딕"/>
+              </a:rPr>
+              <a:t>제안·승인·명령</a:t>
+            </a:r>
+          </a:p>
+        </p:txBody>
+      </p:sp>
+      <p:sp>
+        <p:nvSpPr>
+          <p:cNvPr id="13" name="TextBox 12"/>
+          <p:cNvSpPr txBox="1"/>
+          <p:nvPr/>
+        </p:nvSpPr>
+        <p:spPr>
+          <a:xfrm>
+            <a:off x="6428232" y="2935224"/>
+            <a:ext cx="5001768" cy="411480"/>
+          </a:xfrm>
+          <a:prstGeom prst="rect">
+            <a:avLst/>
+          </a:prstGeom>
+          <a:noFill/>
+        </p:spPr>
+        <p:txBody>
+          <a:bodyPr wrap="square" anchor="t"/>
+          <a:lstStyle/>
+          <a:p>
+            <a:pPr algn="l" eaLnBrk="0">
+              <a:lnSpc>
+                <a:spcPct val="110000"/>
+              </a:lnSpc>
+            </a:pPr>
+            <a:r>
+              <a:rPr sz="1600" b="1">
+                <a:solidFill>
+                  <a:srgbClr val="1A6FC4"/>
+                </a:solidFill>
+                <a:latin typeface="맑은 고딕"/>
+                <a:ea typeface="맑은 고딕"/>
+                <a:cs typeface="맑은 고딕"/>
+              </a:rPr>
+              <a:t>재관측·보고</a:t>
+            </a:r>
+          </a:p>
+        </p:txBody>
+      </p:sp>
+      <p:sp>
+        <p:nvSpPr>
+          <p:cNvPr id="14" name="Rounded Rectangle 13"/>
           <p:cNvSpPr/>
           <p:nvPr/>
         </p:nvSpPr>
         <p:spPr>
           <a:xfrm>
-            <a:off x="3619423" y="4557077"/>
-            <a:ext cx="822960" cy="292608"/>
+            <a:off x="548640" y="4023360"/>
+            <a:ext cx="5422392" cy="2103120"/>
           </a:xfrm>
           <a:prstGeom prst="roundRect">
             <a:avLst>
-              <a:gd name="adj" fmla="val 50000"/>
-            </a:avLst>
-          </a:prstGeom>
-          <a:solidFill>
-            <a:srgbClr val="D3D9E1"/>
-          </a:solidFill>
-          <a:ln>
-            <a:noFill/>
-          </a:ln>
-        </p:spPr>
-        <p:txBody>
-          <a:bodyPr rtlCol="0" anchor="ctr"/>
-          <a:lstStyle/>
-          <a:p>
-            <a:pPr algn="ctr"/>
-          </a:p>
-        </p:txBody>
-      </p:sp>
-      <p:sp>
-        <p:nvSpPr>
-          <p:cNvPr id="13" name="TextBox 12"/>
-          <p:cNvSpPr txBox="1"/>
-          <p:nvPr/>
-        </p:nvSpPr>
-        <p:spPr>
-          <a:xfrm>
-            <a:off x="3619423" y="4557077"/>
-            <a:ext cx="822960" cy="292608"/>
-          </a:xfrm>
-          <a:prstGeom prst="rect">
-            <a:avLst/>
-          </a:prstGeom>
-          <a:noFill/>
-        </p:spPr>
-        <p:txBody>
-          <a:bodyPr wrap="square" anchor="ctr"/>
-          <a:lstStyle/>
-          <a:p>
-            <a:pPr algn="ctr" eaLnBrk="0">
-              <a:lnSpc>
-                <a:spcPct val="110000"/>
-              </a:lnSpc>
-            </a:pPr>
-            <a:r>
-              <a:rPr sz="1200" b="1">
-                <a:solidFill>
-                  <a:srgbClr val="13294B"/>
-                </a:solidFill>
-                <a:latin typeface="맑은 고딕"/>
-                <a:ea typeface="맑은 고딕"/>
-                <a:cs typeface="맑은 고딕"/>
-              </a:rPr>
-              <a:t>범위</a:t>
-            </a:r>
-          </a:p>
-        </p:txBody>
-      </p:sp>
-      <p:sp>
-        <p:nvSpPr>
-          <p:cNvPr id="14" name="Rounded Rectangle 13"/>
-          <p:cNvSpPr/>
-          <p:nvPr/>
-        </p:nvSpPr>
-        <p:spPr>
-          <a:xfrm>
-            <a:off x="6233007" y="2995866"/>
-            <a:ext cx="2567863" cy="1990978"/>
-          </a:xfrm>
-          <a:prstGeom prst="roundRect">
-            <a:avLst>
-              <a:gd name="adj" fmla="val 4000"/>
+              <a:gd name="adj" fmla="val 6000"/>
             </a:avLst>
           </a:prstGeom>
           <a:solidFill>
@@ -59042,8 +58581,8 @@
         </p:nvSpPr>
         <p:spPr>
           <a:xfrm>
-            <a:off x="6397599" y="3197034"/>
-            <a:ext cx="2238679" cy="1286890"/>
+            <a:off x="758952" y="4187952"/>
+            <a:ext cx="5001768" cy="438912"/>
           </a:xfrm>
           <a:prstGeom prst="rect">
             <a:avLst/>
@@ -59058,12 +58597,9 @@
               <a:lnSpc>
                 <a:spcPct val="110000"/>
               </a:lnSpc>
-              <a:spcAft>
-                <a:spcPts val="400"/>
-              </a:spcAft>
-            </a:pPr>
-            <a:r>
-              <a:rPr sz="2150" b="1">
+            </a:pPr>
+            <a:r>
+              <a:rPr sz="1800" b="1">
                 <a:solidFill>
                   <a:srgbClr val="13294B"/>
                 </a:solidFill>
@@ -59074,113 +58610,100 @@
               <a:t>처리 기록</a:t>
             </a:r>
           </a:p>
+        </p:txBody>
+      </p:sp>
+      <p:sp>
+        <p:nvSpPr>
+          <p:cNvPr id="16" name="TextBox 15"/>
+          <p:cNvSpPr txBox="1"/>
+          <p:nvPr/>
+        </p:nvSpPr>
+        <p:spPr>
+          <a:xfrm>
+            <a:off x="758952" y="4718304"/>
+            <a:ext cx="5001768" cy="502920"/>
+          </a:xfrm>
+          <a:prstGeom prst="rect">
+            <a:avLst/>
+          </a:prstGeom>
+          <a:noFill/>
+        </p:spPr>
+        <p:txBody>
+          <a:bodyPr wrap="square" anchor="t"/>
+          <a:lstStyle/>
           <a:p>
             <a:pPr algn="l" eaLnBrk="0">
               <a:lnSpc>
                 <a:spcPct val="110000"/>
               </a:lnSpc>
-              <a:spcAft>
-                <a:spcPts val="400"/>
-              </a:spcAft>
-            </a:pPr>
-            <a:r>
-              <a:rPr sz="1750" b="0">
-                <a:solidFill>
-                  <a:srgbClr val="1F2A3A"/>
-                </a:solidFill>
-                <a:latin typeface="맑은 고딕"/>
-                <a:ea typeface="맑은 고딕"/>
-                <a:cs typeface="맑은 고딕"/>
-              </a:rPr>
-              <a:t>사건 · 인스턴스 · 판본 · 결과</a:t>
-            </a:r>
-          </a:p>
-        </p:txBody>
-      </p:sp>
-      <p:sp>
-        <p:nvSpPr>
-          <p:cNvPr id="16" name="Rounded Rectangle 15"/>
+            </a:pPr>
+            <a:r>
+              <a:rPr sz="1700" b="0">
+                <a:solidFill>
+                  <a:srgbClr val="13294B"/>
+                </a:solidFill>
+                <a:latin typeface="맑은 고딕"/>
+                <a:ea typeface="맑은 고딕"/>
+                <a:cs typeface="맑은 고딕"/>
+              </a:rPr>
+              <a:t>사건·인스턴스</a:t>
+            </a:r>
+          </a:p>
+        </p:txBody>
+      </p:sp>
+      <p:sp>
+        <p:nvSpPr>
+          <p:cNvPr id="17" name="TextBox 16"/>
+          <p:cNvSpPr txBox="1"/>
+          <p:nvPr/>
+        </p:nvSpPr>
+        <p:spPr>
+          <a:xfrm>
+            <a:off x="758952" y="5266944"/>
+            <a:ext cx="5001768" cy="411480"/>
+          </a:xfrm>
+          <a:prstGeom prst="rect">
+            <a:avLst/>
+          </a:prstGeom>
+          <a:noFill/>
+        </p:spPr>
+        <p:txBody>
+          <a:bodyPr wrap="square" anchor="t"/>
+          <a:lstStyle/>
+          <a:p>
+            <a:pPr algn="l" eaLnBrk="0">
+              <a:lnSpc>
+                <a:spcPct val="110000"/>
+              </a:lnSpc>
+            </a:pPr>
+            <a:r>
+              <a:rPr sz="1600" b="1">
+                <a:solidFill>
+                  <a:srgbClr val="1A6FC4"/>
+                </a:solidFill>
+                <a:latin typeface="맑은 고딕"/>
+                <a:ea typeface="맑은 고딕"/>
+                <a:cs typeface="맑은 고딕"/>
+              </a:rPr>
+              <a:t>판본·결과</a:t>
+            </a:r>
+          </a:p>
+        </p:txBody>
+      </p:sp>
+      <p:sp>
+        <p:nvSpPr>
+          <p:cNvPr id="18" name="Rounded Rectangle 17"/>
           <p:cNvSpPr/>
           <p:nvPr/>
         </p:nvSpPr>
         <p:spPr>
           <a:xfrm>
-            <a:off x="6461607" y="4557077"/>
-            <a:ext cx="822960" cy="292608"/>
+            <a:off x="6217920" y="4023360"/>
+            <a:ext cx="5422392" cy="2103120"/>
           </a:xfrm>
           <a:prstGeom prst="roundRect">
             <a:avLst>
-              <a:gd name="adj" fmla="val 50000"/>
-            </a:avLst>
-          </a:prstGeom>
-          <a:solidFill>
-            <a:srgbClr val="D3D9E1"/>
-          </a:solidFill>
-          <a:ln>
-            <a:noFill/>
-          </a:ln>
-        </p:spPr>
-        <p:txBody>
-          <a:bodyPr rtlCol="0" anchor="ctr"/>
-          <a:lstStyle/>
-          <a:p>
-            <a:pPr algn="ctr"/>
-          </a:p>
-        </p:txBody>
-      </p:sp>
-      <p:sp>
-        <p:nvSpPr>
-          <p:cNvPr id="17" name="TextBox 16"/>
-          <p:cNvSpPr txBox="1"/>
-          <p:nvPr/>
-        </p:nvSpPr>
-        <p:spPr>
-          <a:xfrm>
-            <a:off x="6461607" y="4557077"/>
-            <a:ext cx="822960" cy="292608"/>
-          </a:xfrm>
-          <a:prstGeom prst="rect">
-            <a:avLst/>
-          </a:prstGeom>
-          <a:noFill/>
-        </p:spPr>
-        <p:txBody>
-          <a:bodyPr wrap="square" anchor="ctr"/>
-          <a:lstStyle/>
-          <a:p>
-            <a:pPr algn="ctr" eaLnBrk="0">
-              <a:lnSpc>
-                <a:spcPct val="110000"/>
-              </a:lnSpc>
-            </a:pPr>
-            <a:r>
-              <a:rPr sz="1200" b="1">
-                <a:solidFill>
-                  <a:srgbClr val="13294B"/>
-                </a:solidFill>
-                <a:latin typeface="맑은 고딕"/>
-                <a:ea typeface="맑은 고딕"/>
-                <a:cs typeface="맑은 고딕"/>
-              </a:rPr>
-              <a:t>산출물</a:t>
-            </a:r>
-          </a:p>
-        </p:txBody>
-      </p:sp>
-      <p:sp>
-        <p:nvSpPr>
-          <p:cNvPr id="18" name="Rounded Rectangle 17"/>
-          <p:cNvSpPr/>
-          <p:nvPr/>
-        </p:nvSpPr>
-        <p:spPr>
-          <a:xfrm>
-            <a:off x="9075191" y="2995866"/>
-            <a:ext cx="2567863" cy="1990978"/>
-          </a:xfrm>
-          <a:prstGeom prst="roundRect">
-            <a:avLst>
-              <a:gd name="adj" fmla="val 4000"/>
+              <a:gd name="adj" fmla="val 6000"/>
             </a:avLst>
           </a:prstGeom>
           <a:solidFill>
@@ -59208,8 +58731,8 @@
         </p:nvSpPr>
         <p:spPr>
           <a:xfrm>
-            <a:off x="9239783" y="3197034"/>
-            <a:ext cx="2238679" cy="1286890"/>
+            <a:off x="6428232" y="4187952"/>
+            <a:ext cx="5001768" cy="438912"/>
           </a:xfrm>
           <a:prstGeom prst="rect">
             <a:avLst/>
@@ -59224,12 +58747,9 @@
               <a:lnSpc>
                 <a:spcPct val="110000"/>
               </a:lnSpc>
-              <a:spcAft>
-                <a:spcPts val="400"/>
-              </a:spcAft>
-            </a:pPr>
-            <a:r>
-              <a:rPr sz="2150" b="1">
+            </a:pPr>
+            <a:r>
+              <a:rPr sz="1800" b="1">
                 <a:solidFill>
                   <a:srgbClr val="13294B"/>
                 </a:solidFill>
@@ -59240,57 +58760,44 @@
               <a:t>결과 판정</a:t>
             </a:r>
           </a:p>
+        </p:txBody>
+      </p:sp>
+      <p:sp>
+        <p:nvSpPr>
+          <p:cNvPr id="20" name="TextBox 19"/>
+          <p:cNvSpPr txBox="1"/>
+          <p:nvPr/>
+        </p:nvSpPr>
+        <p:spPr>
+          <a:xfrm>
+            <a:off x="6428232" y="4718304"/>
+            <a:ext cx="5001768" cy="502920"/>
+          </a:xfrm>
+          <a:prstGeom prst="rect">
+            <a:avLst/>
+          </a:prstGeom>
+          <a:noFill/>
+        </p:spPr>
+        <p:txBody>
+          <a:bodyPr wrap="square" anchor="t"/>
+          <a:lstStyle/>
           <a:p>
             <a:pPr algn="l" eaLnBrk="0">
               <a:lnSpc>
                 <a:spcPct val="110000"/>
               </a:lnSpc>
-              <a:spcAft>
-                <a:spcPts val="400"/>
-              </a:spcAft>
-            </a:pPr>
-            <a:r>
-              <a:rPr sz="1750" b="0">
-                <a:solidFill>
-                  <a:srgbClr val="1F2A3A"/>
-                </a:solidFill>
-                <a:latin typeface="맑은 고딕"/>
-                <a:ea typeface="맑은 고딕"/>
-                <a:cs typeface="맑은 고딕"/>
-              </a:rPr>
-              <a:t>승인 대기 · 정상 · 거절 · 미달 구별</a:t>
-            </a:r>
-          </a:p>
-        </p:txBody>
-      </p:sp>
-      <p:sp>
-        <p:nvSpPr>
-          <p:cNvPr id="20" name="Rounded Rectangle 19"/>
-          <p:cNvSpPr/>
-          <p:nvPr/>
-        </p:nvSpPr>
-        <p:spPr>
-          <a:xfrm>
-            <a:off x="9303791" y="4557077"/>
-            <a:ext cx="822960" cy="292608"/>
-          </a:xfrm>
-          <a:prstGeom prst="roundRect">
-            <a:avLst>
-              <a:gd name="adj" fmla="val 50000"/>
-            </a:avLst>
-          </a:prstGeom>
-          <a:solidFill>
-            <a:srgbClr val="D3D9E1"/>
-          </a:solidFill>
-          <a:ln>
-            <a:noFill/>
-          </a:ln>
-        </p:spPr>
-        <p:txBody>
-          <a:bodyPr rtlCol="0" anchor="ctr"/>
-          <a:lstStyle/>
-          <a:p>
-            <a:pPr algn="ctr"/>
+            </a:pPr>
+            <a:r>
+              <a:rPr sz="1700" b="0">
+                <a:solidFill>
+                  <a:srgbClr val="13294B"/>
+                </a:solidFill>
+                <a:latin typeface="맑은 고딕"/>
+                <a:ea typeface="맑은 고딕"/>
+                <a:cs typeface="맑은 고딕"/>
+              </a:rPr>
+              <a:t>승인 대기·정상</a:t>
+            </a:r>
           </a:p>
         </p:txBody>
       </p:sp>
@@ -59302,33 +58809,33 @@
         </p:nvSpPr>
         <p:spPr>
           <a:xfrm>
-            <a:off x="9303791" y="4557077"/>
-            <a:ext cx="822960" cy="292608"/>
-          </a:xfrm>
-          <a:prstGeom prst="rect">
-            <a:avLst/>
-          </a:prstGeom>
-          <a:noFill/>
-        </p:spPr>
-        <p:txBody>
-          <a:bodyPr wrap="square" anchor="ctr"/>
-          <a:lstStyle/>
-          <a:p>
-            <a:pPr algn="ctr" eaLnBrk="0">
-              <a:lnSpc>
-                <a:spcPct val="110000"/>
-              </a:lnSpc>
-            </a:pPr>
-            <a:r>
-              <a:rPr sz="1200" b="1">
-                <a:solidFill>
-                  <a:srgbClr val="13294B"/>
-                </a:solidFill>
-                <a:latin typeface="맑은 고딕"/>
-                <a:ea typeface="맑은 고딕"/>
-                <a:cs typeface="맑은 고딕"/>
-              </a:rPr>
-              <a:t>판정</a:t>
+            <a:off x="6428232" y="5266944"/>
+            <a:ext cx="5001768" cy="411480"/>
+          </a:xfrm>
+          <a:prstGeom prst="rect">
+            <a:avLst/>
+          </a:prstGeom>
+          <a:noFill/>
+        </p:spPr>
+        <p:txBody>
+          <a:bodyPr wrap="square" anchor="t"/>
+          <a:lstStyle/>
+          <a:p>
+            <a:pPr algn="l" eaLnBrk="0">
+              <a:lnSpc>
+                <a:spcPct val="110000"/>
+              </a:lnSpc>
+            </a:pPr>
+            <a:r>
+              <a:rPr sz="1600" b="1">
+                <a:solidFill>
+                  <a:srgbClr val="1A6FC4"/>
+                </a:solidFill>
+                <a:latin typeface="맑은 고딕"/>
+                <a:ea typeface="맑은 고딕"/>
+                <a:cs typeface="맑은 고딕"/>
+              </a:rPr>
+              <a:t>거절·미달 구별</a:t>
             </a:r>
           </a:p>
         </p:txBody>

--- a/산출물/실전반/이론/06회차/실전반_06일차.pptx
+++ b/산출물/실전반/이론/06회차/실전반_06일차.pptx
@@ -562,7 +562,32 @@
           <a:lstStyle/>
           <a:p>
             <a:r>
-              <a:t>안녕하세요. 이번 회차에서는 설비 이상에 대응하는 업무를 하나의 프로세스로 설계하고, 그 프로세스가 실제로 어떻게 실행되고 통제되는지까지 다룹니다. 앞 회차까지 에이전트가 쿨러 성능 저하 경보를 받아 원인을 가리고 추천안을 내는 데까지 봤죠. 그런데 추천안이 나왔다고 설비가 바로 좋아지지는 않습니다. 누군가 승인해야 하고, 명령이 설비로 가야 하고, 정말 나아졌는지 다시 봐야 해요. 이 일들을 누가, 어떤 순서로, 무엇을 지키며 이어 가는지가 이번 회차의 물음입니다. 그 답을 프로세스로 정의하고, BPMN이라는 표준 그림으로 그리고, 실행 기록과 맞춰 보겠습니다.</a:t>
+              <a:t>[짚을 곳] 제목 → 부제 → 아이콘 셋(갈림 · 승인 · 기록)</a:t>
+            </a:r>
+          </a:p>
+          <a:p>
+            <a:r>
+              <a:t>· 앞에서: 에이전트가 쿨러 경보를 받아 원인을 가리고 추천안까지</a:t>
+            </a:r>
+          </a:p>
+          <a:p>
+            <a:r>
+              <a:t>· 추천안이 나왔다고 설비가 좋아지지 않는다: 승인 · 명령 · 재관측이 남음</a:t>
+            </a:r>
+          </a:p>
+          <a:p>
+            <a:r>
+              <a:t>· 물음: 이 일들을 누가, 어떤 순서로, 무엇을 지키며 잇나</a:t>
+            </a:r>
+          </a:p>
+          <a:p>
+            <a:r>
+              <a:t>· 답의 순서: 프로세스로 정의 → BPMN 표준 그림 → 실행 기록과 대조</a:t>
+            </a:r>
+          </a:p>
+          <a:p>
+            <a:r>
+              <a:t>[다음] 네 가지 목표</a:t>
             </a:r>
           </a:p>
         </p:txBody>
@@ -632,7 +657,27 @@
           <a:lstStyle/>
           <a:p>
             <a:r>
-              <a:t>두 번째 단원에서는 이 프로세스를 실제로 정의하고, 운영하면서 고쳐 가는 방법을 봅니다. 프로세스를 세운다는 건 실제로 무엇을 정하는 일일까요? 그리고 한 번 세운 프로세스는 어떤 차례로 고쳐 갈까요?</a:t>
+              <a:t>[짚을 곳] 단원 번호 02 → 제목 → 부제</a:t>
+            </a:r>
+          </a:p>
+          <a:p>
+            <a:r>
+              <a:t>· 물음: 프로세스를 세운다는 건 실제로 무엇을 정하는 일인가</a:t>
+            </a:r>
+          </a:p>
+          <a:p>
+            <a:r>
+              <a:t>· 물음: 한 번 세운 프로세스는 어떤 차례로 고쳐 가나</a:t>
+            </a:r>
+          </a:p>
+          <a:p>
+            <a:r>
+              <a:t>· 다룰 것: 시작 · 입력 · 담당 · 완료, 경보가 처리 건을 여는 모습, BPM의 다섯 활동</a:t>
+            </a:r>
+          </a:p>
+          <a:p>
+            <a:r>
+              <a:t>[다음] 실행 전에 정할 네 가지</a:t>
             </a:r>
           </a:p>
         </p:txBody>
@@ -702,7 +747,37 @@
           <a:lstStyle/>
           <a:p>
             <a:r>
-              <a:t>프로세스를 정의할 때 먼저 정할 것은 화면 왼쪽의 네 가지, 시작, 입력, 담당, 완료입니다. 가운데 열이 긴급 대응 프로세스의 답이고, 오른쪽 열이 그걸 정하지 않았을 때 생기는 일이에요. 시작은 쿨러 성능 저하 경보가 도착하는 것입니다. 정해 두지 않으면 누군가 화면을 보고 있어야 업무가 시작되죠. 입력은 설비와 경보 식별자, 그리고 경보 내용 전체예요. 처음에 받아 두지 않으면 단계마다 경보를 다시 찾으러 가고, 그 사이 값이 바뀌어 출발점이 흐려집니다. 담당은 작업마다 에이전트, 운전원 역할, 시스템으로 정합니다. 사람 이름이 아니라 역할로 적어서, 근무자가 바뀌어도 흐름은 그대로 둡니다. 강조한 마지막 줄이 완료예요. 잘 끝난 경우만 정하기 쉬운데, 정상, 회복 미달, 거절도 각자 정해 둔 끝으로 닫아야 합니다. 그리고 운전원이 아예 응답하지 않으면 닫지 않고, 기한이 지나면 알림만 보낸 뒤 계속 기다리게 정해 두었어요. 시간이 지났다고 자동으로 승인하거나 거절하지 않는다는 뜻입니다. 이걸 정하지 않으면 결말 없이 떠 있는 처리 건이 생깁니다. 이 네 가지는 일이 벌어진 뒤가 아니라 실행 전에 정해 둡니다.</a:t>
+              <a:t>[짚을 곳] 표 네 줄(정할 것) → 가운데(긴급 대응의 답) → 오른쪽(정하지 않으면) → 강조한 넷째 줄</a:t>
+            </a:r>
+          </a:p>
+          <a:p>
+            <a:r>
+              <a:t>· 시작: 쿨러 성능 저하 경보 도착 → 안 정하면 누군가 화면을 봐야 시작</a:t>
+            </a:r>
+          </a:p>
+          <a:p>
+            <a:r>
+              <a:t>· 입력: 설비 · 경보 식별자 · 경보 내용 전체 → 안 정하면 단계마다 경보를 다시 찾고 출발점이 흐려짐</a:t>
+            </a:r>
+          </a:p>
+          <a:p>
+            <a:r>
+              <a:t>· 담당: 작업마다 에이전트 · 운전원 역할 · 시스템, 사람 이름이 아니라 역할로</a:t>
+            </a:r>
+          </a:p>
+          <a:p>
+            <a:r>
+              <a:t>· 완료: 정상 · 미달 · 거절을 정해 둔 끝으로, 응답 없음은 닫지 않고 알림 뒤 기다림(자동 승인 · 거절 없음)</a:t>
+            </a:r>
+          </a:p>
+          <a:p>
+            <a:r>
+              <a:t>· 안 정하면 결말 없이 떠 있는 처리 건, 네 가지는 실행 전에</a:t>
+            </a:r>
+          </a:p>
+          <a:p>
+            <a:r>
+              <a:t>[다음] 경보 한 건이 처리 건을 여는 모습</a:t>
             </a:r>
           </a:p>
         </p:txBody>
@@ -772,7 +847,42 @@
           <a:lstStyle/>
           <a:p>
             <a:r>
-              <a:t>시작과 입력이 실제로 어떻게 생기는지 기록으로 보겠습니다. 화면 왼쪽 위가 쿨러 사건의 경보예요. 경보의 종류를 나타내는 칸이 쿨러 성능 저하이고, 설비는 HYD-01입니다. 화살표 아래, 이 경보가 메시지 시작 이벤트에 도착하면서 처리 건이 열렸습니다. 경보와 같은 시각이죠. 오른쪽 첫 점처럼, 경보의 종류가 이 프로세스를 여는 열쇠입니다. 사람이 버튼을 누르는 게 아니라 정해 둔 종류의 경보가 오면 열려요. 그 아래 입력 줄을 보세요. 설비와 경보 식별자뿐 아니라 경보 메시지 전체가 처리 건에 실립니다. 그래서 뒤의 단계들은 경보가 났을 때의 내용을 같은 출발점으로 읽어요. 다만 이건 출발점의 기록이고, 나중에 다시 읽는 현재값과 같은 시점의 값은 아닙니다. 맨 아래 줄은 약속 하나입니다. 같은 정의에 같은 경보 식별자가 다시 와도 처리 건을 새로 열지 않아요. 메시지는 같은 것이 두 번 도착할 수 있어서, 받는 쪽이 중복을 가려야 업무가 두 번 시작되지 않습니다.</a:t>
+              <a:t>[짚을 곳] 왼쪽 코드 위(경보) → 화살표(메시지 시작 이벤트) → 처리 건 → 입력 → 마지막 줄</a:t>
+            </a:r>
+          </a:p>
+          <a:p>
+            <a:r>
+              <a:t>· 경보 ALT-hyd01-0014-e0a1, pattern COOLER_DEGRADATION, asset HYD-01</a:t>
+            </a:r>
+          </a:p>
+          <a:p>
+            <a:r>
+              <a:t>· 메시지 시작 이벤트 「쿨러 과열 경보」에 도착 → 처리 건 c3_cooling.4f93a9d0… 11:13:08(경보와 같은 시각)</a:t>
+            </a:r>
+          </a:p>
+          <a:p>
+            <a:r>
+              <a:t>· pattern = 이 프로세스를 여는 열쇠, 사람이 버튼을 누르지 않는다</a:t>
+            </a:r>
+          </a:p>
+          <a:p>
+            <a:r>
+              <a:t>· 입력: asset · alert · alert_id · pattern · incident, 경보 메시지 전체가 실림 → 같은 출발점</a:t>
+            </a:r>
+          </a:p>
+          <a:p>
+            <a:r>
+              <a:t>· 출발점의 기록일 뿐, 나중에 다시 읽는 현재값과 같은 시점은 아님</a:t>
+            </a:r>
+          </a:p>
+          <a:p>
+            <a:r>
+              <a:t>· 중복 방지: 같은 정의 + 같은 경보 id면 새로 열지 않음(메시지는 두 번 올 수 있다)</a:t>
+            </a:r>
+          </a:p>
+          <a:p>
+            <a:r>
+              <a:t>[다음] 정의한 프로세스를 고쳐 가는 방법</a:t>
             </a:r>
           </a:p>
         </p:txBody>
@@ -842,7 +952,42 @@
           <a:lstStyle/>
           <a:p>
             <a:r>
-              <a:t>프로세스는 한 번 정하고 끝나지 않습니다. 설비와 조직과 목표가 바뀌면 프로세스도 바뀌어야 하죠. 이렇게 프로세스를 분석하고, 설계하고, 실행하고, 지켜보고, 고쳐 가는 일 전체를 관리하는 방법을 업무 프로세스 관리, BPM이라고 합니다. 화면의 다섯 단계가 그 활동이고, 단계마다 이 시스템에서 실제로 하는 일을 적었어요. 분석은 지금 업무에서 시작, 입력, 담당, 완료와 일이 끊기는 자리를 찾는 일입니다. 앞 장에서 정한 네 가지가 여기서 나와요. 설계는 편집기로 흐름을 그리고 작업마다 실행할 기능을 연결하는 일이고, 실행은 그렇게 만든 정의를 판본으로 등록하고 배포해서 경보마다 처리 건이 열리게 하는 일입니다. 모니터링은 처리 건 화면에서 단계마다 누가 맡았고, 어디서 기다렸고, 결과가 어땠는지를 보는 일이에요. 그리고 강조한 개선에서 찾은 문제를 고쳐 새 판본으로 내면, 다음 경보부터 고친 흐름이 쓰입니다. 개선한 흐름은 다시 분석의 대상이 되니까, 다섯 단계는 직선이 아니라 고리로 돌아요. 단계 이름과 묶음은 자료마다 조금 다를 수 있지만, 실행 결과를 다음 개선에 반영한다는 원리는 같습니다.</a:t>
+              <a:t>[짚을 곳] 단계 다섯 왼쪽부터 → 강조한 개선 → 다시 분석으로 도는 고리</a:t>
+            </a:r>
+          </a:p>
+          <a:p>
+            <a:r>
+              <a:t>· BPM(Business Process Management): 분석 · 설계 · 실행 · 모니터링 · 개선을 되풀이하는 관리 방법</a:t>
+            </a:r>
+          </a:p>
+          <a:p>
+            <a:r>
+              <a:t>· 분석: 시작 · 입력 · 담당 · 완료와 끊기는 자리</a:t>
+            </a:r>
+          </a:p>
+          <a:p>
+            <a:r>
+              <a:t>· 설계: 흐름을 그리고 실행 기능 연결, 실행: 판본 등록 · 배포 → 경보마다 처리 건</a:t>
+            </a:r>
+          </a:p>
+          <a:p>
+            <a:r>
+              <a:t>· 모니터링: 단계별 담당 · 대기 · 결과</a:t>
+            </a:r>
+          </a:p>
+          <a:p>
+            <a:r>
+              <a:t>· 개선: 고친 새 판본을 다음 경보부터, 다시 분석 대상 → 직선이 아니라 고리</a:t>
+            </a:r>
+          </a:p>
+          <a:p>
+            <a:r>
+              <a:t>· 단계 이름은 자료마다 달라도 실행 결과를 다음 개선에 반영한다는 원리는 같다</a:t>
+            </a:r>
+          </a:p>
+          <a:p>
+            <a:r>
+              <a:t>[다음] 응용, 모니터링 기록으로 개선 제안 가리기</a:t>
             </a:r>
           </a:p>
         </p:txBody>
@@ -912,7 +1057,42 @@
           <a:lstStyle/>
           <a:p>
             <a:r>
-              <a:t>모니터링 기록을 실제로 써 보겠습니다. 쿨러 사건의 기록을 보면 에이전트 단계가 가장 오래 걸렸고, 재관측이 그다음이었고, 운전원 승인은 짧았어요. 이 기록을 보고 개선 제안이 세 가지 나왔다고 해 보죠. 표의 가운데 열이 제안마다 기록에서 먼저 볼 것, 오른쪽이 판정입니다. 첫 줄, 재관측이 길어서 빼자는 제안이에요. 그런데 명령이 처리됐다는 것과 유온이 실제로 회복됐다는 것은 서로 다른 사실이었죠. 재관측은 그 둘째 사실을 확인하는 시간이라 유지합니다. 오래 걸렸다는 것만으로 없앨 단계가 되지는 않아요. 둘째 줄은 승인 대기를 줄이자는 제안입니다. 이때는 담당자가 요청을 몰라서 기다렸는지, 알림이 제대로 갔는지를 먼저 봅니다. 승인 자리는 두고 알림과 담당 배정을 고치는 게 맞아요. 셋째 줄, 에이전트 단계를 줄이자는 제안은 실제 개선 후보입니다. 처리 건 시간에서 이 단계가 차지한 몫이 크니까요. 다만 처리 건 하나만 보지 말고 같은 종류의 처리 건 여러 건을 같은 시작과 끝으로 견줘서, 줄어든 게 정말 업무 전체의 시간인지 확인합니다. 다음 시간에는 이렇게 정의한 흐름을 누구나 같은 뜻으로 읽는 그림, BPMN으로 표현하는 방법을 보겠습니다.</a:t>
+              <a:t>[짚을 곳] 표 세 제안 → 가운데(기록에서 먼저 볼 것) → 오른쪽 판정 → 강조한 셋째 줄</a:t>
+            </a:r>
+          </a:p>
+          <a:p>
+            <a:r>
+              <a:t>· 쿨러 기록: 에이전트 단계가 가장 길고, 재관측 다음, 승인은 짧았다</a:t>
+            </a:r>
+          </a:p>
+          <a:p>
+            <a:r>
+              <a:t>· 재관측이 길다 → 유지: 명령 처리 ≠ 유온 회복, 회복을 확인하는 시간</a:t>
+            </a:r>
+          </a:p>
+          <a:p>
+            <a:r>
+              <a:t>· 승인 대기를 줄이자 → 담당자가 몰랐나 · 알림이 갔나, 승인은 두고 알림 · 배정을 고침</a:t>
+            </a:r>
+          </a:p>
+          <a:p>
+            <a:r>
+              <a:t>· 에이전트 단계를 줄이자 → 개선 후보, 처리 건 시간에서의 몫 · 같은 종류 처리 건 여럿</a:t>
+            </a:r>
+          </a:p>
+          <a:p>
+            <a:r>
+              <a:t>· 같은 시작 · 끝(경계)으로 견줘 업무 전체 시간이 줄었는지</a:t>
+            </a:r>
+          </a:p>
+          <a:p>
+            <a:r>
+              <a:t>· 오래 걸렸다는 것만으로 없앨 단계는 아니다</a:t>
+            </a:r>
+          </a:p>
+          <a:p>
+            <a:r>
+              <a:t>[다음] 셋째 단원, BPMN</a:t>
             </a:r>
           </a:p>
         </p:txBody>
@@ -982,7 +1162,27 @@
           <a:lstStyle/>
           <a:p>
             <a:r>
-              <a:t>이번 시간에는 긴급 대응 프로세스를 BPMN이라는 표준 그림으로 표현하는 방법을 봅니다. 세 번째 단원의 물음은 이겁니다. 업무를 누구나 같은 뜻으로 읽는 그림으로 그리면, 그 그림만으로 실행까지 정해질까요? 도형의 뜻을 익히고, 그림 파일과 실제로 실행할 정의가 어디서 갈리는지 보겠습니다.</a:t>
+              <a:t>[짚을 곳] 단원 번호 03 → 제목 → 부제</a:t>
+            </a:r>
+          </a:p>
+          <a:p>
+            <a:r>
+              <a:t>· 물음: 누구나 같은 뜻으로 읽는 그림으로 그리면, 그 그림만으로 실행까지 정해지나</a:t>
+            </a:r>
+          </a:p>
+          <a:p>
+            <a:r>
+              <a:t>· 다룰 것: 문장 vs BPMN, 한 장의 긴급 대응, 도형의 종류, 작업마다 붙는 실행 기능, 선 이름과 갈림 조건</a:t>
+            </a:r>
+          </a:p>
+          <a:p>
+            <a:r>
+              <a:t>· 그림 파일과 실제로 실행할 정의가 갈리는 곳</a:t>
+            </a:r>
+          </a:p>
+          <a:p>
+            <a:r>
+              <a:t>[다음] 문장 vs 그림</a:t>
             </a:r>
           </a:p>
         </p:txBody>
@@ -1052,7 +1252,42 @@
           <a:lstStyle/>
           <a:p>
             <a:r>
-              <a:t>먼저 문장으로 적은 절차와 그림으로 그린 절차를 견줘 볼게요. 화면 왼쪽이 문장, 오른쪽이 BPMN입니다. 세 줄이 같은 물음에 대응해요. 긴급 대응 절차를 문장으로 적으면, 승인하면, 아니면, 거절하면 같은 조건이 문장 여기저기에 흩어집니다. 갈래가 몇 개인지 세려면 처음부터 다시 읽어야 하죠. 재관측과 보고를 누가 하는지는 빠지기 쉽고, 승인이 늦어 알림을 보낸 뒤에도 계속 기다리는지는 읽는 사람마다 다르게 이해합니다. 오른쪽처럼 BPMN으로 그리면 갈림은 마름모로, 끝은 굵은 원으로 보여서 셀 수 있어요. 작업은 맡는 쪽의 칸에 놓이고, 기다림은 작업에 붙은 타이머의 선 모양으로 정해집니다. BPMN은 업무 프로세스 모델과 표기법이라는 뜻으로, 도형과 선의 뜻을 정해 둔 표기 표준이에요. DMN을 정한 OMG가 관리하고, BPMN 2.0은 국제 표준으로도 정해져 있습니다. 공통 표기가 있으니 현업 담당자와 구현하는 쪽이 같은 그림을 보고 같은 흐름을 확인할 수 있죠. 다만 BPMN으로 그렸다고 그 그림이 곧바로 실행되는 건 아닙니다. 이 차이는 이 단원 끝에서 따로 보겠습니다.</a:t>
+              <a:t>[짚을 곳] 왼쪽 칸(문장) → 강조한 오른쪽 칸(BPMN) → 세 줄이 같은 물음에 대응</a:t>
+            </a:r>
+          </a:p>
+          <a:p>
+            <a:r>
+              <a:t>· 문장: 「승인하면 … 아니면 … 거절하면」이 흩어져 갈래를 세려면 다시 읽음</a:t>
+            </a:r>
+          </a:p>
+          <a:p>
+            <a:r>
+              <a:t>· 문장: 재관측 · 보고를 누가 하는지 빠지기 쉽고, 알림 뒤에도 기다리는지 사람마다 다르게 읽음</a:t>
+            </a:r>
+          </a:p>
+          <a:p>
+            <a:r>
+              <a:t>· BPMN: 갈림은 마름모, 끝은 굵은 원으로 셀 수 있음, 작업은 맡는 쪽 레인에, 기다림은 타이머의 선 모양</a:t>
+            </a:r>
+          </a:p>
+          <a:p>
+            <a:r>
+              <a:t>· BPMN(Business Process Model and Notation): 도형과 선의 뜻을 정한 표기 표준, OMG 관리, BPMN 2.0은 국제 표준</a:t>
+            </a:r>
+          </a:p>
+          <a:p>
+            <a:r>
+              <a:t>· 현업과 구현하는 쪽이 같은 그림으로 같은 흐름을 확인</a:t>
+            </a:r>
+          </a:p>
+          <a:p>
+            <a:r>
+              <a:t>· 그렸다고 곧바로 실행되지는 않는다(단원 끝에서)</a:t>
+            </a:r>
+          </a:p>
+          <a:p>
+            <a:r>
+              <a:t>[다음] 한 장으로 그린 긴급 대응</a:t>
             </a:r>
           </a:p>
         </p:txBody>
@@ -1122,7 +1357,42 @@
           <a:lstStyle/>
           <a:p>
             <a:r>
-              <a:t>긴급 대응 프로세스 전체를 BPMN으로 그린 그림입니다. 처음엔 복잡해 보이니, 오른쪽에 적은 차례대로 도형을 찾아볼게요. 먼저 세 칸입니다. 위에서부터 담당자, 에이전트, 시스템의 칸이에요. 가운데 칸 왼쪽의 봉투가 그려진 원이 시작입니다. 쿨러 과열 경보라는 이름의 시작 이벤트로, 쿨러 성능 저하 경보가 도착하는 사건이에요. 거기서 표식 없는 상자, 원인 진단과 냉각 조치 제안으로 이어집니다. 셋째 점을 따라 위 칸으로 올라가면 사람 표식이 있는 상자, 운전원 승인이 있고, 바로 옆 마름모에서 승인과 거절이 갈립니다. 승인이면 아래 시스템 칸으로 내려가 냉각 명령, 재관측으로 가요. 마름모를 거치지 않고는 아래 칸 명령에 닿는 선이 없습니다. 마지막으로 운전원 승인 테두리에 붙은 점선 시계가 승인 지연 타이머이고, 그림 곳곳의 굵은 원 셋이 끝, 거절 종결, 알림이라는 끝 이벤트예요. 세어 보면 갈림이 둘, 끝이 셋입니다. 문장으로는 찾기 어려웠던 갈래가 그림에서는 한눈에 보이죠.</a:t>
+              <a:t>[짚을 곳] 오른쪽 차례대로: 세 칸 → 봉투 원 → 표식 없는 상자 → 사람 표식 상자 → 마름모 → 점선 시계 · 굵은 원 셋</a:t>
+            </a:r>
+          </a:p>
+          <a:p>
+            <a:r>
+              <a:t>· 칸: 위에서부터 담당자 · 에이전트 · 시스템</a:t>
+            </a:r>
+          </a:p>
+          <a:p>
+            <a:r>
+              <a:t>· 시작: 가운데 칸의 봉투 원 「쿨러 과열 경보」 → 원인 진단 · 냉각 조치 제안</a:t>
+            </a:r>
+          </a:p>
+          <a:p>
+            <a:r>
+              <a:t>· 위 칸 운전원 승인(사람 표식) → 마름모 승인? → 승인이면 아래 칸 냉각 명령 · 재관측</a:t>
+            </a:r>
+          </a:p>
+          <a:p>
+            <a:r>
+              <a:t>· 마름모를 거치지 않고 명령에 닿는 선이 없다</a:t>
+            </a:r>
+          </a:p>
+          <a:p>
+            <a:r>
+              <a:t>· 점선 시계 = 승인 지연 타이머, 굵은 원 셋 = 끝 · 거절 종결 · 알림</a:t>
+            </a:r>
+          </a:p>
+          <a:p>
+            <a:r>
+              <a:t>· 갈림 둘 · 끝 셋이 한눈에</a:t>
+            </a:r>
+          </a:p>
+          <a:p>
+            <a:r>
+              <a:t>[다음] 도형의 종류</a:t>
             </a:r>
           </a:p>
         </p:txBody>
@@ -1192,7 +1462,37 @@
           <a:lstStyle/>
           <a:p>
             <a:r>
-              <a:t>방금 찾은 도형의 종류와 뜻을 표로 정리했습니다. 가운데 열이 모양과 뜻, 오른쪽 열이 긴급 대응에서 그 도형이 쓰인 자리예요. 위 두 줄은 이벤트, 곧 원입니다. 이벤트는 프로세스에서 일어나는 사건이에요. 봉투가 든 가는 원은 메시지를 받으면 흐름을 여는 메시지 시작 이벤트고, 굵은 원은 도착한 갈래를 닫는 끝 이벤트입니다. 끝이 셋이라는 건 갈래마다 자기 끝이 있다는 뜻이에요. 가운데 세 줄은 작업, 둥근 사각형입니다. 작업은 프로세스 안에서 수행되는 일 하나죠. 표식이 그 일을 누가 하는지를 알려 줍니다. 사람 표식이 있으면 사람이 하는 사용자 작업으로 운전원 승인이 그렇고, 톱니 표식이 있으면 시스템이 하는 서비스 작업으로 냉각 명령, 재관측, 작업지시, 결과 보고가 그래요. 표식 없는 작업은 수행자를 그림이 아니라 실행 연결 때 정합니다. BPMN 표준에는 에이전트 작업이라는 요소가 따로 없어서, 여기서는 에이전트에게 맡길 원인 진단과 제안을 이 모양으로 그렸어요. 강조한 여섯째 줄이 게이트웨이, 흐름이 갈라지거나 합쳐지는 마름모입니다. 가위표가 있는 배타 게이트웨이는 조건이 참인 한 갈래로만 보내요. 승인과 거절이 동시에 일어날 수 없으니까 배타입니다. 마지막 줄 시퀀스 흐름은 같은 풀 안에서 순서를 잇는 실선 화살표고요.</a:t>
+              <a:t>[짚을 곳] 표 일곱 줄 → 가운데(모양과 뜻) → 오른쪽(긴급 대응의 자리) → 강조한 여섯째 줄</a:t>
+            </a:r>
+          </a:p>
+          <a:p>
+            <a:r>
+              <a:t>· 이벤트(원): 메시지 시작 이벤트(가는 원 + 봉투), 끝 이벤트(굵은 원, 갈래마다 자기 끝)</a:t>
+            </a:r>
+          </a:p>
+          <a:p>
+            <a:r>
+              <a:t>· 작업(둥근 사각형): 표식이 수행자, 사용자 작업(사람 표식) = 운전원 승인, 서비스 작업(톱니) = 명령 · 재관측 · 작업지시 · 보고</a:t>
+            </a:r>
+          </a:p>
+          <a:p>
+            <a:r>
+              <a:t>· 표식 없는 작업: 수행자는 실행 연결 때 정함, BPMN엔 에이전트 작업 요소가 없어 진단 · 제안을 이 모양으로</a:t>
+            </a:r>
+          </a:p>
+          <a:p>
+            <a:r>
+              <a:t>· 배타 게이트웨이(가위표 마름모): 조건이 참인 한 갈래로만(승인? · 유온 정상?)</a:t>
+            </a:r>
+          </a:p>
+          <a:p>
+            <a:r>
+              <a:t>· 시퀀스 흐름: 같은 풀 안의 순서를 잇는 실선 화살표</a:t>
+            </a:r>
+          </a:p>
+          <a:p>
+            <a:r>
+              <a:t>[다음] 응용, 이 그림만 넣으면 움직이나</a:t>
             </a:r>
           </a:p>
         </p:txBody>
@@ -1262,7 +1562,42 @@
           <a:lstStyle/>
           <a:p>
             <a:r>
-              <a:t>그림을 읽었으니 이번엔 실전 쪽 물음입니다. 이 그림 파일을 그대로 넣으면 에이전트가 움직이고 운전원에게 승인 요청이 갈까요? 표의 왼쪽이 그림의 요소, 가운데가 그 요소에 연결해야 하는 실행 기능, 오른쪽이 그림 파일만으로는 알 수 없는 것입니다. 첫 줄, 시작 이벤트에는 어떤 경보 종류가 이 흐름을 여는지 연결해야 해요. 그림에는 쿨러 과열 경보라는 이름만 있고, 실제로 여는 경보의 종류는 연결 값에 있습니다. 둘째 줄, 원인 진단과 제안 작업에는 판단과 제안을 맡는 실행 기능과 냉각 긴급 대응 에이전트를 연결해요. 이 연결을 해야 표식 없는 작업이 에이전트 단계가 됩니다. 강조한 셋째 줄, 운전원 승인에는 승인과 거절을 받는 기능과 운전원 역할을 연결합니다. 누가 승인할 권한이 있는지는 칸 이름이 아니라 이 연결이 정해요. 넷째, 다섯째 줄의 명령과 재관측, 작업지시에는 각각 PLC 명령, 회복 판정, CMMS 등록 기능이 붙고, 마지막 줄 결과 보고 넷에는 결과 값과 보고 문장이 붙습니다. 그러니까 같은 그림이라도 작업마다 실행 기능과 맡을 쪽이 연결돼야 실제로 움직입니다. 실습에서 자신이 그린 작업마다 어떤 실행 기능에 대응하는지 표시하는 게 바로 이 일이에요.</a:t>
+              <a:t>[짚을 곳] 표 여섯 줄 → 가운데(연결되는 실행 기능) → 오른쪽(그림에 없는 것) → 강조한 셋째 줄</a:t>
+            </a:r>
+          </a:p>
+          <a:p>
+            <a:r>
+              <a:t>· 시작: 경보 패턴 COOLER_DEGRADATION(그림엔 이름만)</a:t>
+            </a:r>
+          </a:p>
+          <a:p>
+            <a:r>
+              <a:t>· 진단 · 제안: task:decide + 냉각 긴급 대응 에이전트 → 표식 없는 작업이 에이전트 단계가 됨</a:t>
+            </a:r>
+          </a:p>
+          <a:p>
+            <a:r>
+              <a:t>· 운전원 승인: task:select-or-reject + 운전원 역할 → 권한은 칸 이름이 아니라 이 연결이 정함</a:t>
+            </a:r>
+          </a:p>
+          <a:p>
+            <a:r>
+              <a:t>· 명령 · 재관측: task:command · task:reobserve, 작업지시: task:work-order, 결과 보고 넷: svc:report</a:t>
+            </a:r>
+          </a:p>
+          <a:p>
+            <a:r>
+              <a:t>· 같은 그림도 작업마다 실행 기능과 맡을 쪽이 연결돼야 움직인다</a:t>
+            </a:r>
+          </a:p>
+          <a:p>
+            <a:r>
+              <a:t>· 실습에서 내 작업마다 대응 실행 기능을 표시하는 일이 이것</a:t>
+            </a:r>
+          </a:p>
+          <a:p>
+            <a:r>
+              <a:t>[다음] 선 이름과 갈림 조건</a:t>
             </a:r>
           </a:p>
         </p:txBody>
@@ -1332,7 +1667,32 @@
           <a:lstStyle/>
           <a:p>
             <a:r>
-              <a:t>학습목표는 화면의 카드 네 장입니다. 첫 카드는 업무의 단위예요. 에이전트가 맡은 단계 하나와, 경보에서 보고까지 이어지는 업무 전체를 가르고, 그 업무를 프로세스로 정의할 때 무엇을 정하는지 봅니다. 둘째 카드는 BPMN 표기입니다. 이벤트, 작업, 게이트웨이, 레인, 경계 타이머를 읽고, 그림에 적힌 선 이름과 실제로 실행되는 조건이 어떻게 다른지 가립니다. 셋째 카드는 실행과 통제예요. 처리 건이 지금 어디까지 왔는지, 무엇으로 끝났는지, 누가 결정했는지를 기록으로 읽습니다. 마지막 카드가 실습입니다. 승인 업무와 설비 이상 대응 흐름을 직접 그려 등록된 기준 흐름과 비교하고, 준비된 시나리오로 실제 처리 결과를 검증합니다.</a:t>
+              <a:t>[짚을 곳] 카드 네 장 왼쪽부터 → 꼬리표 → 강조한 넷째 카드</a:t>
+            </a:r>
+          </a:p>
+          <a:p>
+            <a:r>
+              <a:t>· 1 업무의 단위: 에이전트 단계 하나 vs 경보에서 보고까지, 정의할 때 정하는 것과 BPM</a:t>
+            </a:r>
+          </a:p>
+          <a:p>
+            <a:r>
+              <a:t>· 2 BPMN 표기: 이벤트 · 작업 · 게이트웨이 · 레인 · 경계 타이머, 선 이름 vs 실행 조건</a:t>
+            </a:r>
+          </a:p>
+          <a:p>
+            <a:r>
+              <a:t>· 3 실행과 통제: 처리 건 · 토큰 · 변수, 상태 · 권한 · 판본 · 감사 기록</a:t>
+            </a:r>
+          </a:p>
+          <a:p>
+            <a:r>
+              <a:t>· 4 실습 일곱: 승인 업무 · 설비 이상 대응을 그려 기준 흐름과 비교, 시나리오 A로 검증</a:t>
+            </a:r>
+          </a:p>
+          <a:p>
+            <a:r>
+              <a:t>[다음] 순서는 목차로</a:t>
             </a:r>
           </a:p>
         </p:txBody>
@@ -1402,7 +1762,42 @@
           <a:lstStyle/>
           <a:p>
             <a:r>
-              <a:t>연결 값 가운데 가장 헷갈리는 게 갈림의 조건입니다. 화면 위쪽이 그림 파일 안의 승인 여부 게이트웨이에서 나가는 선 둘이에요. 한 선에는 승인, 다른 선에는 거절이라는 이름이 붙어 있고, 어디로 가는지만 적혀 있습니다. 오른쪽 첫 점처럼, 이 이름은 그림에 보이는 표시일 뿐이에요. 실제로 어느 갈래로 갈지는 아래쪽 연결 값이 정합니다. 승인 쪽 선에는 운전원 승인 작업이 낸 승인 결과가 승인과 같다는 조건이 붙어 있어요. 앞 작업이 낸 값을 견주는 식이라, 같은 값이 오면 언제나 같은 갈래로 가고 왜 그 길로 갔는지 기록으로 설명할 수 있습니다. 조건을 문장으로 적어 두고 모델에게 해석을 맡기지 않아요. 거절 쪽 선에는 조건 대신 기본 흐름이라고 되어 있죠. 기본 흐름은 어느 조건도 참이 아닐 때 가는 선입니다. 아래 두 줄의 유온 정상 여부 게이트웨이도 같아서, 회복 여부가 참이면 예 쪽, 아니면 기본 흐름인 아니오 쪽으로 갑니다. 그림을 그릴 때 선 이름을 잘 붙이는 것과, 실행할 정의에 조건을 넣는 것은 별개의 일이에요. 그림 파일과 실행 정의를 구분한다는 말이 바로 이 뜻입니다.</a:t>
+              <a:t>[짚을 곳] 코드 위(그림 파일의 선 둘) → 아래(연결 값의 flows) → 오른쪽 항목 셋</a:t>
+            </a:r>
+          </a:p>
+          <a:p>
+            <a:r>
+              <a:t>· name="승인"은 그림에 보이는 표시일 뿐, 실행 조건이 아니다</a:t>
+            </a:r>
+          </a:p>
+          <a:p>
+            <a:r>
+              <a:t>· 연결 값: F_approved = approval == '승인'(승인 작업이 낸 값을 견주는 식)</a:t>
+            </a:r>
+          </a:p>
+          <a:p>
+            <a:r>
+              <a:t>· 같은 값이면 언제나 같은 갈래, 왜 그 길인지 기록으로 설명 가능, 모델에게 해석을 맡기지 않음</a:t>
+            </a:r>
+          </a:p>
+          <a:p>
+            <a:r>
+              <a:t>· F_rejected = default, 기본 흐름(Default Flow): 어느 조건도 참이 아닐 때 가는 선</a:t>
+            </a:r>
+          </a:p>
+          <a:p>
+            <a:r>
+              <a:t>· 유온 정상?도 같은 꼴: F_yes = recovered == true, F_no = default</a:t>
+            </a:r>
+          </a:p>
+          <a:p>
+            <a:r>
+              <a:t>· 선 이름 붙이기와 실행 정의에 조건 넣기는 별개</a:t>
+            </a:r>
+          </a:p>
+          <a:p>
+            <a:r>
+              <a:t>[다음] 기본 흐름이 빠진 갈림</a:t>
             </a:r>
           </a:p>
         </p:txBody>
@@ -1472,7 +1867,37 @@
           <a:lstStyle/>
           <a:p>
             <a:r>
-              <a:t>판단 문제로 확인해 보겠습니다. 유온 정상 여부 게이트웨이의 예 선에만 조건을 넣고, 아니오 선에는 조건도 기본 흐름 표시도 두지 않았다고 해 보죠. 재관측이 회복하지 못했다는 값을 냈을 때 무슨 일이 일어날까요? 1번, 엔진이 선 이름 아니오를 읽어 미달 보고로 보낸다. 2번, 맞는 선이 없어 그 자리에서 넘어가지 못하고, 사유가 기록된다. 3번, 예 선으로 가서 작업지시가 등록된다. 4번, 처리 건이 거절 종결로 닫힌다. 답은 2번입니다. 회복 여부가 거짓이면 예 선의 조건은 맞지 않고, 아니오 선에는 조건도 기본 흐름 표시도 없으니 갈 선이 없어요. 그러면 흐름은 그 자리에 머물고, 왜 넘어가지 못했는지 사유가 남습니다. 1번처럼 선 이름을 읽어 주지 않고, 3번처럼 조건이 거짓인 선으로 가지도 않아요. 4번의 거절 종결은 승인 여부 게이트웨이의 갈래라 이 자리와 상관없고요. 그래서 배타 게이트웨이를 그리면 나가는 선마다 조건을 주거나 하나를 기본 흐름으로 정합니다. 실제로 이런 빈 갈림은 실행할 흐름으로 등록하기 전 검사에서 분기 조건이 없다는 문제로 먼저 걸려요.</a:t>
+              <a:t>[짚을 곳] 상황(「예」 선에만 조건, 「아니오」 선엔 조건 · 기본 흐름 표시 없음) → 보기 넷 → 20초</a:t>
+            </a:r>
+          </a:p>
+          <a:p>
+            <a:r>
+              <a:t>· 정답 2: 맞는 선이 없어 그 자리에서 못 넘어가고 사유가 기록된다</a:t>
+            </a:r>
+          </a:p>
+          <a:p>
+            <a:r>
+              <a:t>· 회복 거짓 → 「예」 조건 불일치, 「아니오」는 조건도 기본 흐름도 없음 → 갈 선이 없음</a:t>
+            </a:r>
+          </a:p>
+          <a:p>
+            <a:r>
+              <a:t>· 1: 엔진은 선 이름을 읽어 주지 않음, 3: 조건이 거짓인 선으로 가지 않음</a:t>
+            </a:r>
+          </a:p>
+          <a:p>
+            <a:r>
+              <a:t>· 4: 거절 종결은 승인? 게이트웨이의 갈래라 무관</a:t>
+            </a:r>
+          </a:p>
+          <a:p>
+            <a:r>
+              <a:t>· 배타 게이트웨이는 나가는 선마다 조건을 주거나 하나를 기본 흐름으로, 등록 전 검사에서 먼저 걸림</a:t>
+            </a:r>
+          </a:p>
+          <a:p>
+            <a:r>
+              <a:t>[다음] 넷째 단원, 레인과 경계 타이머</a:t>
             </a:r>
           </a:p>
         </p:txBody>
@@ -1542,7 +1967,22 @@
           <a:lstStyle/>
           <a:p>
             <a:r>
-              <a:t>네 번째 단원에서는 그림에 두 가지를 더 담습니다. 각 작업을 누가 맡는지, 그리고 운전원이 제때 응답하지 않으면 어떻게 하는지예요. 맡는 쪽을 나누는 칸과 기다리는 동안의 일을 그리는 도형을 보고, 그중 무엇이 그림 밖 연결 값에 있는지 가려 보겠습니다.</a:t>
+              <a:t>[짚을 곳] 단원 번호 04 → 제목 → 부제</a:t>
+            </a:r>
+          </a:p>
+          <a:p>
+            <a:r>
+              <a:t>· 그림에 두 가지를 더 담는다: 누가 맡는가, 제때 응답하지 않으면 어떻게 하나</a:t>
+            </a:r>
+          </a:p>
+          <a:p>
+            <a:r>
+              <a:t>· 다룰 것: 풀 · 레인 · 메시지 흐름, 중단형 · 비중단형 타이머, 그림과 연결 값, 실행 정의로 가져올 때 걸리는 그림</a:t>
+            </a:r>
+          </a:p>
+          <a:p>
+            <a:r>
+              <a:t>[다음] 맡는 쪽을 나누는 도형</a:t>
             </a:r>
           </a:p>
         </p:txBody>
@@ -1612,7 +2052,42 @@
           <a:lstStyle/>
           <a:p>
             <a:r>
-              <a:t>맡는 쪽을 나누는 도형부터 보죠. 첫 줄 풀은 참여자 하나의 영역이에요. 조직이나 시스템 하나를 참여자로 그립니다. 긴급 대응은 냉각 긴급 대응이라는 풀 하나로 그려요. 강조한 둘째 줄 레인은 풀 안에서 활동을 나누는 칸입니다. 이 흐름은 담당자, 에이전트, 시스템의 세 칸으로 책임을 나눴죠. 그래서 그림만 봐도 판단은 에이전트 칸, 결정은 담당자 칸, 실행과 기록은 시스템 칸에 있고, 설비 명령 앞에 사람의 승인이 놓인 게 보입니다. 다만 레인의 분류 기준은 그림을 그리는 사람이 정하는 거라, 상자를 다른 칸으로 옮긴다고 실제 권한이 바뀌지는 않아요. 셋째 줄 메시지 흐름은 서로 다른 풀 사이를 오가는 점선 화살표입니다. 예를 들어 운영 조직이 공급사에 발주서를 보내는 것처럼 다른 참여자와 주고받는 일이죠. 같은 풀 안의 순서를 잇는 실선과 구별합니다. 긴급 대응은 풀이 하나라 메시지 흐름이 없고, 실습에서도 풀 하나에 레인으로 나눠 그립니다.</a:t>
+              <a:t>[짚을 곳] 풀이 세 줄 → 강조한 둘째 줄(레인) → 오른쪽 영어 이름</a:t>
+            </a:r>
+          </a:p>
+          <a:p>
+            <a:r>
+              <a:t>· 풀(Pool): 참여자 하나의 영역, 긴급 대응은 풀 하나 「냉각 긴급 대응」</a:t>
+            </a:r>
+          </a:p>
+          <a:p>
+            <a:r>
+              <a:t>· 레인(Lane): 풀 안에서 활동을 나누는 칸, 담당자 · 에이전트 · 시스템 셋</a:t>
+            </a:r>
+          </a:p>
+          <a:p>
+            <a:r>
+              <a:t>· 그림만 봐도 판단 · 결정 · 실행 칸이 보이고 명령 앞에 승인이 놓인 게 보인다</a:t>
+            </a:r>
+          </a:p>
+          <a:p>
+            <a:r>
+              <a:t>· 레인 기준은 그리는 사람이 정함, 상자를 옮긴다고 권한이 바뀌지 않는다</a:t>
+            </a:r>
+          </a:p>
+          <a:p>
+            <a:r>
+              <a:t>· 메시지 흐름(Message Flow): 다른 풀 사이의 점선 화살표(예: 공급사에 발주서), 같은 풀 안 실선과 구별</a:t>
+            </a:r>
+          </a:p>
+          <a:p>
+            <a:r>
+              <a:t>· 긴급 대응 · 실습은 풀 하나에 레인으로</a:t>
+            </a:r>
+          </a:p>
+          <a:p>
+            <a:r>
+              <a:t>[다음] 기다림을 그리는 타이머</a:t>
             </a:r>
           </a:p>
         </p:txBody>
@@ -1682,7 +2157,37 @@
           <a:lstStyle/>
           <a:p>
             <a:r>
-              <a:t>이제 기다림입니다. 작업이 끝나기를 기다리는 동안 생기는 일은 작업 테두리에 붙인 경계 이벤트로 그려요. 경계 이벤트는 붙은 작업이 진행 중일 때만 살아 있습니다. 작업이 제때 끝나면 함께 거둬지죠. 그 가운데 정한 기간이 지나면 발생하는 것이 타이머이고, 테두리의 선 모양이 기한 뒤에 무슨 일이 생기는지를 정합니다. 왼쪽 중단형은 실선 겹테두리예요. 기한이 지나면 붙은 작업을 끊고 다른 갈래로 갑니다. 이 시스템에 원래 들어 있는 기준 흐름이 이렇게 그려져 있어요. 운전원이 조치를 고르지 않고 기한이 지나면 그 작업을 끊고 상급자를 부릅니다. 결정을 다른 사람에게 넘기는 설계죠. 오른쪽 비중단형은 점선 겹테두리입니다. 기한이 지나도 작업은 그대로 두고 갈래를 하나 더 열어요. 수업에서 쓰는 긴급 대응 흐름의 승인 지연이 이 모양이라, 10분이 지나면 알림만 나가고 같은 운전원의 결정을 계속 기다립니다. 두 흐름은 옛 판과 새 판이 아니라 서로 다른 설계예요. 응답이 늦을 때 결정을 넘길지 기다릴지는 업무를 설계하는 사람이 정하고, 그 선택이 선 하나의 모양으로 드러납니다.</a:t>
+              <a:t>[짚을 곳] 왼쪽 중단형 → 강조한 오른쪽 비중단형 → 꼬리표</a:t>
+            </a:r>
+          </a:p>
+          <a:p>
+            <a:r>
+              <a:t>· 경계 이벤트(Boundary Event): 작업 테두리에 붙어 작업이 진행 중일 때만 살아 있음, 제때 끝나면 함께 거둬짐</a:t>
+            </a:r>
+          </a:p>
+          <a:p>
+            <a:r>
+              <a:t>· 타이머의 테두리 모양이 기한 뒤의 일을 정한다</a:t>
+            </a:r>
+          </a:p>
+          <a:p>
+            <a:r>
+              <a:t>· 중단형(실선 겹테두리): 작업을 끊고 다른 갈래, 기준 흐름의 선택 시간 초과 → 상급자 호출 = 결정을 넘김</a:t>
+            </a:r>
+          </a:p>
+          <a:p>
+            <a:r>
+              <a:t>· 비중단형(점선 겹테두리): 작업은 두고 갈래를 하나 더, 수업 흐름 승인 지연 PT10M → 알림, 같은 사람을 계속 기다림</a:t>
+            </a:r>
+          </a:p>
+          <a:p>
+            <a:r>
+              <a:t>· 두 흐름은 옛 판 · 새 판이 아니라 서로 다른 설계, 선택이 선 하나의 모양으로 드러남</a:t>
+            </a:r>
+          </a:p>
+          <a:p>
+            <a:r>
+              <a:t>[다음] 이 타이머의 그림과 연결 값</a:t>
             </a:r>
           </a:p>
         </p:txBody>
@@ -1752,7 +2257,42 @@
           <a:lstStyle/>
           <a:p>
             <a:r>
-              <a:t>이 타이머도 그림 파일과 연결 값을 나눠 보겠습니다. 화면 위쪽이 그림 파일이에요. 운전원 승인 작업이 있고, 그 아래 승인 지연이라는 경계 이벤트가 있습니다. 오른쪽 첫 점, 이 이벤트가 운전원 승인 작업에 붙어 있다는 표시가 있고요. 둘째 점의 끊지 않는다는 표시가 바로 비중단형이라는 뜻입니다. 그래서 알림이 나간 뒤에도 승인 작업은 열려 있어요. 그런데 타이머를 정의하는 줄을 보면 기한이 비어 있습니다. 10분이라는 기한은 아래쪽 연결 값에 있어요. 피티 10엠이라는 표기는 기간을 적는 국제 표준 꼴로, 10분이라는 뜻입니다. 그 아래 줄에는 승인 작업에 연결할 기능과, 승인할 역할 운전원이 있죠. 마지막 점처럼 승인 역할은 담당자 칸에 그렸다는 것만으로 정해지지 않고 이 연결 값이 정합니다. 정리하면, 그림은 타이머가 승인 작업에 붙어 끊지 않는다는 구조를 담고, 기한과 승인 역할은 연결 값이 정해요. 그림을 보고 10분이 지나면 알림이 간다고 말하려면 연결 값까지 확인해야 합니다.</a:t>
+              <a:t>[짚을 곳] 코드 위(그림 파일) → 아래(연결 값) → 오른쪽 항목 넷</a:t>
+            </a:r>
+          </a:p>
+          <a:p>
+            <a:r>
+              <a:t>· attachedToRef: 타이머가 운전원 승인 작업에 붙어 있다</a:t>
+            </a:r>
+          </a:p>
+          <a:p>
+            <a:r>
+              <a:t>· cancelActivity="false": 비중단형, 알림 뒤에도 승인 작업이 열려 있다</a:t>
+            </a:r>
+          </a:p>
+          <a:p>
+            <a:r>
+              <a:t>· 그림의 timerEventDefinition은 기한이 비어 있음</a:t>
+            </a:r>
+          </a:p>
+          <a:p>
+            <a:r>
+              <a:t>· PT10M: 기간을 적는 국제 표준 꼴, 10분, 연결 값의 timers에 있다</a:t>
+            </a:r>
+          </a:p>
+          <a:p>
+            <a:r>
+              <a:t>· role: 승인할 역할 운전원, 담당자 칸에 그린 것만으로 정해지지 않음</a:t>
+            </a:r>
+          </a:p>
+          <a:p>
+            <a:r>
+              <a:t>· 그림 = 구조(붙어서 끊지 않는다), 연결 값 = 기한과 승인 역할, 「10분 뒤 알림」은 연결 값까지 봐야 말한다</a:t>
+            </a:r>
+          </a:p>
+          <a:p>
+            <a:r>
+              <a:t>[다음] 한 단계 더, 가져올 때 걸리는 그림</a:t>
             </a:r>
           </a:p>
         </p:txBody>
@@ -1822,7 +2362,42 @@
           <a:lstStyle/>
           <a:p>
             <a:r>
-              <a:t>한 단계 더 들어가 보겠습니다. 편집기에서는 BPMN 표준의 여러 요소를 그릴 수 있지만, 그 그림을 이 시스템의 실행 정의로 가져올 때 막히는 모양이 있어요. 표의 왼쪽이 그림의 모양, 가운데가 가져올 때의 처리, 오른쪽이 고칠 곳입니다. 첫 줄, 참여자마다 풀을 따로 그리면 받아들이지 않습니다. 한 풀 안에 레인으로 나눠야 해요. 둘째 줄, 마름모 없이 한 작업에서 선 두 갈래를 뽑으면, 조건 없이 갈라지는 흐름이라 등록을 거부합니다. 그대로 두면 승인과 거절이 함께 진행될 수 있는 그림이 되니까요. 배타 게이트웨이를 둬서 고칩니다. 셋째, 넷째 줄은 실행하지 않는 모양이에요. 흐름 중간에 타이머를 따로 세우거나, 여러 작업을 하위 프로세스로 접어 그린 그림입니다. 타이머는 작업 테두리의 기간 타이머로, 하위 프로세스는 펼쳐서 한 흐름으로 그립니다. 다섯째 줄은 앞에서 본 승인 검사예요. 승인 없이 명령에 닿는 길이 하나라도 있으면 등록 전 검사가 거절합니다. 마지막 줄, 레인과 작업에 연결한 담당이 다르면 사전 검사가 알려 줘요. 이 목록은 실습에서 자신이 그린 그림을 검사할 때 그대로 점검표가 됩니다. 수업 포털에서 여러분이 그린 그림을 직접 가져와 등록하지는 않지만, 실행할 흐름이 어떤 범위 안에서 그려져야 하는지는 이렇게 정해져 있어요.</a:t>
+              <a:t>[짚을 곳] 표 여섯 줄 → 가운데(가져올 때) → 오른쪽(고칠 곳) → 강조한 마지막 줄</a:t>
+            </a:r>
+          </a:p>
+          <a:p>
+            <a:r>
+              <a:t>· 참여자마다 풀을 따로 → 둘 이상이면 거절, 한 풀 안에 레인으로</a:t>
+            </a:r>
+          </a:p>
+          <a:p>
+            <a:r>
+              <a:t>· 마름모 없이 선 두 갈래 → 조건 없는 갈라짐이라 등록 거부(승인 · 거절이 함께 진행될 수 있음), 배타 게이트웨이로</a:t>
+            </a:r>
+          </a:p>
+          <a:p>
+            <a:r>
+              <a:t>· 흐름 중간의 타이머 · 하위 프로세스 → 실행하지 않음, 작업 테두리 기간 타이머로 · 펼쳐서 한 흐름으로</a:t>
+            </a:r>
+          </a:p>
+          <a:p>
+            <a:r>
+              <a:t>· 승인 없이 명령에 닿는 길 → 등록 전 검사가 거절</a:t>
+            </a:r>
+          </a:p>
+          <a:p>
+            <a:r>
+              <a:t>· 레인과 작업의 담당이 다름 → 사전 검사가 알림, 칸이나 연결 담당을 맞춤</a:t>
+            </a:r>
+          </a:p>
+          <a:p>
+            <a:r>
+              <a:t>· 실습 그림 검사의 점검표, 학생은 포털에 그림을 직접 등록하지 않는다</a:t>
+            </a:r>
+          </a:p>
+          <a:p>
+            <a:r>
+              <a:t>[다음] 응답이 없을 때 결정을 넘기라는 요구</a:t>
             </a:r>
           </a:p>
         </p:txBody>
@@ -1892,7 +2467,42 @@
           <a:lstStyle/>
           <a:p>
             <a:r>
-              <a:t>마지막으로 설계를 골라 보겠습니다. 야간에는 운전원 응답이 늦는 일이 잦아서, 기한이 지나면 상급자가 결정하게 해 달라는 요구가 나왔다고 해 보죠. 승인 작업을 어떻게 그리는 것이 맞을까요? 1번, 승인 작업에 비중단형 타이머를 붙여 알림만 보낸다. 2번, 기한이 지나면 자동으로 승인하는 선을 둔다. 3번, 흐름 중간에 타이머 이벤트를 따로 세워 상급자 작업으로 잇는다. 4번, 승인 작업에 중단형 타이머를 붙여, 기한 뒤 상급자 결정 작업으로 보낸다. 답은 4번입니다. 요구는 결정을 다른 사람에게 넘기는 거예요. 기한이 지나면 운전원의 작업을 끊고 상급자의 결정 작업으로 가야 하니 중단형 타이머가 맞습니다. 기준 흐름의 상급자 호출과 같은 모양이죠. 1번은 같은 사람을 계속 기다리는 설계라 지금 흐름 그대로이고, 요구를 풀지 못합니다. 2번은 사람의 결정을 시간으로 대신하는 거라 받아들일 수 없어요. 3번은 뜻은 비슷해 보여도, 흐름 중간에 세운 타이머는 실행 정의로 가져올 때 받지 않는 모양이었습니다. 요구가 바뀌면 이렇게 그림의 어느 선을 바꿀지부터 정하게 됩니다. 다음 시간에는 이 그림을 실제로 실행하는 쪽, 그리고 실행 중인 처리 건이 지금 어디에 있고 무엇을 들고 다니는지 읽는 법을 보겠습니다.</a:t>
+              <a:t>[짚을 곳] 상황(야간 응답이 늦어 기한 뒤 상급자가 결정하게) → 보기 넷 → 20초</a:t>
+            </a:r>
+          </a:p>
+          <a:p>
+            <a:r>
+              <a:t>· 정답 4: 승인 작업에 중단형 타이머, 기한 뒤 상급자 결정 작업으로(기준 흐름의 상급자 호출과 같은 모양)</a:t>
+            </a:r>
+          </a:p>
+          <a:p>
+            <a:r>
+              <a:t>· 요구 = 결정을 다른 사람에게 넘기기 → 운전원 작업을 끊어야 함</a:t>
+            </a:r>
+          </a:p>
+          <a:p>
+            <a:r>
+              <a:t>· 1: 같은 사람을 계속 기다리는 지금 흐름, 요구를 못 풂</a:t>
+            </a:r>
+          </a:p>
+          <a:p>
+            <a:r>
+              <a:t>· 2: 사람의 결정을 시간으로 대신함</a:t>
+            </a:r>
+          </a:p>
+          <a:p>
+            <a:r>
+              <a:t>· 3: 흐름 중간에 세운 타이머는 실행 정의로 가져올 때 받지 않는 모양</a:t>
+            </a:r>
+          </a:p>
+          <a:p>
+            <a:r>
+              <a:t>· 요구가 바뀌면 그림의 어느 선을 바꿀지부터</a:t>
+            </a:r>
+          </a:p>
+          <a:p>
+            <a:r>
+              <a:t>[다음] 다섯째 단원, 엔진과 처리 건</a:t>
             </a:r>
           </a:p>
         </p:txBody>
@@ -1962,7 +2572,27 @@
           <a:lstStyle/>
           <a:p>
             <a:r>
-              <a:t>이번 시간에는 그린 프로세스가 실제로 실행되고 통제되는 구조를 봅니다. 앞에서 그림은 설계도이고, 실행하려면 작업마다 기능이 연결돼야 한다고 했죠. 그러면 경보가 왔을 때 그 설계도를 읽고 한 단계씩 작업을 여는 건 누구일까요? 그리고 실행 중인 처리 건이 지금 누구를 기다리고, 무엇을 들고 다니는지는 어떻게 알 수 있을까요?</a:t>
+              <a:t>[짚을 곳] 단원 번호 05 → 제목 → 부제</a:t>
+            </a:r>
+          </a:p>
+          <a:p>
+            <a:r>
+              <a:t>· 그림은 설계도, 실행하려면 작업마다 기능이 연결돼야</a:t>
+            </a:r>
+          </a:p>
+          <a:p>
+            <a:r>
+              <a:t>· 물음: 경보가 오면 설계도를 읽고 한 단계씩 작업을 여는 건 누구인가</a:t>
+            </a:r>
+          </a:p>
+          <a:p>
+            <a:r>
+              <a:t>· 물음: 실행 중인 처리 건이 지금 누구를 기다리고 무엇을 들고 다니나</a:t>
+            </a:r>
+          </a:p>
+          <a:p>
+            <a:r>
+              <a:t>[다음] 엔진 · 정의 · 인스턴스</a:t>
             </a:r>
           </a:p>
         </p:txBody>
@@ -2032,7 +2662,37 @@
           <a:lstStyle/>
           <a:p>
             <a:r>
-              <a:t>설계도를 읽고 실행하는 쪽이 프로세스 엔진입니다. 첫 줄처럼 프로세스 정의를 읽어 그대로 실행하는 소프트웨어예요. 앞에서 오케스트레이션은 중앙의 조정자가 순서와 호출을 이끄는 방식이라고 했는데, 그 조정자 자리를 엔진이 맡습니다. 처리 기록 표에서 프로세스라고 적혀 있던, 재관측과 결과 보고를 맡던 그쪽이 바로 이 엔진이에요. 둘째 줄 프로세스 정의는 요소와 선, 조건과 역할을 담은 설계도입니다. 그림 파일에 실행 연결까지 더한 것이죠. 긴급 대응 프로세스의 정의 식별자는 c3_cooling입니다. 셋째 줄 프로세스 인스턴스는 그 정의에 따라 실제로 수행되는 한 건이에요. 앞에서 처리 건이라고 부른 게 바로 이겁니다. 경보 한 건마다 하나씩 열리죠. 엔진은 정의 하나를 읽어 경보마다 인스턴스를 열고, 각 인스턴스에서 앞 작업이 끝나면 다음 작업을 엽니다.</a:t>
+              <a:t>[짚을 곳] 풀이 세 줄 → 강조한 첫 줄(엔진) → 오른쪽 영어 이름</a:t>
+            </a:r>
+          </a:p>
+          <a:p>
+            <a:r>
+              <a:t>· 프로세스 엔진(Process Engine): 정의를 읽어 그대로 실행하는 소프트웨어, 오케스트레이션의 조정자 자리</a:t>
+            </a:r>
+          </a:p>
+          <a:p>
+            <a:r>
+              <a:t>· 처리 기록 표에서 「프로세스」라고 적혀 재관측 · 결과 보고를 맡던 쪽이 엔진</a:t>
+            </a:r>
+          </a:p>
+          <a:p>
+            <a:r>
+              <a:t>· 프로세스 정의(Process Definition): 요소 · 선 · 조건 · 역할을 담은 설계도 = 그림 + 실행 연결, 긴급 대응은 c3_cooling</a:t>
+            </a:r>
+          </a:p>
+          <a:p>
+            <a:r>
+              <a:t>· 프로세스 인스턴스(Process Instance): 정의에 따라 수행되는 한 건 = HYD의 처리 건, 경보마다 하나</a:t>
+            </a:r>
+          </a:p>
+          <a:p>
+            <a:r>
+              <a:t>· 엔진은 정의 하나로 경보마다 인스턴스를 열고 앞 작업이 끝나면 다음 작업을 연다</a:t>
+            </a:r>
+          </a:p>
+          <a:p>
+            <a:r>
+              <a:t>[다음] 같은 정의의 처리 건 셋</a:t>
             </a:r>
           </a:p>
         </p:txBody>
@@ -2102,7 +2762,32 @@
           <a:lstStyle/>
           <a:p>
             <a:r>
-              <a:t>목차를 보시면 이론이 여섯 단원입니다. 1번과 2번은 업무를 프로세스로 보는 눈, 3번과 4번은 그 프로세스를 BPMN으로 그리는 법, 5번과 6번은 그 그림이 실행되고 통제되는 구조예요. 아래 세 줄이 실습 일곱 개와 마무리입니다. 이번 시간에는 앞의 두 단원을 다룹니다. 추천안 뒤에 남은 일을 기록으로 확인하고, 그 일을 프로세스로 정의하고 고쳐 가는 방법까지 가겠습니다.</a:t>
+              <a:t>[짚을 곳] 아홉 줄 위에서 아래로, 오른쪽 이론 · 실습 꼬리표</a:t>
+            </a:r>
+          </a:p>
+          <a:p>
+            <a:r>
+              <a:t>· 이론 01 · 02: 업무를 프로세스로 보는 눈(Task · End-to-End, 정의와 BPM)</a:t>
+            </a:r>
+          </a:p>
+          <a:p>
+            <a:r>
+              <a:t>· 이론 03 · 04: BPMN으로 그리는 법(흐름, 레인 · 경계 타이머)</a:t>
+            </a:r>
+          </a:p>
+          <a:p>
+            <a:r>
+              <a:t>· 이론 05 · 06: 실행과 통제(엔진 · 토큰 · 변수, 상태 · 권한 · 판본 · 감사)</a:t>
+            </a:r>
+          </a:p>
+          <a:p>
+            <a:r>
+              <a:t>· 실습 1~7과 복습 · 퀴즈</a:t>
+            </a:r>
+          </a:p>
+          <a:p>
+            <a:r>
+              <a:t>[다음] 첫 단원</a:t>
             </a:r>
           </a:p>
         </p:txBody>
@@ -2172,7 +2857,37 @@
           <a:lstStyle/>
           <a:p>
             <a:r>
-              <a:t>같은 정의에서 열린 처리 건 셋을 나란히 놓았습니다. 첫 줄이 쿨러 사건이고, 아래 두 줄은 같은 긴급 대응 정의에서 열린 다른 처리 건이에요. 쿨러 사건은 승인을 거쳐 냉각 명령, 재관측 회복, 작업지시로 가서 정상으로 끝났고 설비 명령이 한 건 나갔습니다. 둘째 줄 처리 건은 운전원이 거절해서 거절 보고를 거쳐 거절 종결에 닿았고, 설비 명령은 없어요. 강조한 셋째 줄은 운전원이 한동안 응답하지 않아 기한 뒤 알림이 나갔고, 그 뒤에 거절로 닫혔습니다. 이 건도 명령은 없죠. 설계도는 하나인데 처리 건마다 지나간 갈래와 결말이 다릅니다. 그래서 결과를 말할 때는 정의가 아니라 처리 건 하나씩 읽어요. 이 흐름이 잘 돈다는 말도 결국 처리 건마다의 기록으로 확인합니다.</a:t>
+              <a:t>[짚을 곳] 표 세 줄(처리 건) → 가운데(지나간 길) → 오른쪽(끝 · 명령) → 강조한 셋째 줄</a:t>
+            </a:r>
+          </a:p>
+          <a:p>
+            <a:r>
+              <a:t>· 4f93a9d0… 쿨러 사건: 승인 → 명령 → 회복 → 작업지시, E_end · 정상, 명령 1건</a:t>
+            </a:r>
+          </a:p>
+          <a:p>
+            <a:r>
+              <a:t>· 94a9231b…: 거절 → 결과 보고 거절, E_rejected, 명령 없음</a:t>
+            </a:r>
+          </a:p>
+          <a:p>
+            <a:r>
+              <a:t>· bede0d2e…: 승인 대기 → 기한 뒤 알림 → 그 뒤 거절, E_rejected, 명령 없음</a:t>
+            </a:r>
+          </a:p>
+          <a:p>
+            <a:r>
+              <a:t>· 설계도는 하나인데 처리 건마다 갈래와 결말이 다르다</a:t>
+            </a:r>
+          </a:p>
+          <a:p>
+            <a:r>
+              <a:t>· 결과는 정의가 아니라 처리 건 하나씩 읽는다, 「잘 돈다」도 처리 건 기록으로</a:t>
+            </a:r>
+          </a:p>
+          <a:p>
+            <a:r>
+              <a:t>[다음] 지금 어디에 있나, 토큰</a:t>
             </a:r>
           </a:p>
         </p:txBody>
@@ -2242,7 +2957,42 @@
           <a:lstStyle/>
           <a:p>
             <a:r>
-              <a:t>처리 건이 지금 어디에 있는지는 토큰이라는 개념으로 설명합니다. 토큰은 흐름의 현재 위치를 나타내는 표식이에요. 시작 이벤트에서 생겨서, 작업이 끝날 때마다 나가는 선을 따라 옮겨 가고, 끝 이벤트에 닿으면 사라집니다. BPMN이 실행을 설명할 때 쓰는 표준 개념이고, 이 시스템 화면에는 토큰이라는 이름 대신 지금 열린 단계로 나타나요. 언어 모델의 토큰과는 다른 말입니다. 화면은 앞 장 셋째 줄, 응답이 늦었던 처리 건의 기록이에요. 같은 정의에서 열린 다른 처리 건입니다. 맨 위 상태는 실행 중이고, 그 아래 지금 열린 단계는 운전원 승인 하나예요. 오른쪽 첫 점처럼, 이게 토큰이 머문 곳입니다. 아래 단계 목록을 보세요. 둘째 점의 뜻대로 에이전트 단계는 끝났고, 운전원 승인은 진행 중, 냉각 명령은 아직 닿지 않았습니다. 그런데 승인 지연과 알림 단계는 이미 끝났죠. 기한이 지나서 비중단형 타이머가 갈래를 하나 더 열었고, 그 갈래의 토큰은 알림을 마치고 사라졌어요. 처음의 토큰은 여전히 승인에 머물러 있습니다. 그래서 이 처리 건은 오류도, 멈춤도 아닙니다. 사람의 결정을 기다리는 정상 상태예요. 다만 대기가 길다면 담당자가 요청을 받았는지는 따로 살핍니다.</a:t>
+              <a:t>[짚을 곳] 코드 위(status · current_activity_ids) → 단계 목록 → 오른쪽 항목 셋</a:t>
+            </a:r>
+          </a:p>
+          <a:p>
+            <a:r>
+              <a:t>· 토큰(Token): 흐름의 현재 위치 표식, 시작에서 생겨 선을 따라 옮겨 가고 끝에서 사라짐</a:t>
+            </a:r>
+          </a:p>
+          <a:p>
+            <a:r>
+              <a:t>· BPMN의 표준 개념, 화면에선 「지금 열린 단계」, 언어 모델의 토큰과 다른 말</a:t>
+            </a:r>
+          </a:p>
+          <a:p>
+            <a:r>
+              <a:t>· bede0d2e…: RUNNING, 열린 단계 T_approve 하나 = 토큰이 머문 곳</a:t>
+            </a:r>
+          </a:p>
+          <a:p>
+            <a:r>
+              <a:t>· T_agent DONE · T_approve IN_PROGRESS · T_cmd TODO(아직 안 닿음)</a:t>
+            </a:r>
+          </a:p>
+          <a:p>
+            <a:r>
+              <a:t>· B_overdue · T_notice DONE: 비중단형 타이머가 연 둘째 토큰은 알림을 마치고 사라짐, 첫 토큰은 승인에</a:t>
+            </a:r>
+          </a:p>
+          <a:p>
+            <a:r>
+              <a:t>· 오류도 멈춤도 아닌 정상 대기, 대기가 길면 담당자가 받았는지 따로</a:t>
+            </a:r>
+          </a:p>
+          <a:p>
+            <a:r>
+              <a:t>[다음] 처리 건이 들고 다니는 값</a:t>
             </a:r>
           </a:p>
         </p:txBody>
@@ -2312,7 +3062,42 @@
           <a:lstStyle/>
           <a:p>
             <a:r>
-              <a:t>토큰이 위치라면, 처리 건이 들고 다니는 값은 프로세스 변수입니다. 처리 건이 지닌 이름 붙은 값이에요. 화면 왼쪽부터 각 단계가 어떤 변수를 만드는지, 쿨러 사건의 결과로 그 뜻을 적었습니다. 첫 칸, 입력은 경보가 실어 온 설비와 경보 식별자예요. 둘째 칸, 에이전트 단계는 원인과 추천안을 냅니다. 쿨러 핀 오염과 팬 최대 운전 추천이었죠. 강조한 셋째 칸, 운전원 승인은 승인 결과와 고른 조치를 냅니다. 앞에서 본 승인 쪽 선의 조건이 읽던 값이 바로 이 승인 결과예요. 그리고 누가 어느 역할로 승인했는지는 승인하는 순간 서버가 채웁니다. 에이전트가 이 값을 대신 써 넣을 수는 없어요. 넷째 칸, 재관측은 회복 여부를 내고, 유온 정상 여부 게이트웨이가 이 값을 읽습니다. 마지막 칸, 작업지시 등록이 만든 작업지시 번호는 정상 보고의 문장에 그대로 들어가요. 그러니까 단계의 출력이 변수로 남고, 그 변수가 다음 갈림의 조건과 보고 문장이 됩니다. 처리 건은 변수마다 어느 단계가 만들었는지도 함께 적어 두어서, 이상한 값이 있으면 그 단계로 거슬러 올라갈 수 있어요.</a:t>
+              <a:t>[짚을 곳] 흐름 다섯 칸 왼쪽부터 → 칸마다 변수 이름과 뜻 → 강조한 셋째 칸</a:t>
+            </a:r>
+          </a:p>
+          <a:p>
+            <a:r>
+              <a:t>· 프로세스 변수(Process Variable): 처리 건이 지닌 이름 붙은 값</a:t>
+            </a:r>
+          </a:p>
+          <a:p>
+            <a:r>
+              <a:t>· 입력: asset · alert_id(경보가 실어 온 값) → 진단 · 제안: cause · decision(쿨러 핀 오염 · 추천안)</a:t>
+            </a:r>
+          </a:p>
+          <a:p>
+            <a:r>
+              <a:t>· 운전원 승인: approval · chosen_skill(승인 · 팬 최대 운전), 승인자 · 역할은 서버가 채움(에이전트가 못 씀)</a:t>
+            </a:r>
+          </a:p>
+          <a:p>
+            <a:r>
+              <a:t>· 재관측: recovered → 유온 정상? 게이트웨이가 읽음</a:t>
+            </a:r>
+          </a:p>
+          <a:p>
+            <a:r>
+              <a:t>· 작업지시: work_order WO-1010-C058이 보고 문장에</a:t>
+            </a:r>
+          </a:p>
+          <a:p>
+            <a:r>
+              <a:t>· 출력이 변수로 남아 다음 갈림의 조건 · 보고 문장이 되고, 변수마다 만든 단계가 기록돼 거슬러 감</a:t>
+            </a:r>
+          </a:p>
+          <a:p>
+            <a:r>
+              <a:t>[다음] 작업 종류마다 엔진이 기다리는 것</a:t>
             </a:r>
           </a:p>
         </p:txBody>
@@ -2382,7 +3167,37 @@
           <a:lstStyle/>
           <a:p>
             <a:r>
-              <a:t>토큰이 작업에 닿으면 엔진은 작업 종류에 따라 다른 것을 기다립니다. 표의 가운데 열이 엔진이 기다리는 것, 오른쪽이 그것이 끝나지 않았을 때예요. 첫 줄 사용자 작업, 운전원 승인입니다. 엔진은 담당 역할의 승인이나 거절을 기다려요. 승인이 와도 바로 넘어가지 않고, 승인 내용이 다음 단계로 제대로 전달된 뒤에야 냉각 명령을 엽니다. 응답이 없으면 승인 대기로 머물죠. 둘째 줄 서비스 작업, 냉각 명령과 재관측과 작업지시는 엔진이 해당 시스템을 부르고 처리 결과를 기다립니다. 호출이 실패하면 성공한 것으로 넘기지 않아요. 강조한 셋째 줄이 에이전트 단계입니다. 엔진은 지정한 에이전트에게 일을 맡기고, 결과가 제출되고 검사를 마치기를 기다려요. 여기서 중요한 건, 에이전트가 다음 작업을 직접 열지 않는다는 점입니다. 제출이 끝나야 엔진이 운전원 승인 작업을 열어요. 사람이든 시스템이든 에이전트든, 다음 작업을 여는 쪽은 엔진입니다.</a:t>
+              <a:t>[짚을 곳] 표 세 줄(작업 종류) → 가운데(엔진이 기다리는 것) → 오른쪽(끝나지 않으면) → 강조한 셋째 줄</a:t>
+            </a:r>
+          </a:p>
+          <a:p>
+            <a:r>
+              <a:t>· 사용자 작업(운전원 승인): 담당 역할의 승인 · 거절, 승인 전달이 성공해야 다음으로, 응답 없으면 승인 대기</a:t>
+            </a:r>
+          </a:p>
+          <a:p>
+            <a:r>
+              <a:t>· 서비스 작업(명령 · 재관측 · 작업지시): 엔진이 부른 시스템의 처리 결과, 실패를 성공으로 넘기지 않음</a:t>
+            </a:r>
+          </a:p>
+          <a:p>
+            <a:r>
+              <a:t>· 에이전트 단계: 지정한 에이전트의 결과 제출과 검사를 기다림</a:t>
+            </a:r>
+          </a:p>
+          <a:p>
+            <a:r>
+              <a:t>· 에이전트는 다음 작업을 직접 열지 않는다, 제출 전에는 승인 작업이 없다</a:t>
+            </a:r>
+          </a:p>
+          <a:p>
+            <a:r>
+              <a:t>· 사람이든 시스템이든 에이전트든 다음 작업을 여는 쪽은 엔진</a:t>
+            </a:r>
+          </a:p>
+          <a:p>
+            <a:r>
+              <a:t>[다음] 응용, 지금 누구 차례인지</a:t>
             </a:r>
           </a:p>
         </p:txBody>
@@ -2452,7 +3267,37 @@
           <a:lstStyle/>
           <a:p>
             <a:r>
-              <a:t>이제 기록을 보고 지금 누구 차례인지 읽어 보겠습니다. 실습에서 처리 건 화면을 볼 때 그대로 쓰는 판단이에요. 표의 왼쪽이 기록에 보이는 것, 가운데가 지금 상태, 오른쪽이 누가 무엇을 해야 하는지입니다. 첫 줄, 처리 건은 실행 중이고 운전원 승인이 진행 중이에요. 승인 대기라는 정상 상태이고, 운전원이 추천안과 지금의 설비 조건을 보고 결정할 차례입니다. 승인하는 순간에도 현재 값을 다시 확인하죠. 둘째 줄, 냉각 명령은 끝났고 재관측이 진행 중이면, 명령은 처리됐고 회복을 지켜보는 중입니다. 이건 시스템이 회복 기준과 경보 해제를 확인하는 자동 구간이라 사람이 끼어들 차례가 아니에요. 셋째 줄은 다릅니다. 어떤 단계가 대기 중으로 멈추고 사유가 기록됐다면, 조건이 맞는 선이 없어 넘어가지 못한 겁니다. 이건 기다린다고 풀리지 않아요. 담당자가 조건과 연결 값을 확인해야 합니다. 마지막 줄, 끝남 상태에 거절 종결이면 명령 없이 닫힌 처리 건이에요. 쿨러 상태는 그대로일 수 있으니, 다른 조치를 다시 판단하는 건 처리 건 밖의 사람 몫입니다. 이렇게 열린 단계와 상태를 읽으면, 자동으로 진행되는 구간과 사람이 확인해야 할 자리가 갈립니다.</a:t>
+              <a:t>[짚을 곳] 표 네 줄 → 가운데(지금 상태) → 오른쪽(누가 무엇을) → 강조한 넷째 줄</a:t>
+            </a:r>
+          </a:p>
+          <a:p>
+            <a:r>
+              <a:t>· RUNNING · T_approve IN_PROGRESS: 승인 대기 정상 상태, 운전원이 추천안과 현재 조건을 보고 결정(승인 순간 현재값 재확인)</a:t>
+            </a:r>
+          </a:p>
+          <a:p>
+            <a:r>
+              <a:t>· T_cmd DONE · T_reobs IN_PROGRESS: 명령 처리됨, 회복 관측 중 → 시스템의 자동 구간, 사람 차례 아님</a:t>
+            </a:r>
+          </a:p>
+          <a:p>
+            <a:r>
+              <a:t>· 단계 PENDING · 사유 기록: 조건이 맞는 선이 없어 멈춤 → 기다려도 안 풀림, 담당자가 조건 · 연결 값 확인</a:t>
+            </a:r>
+          </a:p>
+          <a:p>
+            <a:r>
+              <a:t>· COMPLETED · E_rejected: 거절로 닫힘, 명령 없음 → 쿨러 상태를 보고 다른 조치는 처리 건 밖의 사람 몫</a:t>
+            </a:r>
+          </a:p>
+          <a:p>
+            <a:r>
+              <a:t>· 열린 단계와 상태로 자동 구간과 사람이 볼 자리가 갈린다</a:t>
+            </a:r>
+          </a:p>
+          <a:p>
+            <a:r>
+              <a:t>[다음] 여섯째 단원, 통제의 구조</a:t>
             </a:r>
           </a:p>
         </p:txBody>
@@ -2522,7 +3367,27 @@
           <a:lstStyle/>
           <a:p>
             <a:r>
-              <a:t>마지막 이론 단원에서는 처리 건을 통제하는 구조를 봅니다. 끝난 처리 건은 무엇으로 끝났는지 어떻게 가릴까요? 누가 결정할 수 있는지는 무엇이 지키고, 고친 흐름은 언제부터 쓰일까요? 그리고 그 모든 결정은 어디에 남을까요?</a:t>
+              <a:t>[짚을 곳] 단원 번호 06 → 제목 → 부제</a:t>
+            </a:r>
+          </a:p>
+          <a:p>
+            <a:r>
+              <a:t>· 물음: 끝난 처리 건은 무엇으로 끝났는지 어떻게 가리나</a:t>
+            </a:r>
+          </a:p>
+          <a:p>
+            <a:r>
+              <a:t>· 물음: 누가 결정할 수 있는지는 무엇이 지키나</a:t>
+            </a:r>
+          </a:p>
+          <a:p>
+            <a:r>
+              <a:t>· 물음: 고친 흐름은 언제부터 쓰이나, 결정은 어디에 남나</a:t>
+            </a:r>
+          </a:p>
+          <a:p>
+            <a:r>
+              <a:t>[다음] COMPLETED가 같은 두 처리 건</a:t>
             </a:r>
           </a:p>
         </p:txBody>
@@ -2592,7 +3457,37 @@
           <a:lstStyle/>
           <a:p>
             <a:r>
-              <a:t>승인된 처리 건과, 앞에서 본 거절된 처리 건을 나란히 놓았습니다. 가운데 열이 승인, 오른쪽 열이 거절이에요. 첫 줄을 보세요. 두 처리 건의 상태가 똑같이 끝남, 컴플리티드입니다. 처리 건의 상태는 실행이 끝났는지만 알려 주거든요. 그 아래부터 갈립니다. 닿은 끝 이벤트가 하나는 끝, 하나는 거절 종결이고, 결과 보고는 정상과 거절이에요. 기록에는 거절이 반려라는 값으로 적혀 있습니다. 강조한 넷째 줄, 냉각 명령 단계는 승인 쪽이 끝남이고 설비 명령이 한 건, 거절 쪽은 선택되지 않은 갈래라 취소됨으로 남고 명령이 없어요. 마지막 줄도 보세요. 승인했는데 유온이 기준까지 내려오지 않은 경우에도 끝 이벤트는 정상과 같은 끝입니다. 그때는 결과 보고가 미달이라는 것만 다르죠. 그러니까 끝남이라는 상태만 보고 성공이라고 말하면 안 됩니다. 결말은 끝 이벤트, 결과 보고, 단계 상태를 함께 읽어 가립니다.</a:t>
+              <a:t>[짚을 곳] 가운데 열(승인) vs 오른쪽 열(거절) → 다섯 줄 → 강조한 넷째 줄</a:t>
+            </a:r>
+          </a:p>
+          <a:p>
+            <a:r>
+              <a:t>· 처리 건 상태: 둘 다 COMPLETED → 실행이 끝났다는 것만 알려 줌</a:t>
+            </a:r>
+          </a:p>
+          <a:p>
+            <a:r>
+              <a:t>· 끝 이벤트: E_end vs E_rejected, 결과 보고: 정상 vs 거절(기록 값은 반려)</a:t>
+            </a:r>
+          </a:p>
+          <a:p>
+            <a:r>
+              <a:t>· 냉각 명령 단계: DONE · 명령 1건 vs CANCELLED(선택 안 된 갈래) · 명령 없음</a:t>
+            </a:r>
+          </a:p>
+          <a:p>
+            <a:r>
+              <a:t>· 회복 미달이어도 끝 이벤트는 E_end 그대로, 결과 보고만 미달</a:t>
+            </a:r>
+          </a:p>
+          <a:p>
+            <a:r>
+              <a:t>· COMPLETED만 보고 성공이라 하지 않는다 → 끝 이벤트 · 결과 보고 · 단계 상태를 함께</a:t>
+            </a:r>
+          </a:p>
+          <a:p>
+            <a:r>
+              <a:t>[다음] 승인 권한을 지키는 검사</a:t>
             </a:r>
           </a:p>
         </p:txBody>
@@ -2662,7 +3557,42 @@
           <a:lstStyle/>
           <a:p>
             <a:r>
-              <a:t>다음은 권한입니다. 앞에서 레인 이름만으로 권한이 정해지지 않는다고 했죠. 그러면 무엇이 지킬까요? 화면 왼쪽은 흐름을 등록할 때의 검사, 오른쪽은 실행할 때의 검사예요. 왼쪽부터 보죠. 승인 없이 설비 명령에 닿는 경로가 있는 흐름은 등록하지 않습니다. 승인 단계를 넣었더라도 거절 갈래에서 설비에 효과가 나가게 그렸다면 마찬가지예요. 효과까지 가는 길은 반드시 승인 조건이 걸린 선을 지나야 합니다. 잘못 그린 그림을 실행 전에 거르는 거죠. 강조한 오른쪽은 실행 중의 행동을 거릅니다. 조치마다 승인할 역할이 정해져 있어요. 팬 최대 운전은 운전원이 승인하지만, 쿨러 핀 세척은 설비보전팀장이 승인합니다. 권한이 모자란 쪽이 승인을 시도하면 거부되고 감사 기록에 남아요. 에이전트의 쓰기는 판단 제출 하나뿐이고, 그 제출에 명령 모양의 값이 들어 있으면 받지 않습니다. 그리고 승인한 사람과 역할은 승인하는 순간 서버가 채워서 에이전트가 써 넣을 수 없어요. 그림에 승인 상자 하나를 그려 넣는 것으로 이 약속이 지켜지는 게 아닙니다. 등록할 때와 실행할 때의 검사가 함께 지켜요.</a:t>
+              <a:t>[짚을 곳] 왼쪽 칸(등록할 때) → 강조한 오른쪽 칸(실행할 때) → 꼬리표</a:t>
+            </a:r>
+          </a:p>
+          <a:p>
+            <a:r>
+              <a:t>· 등록: 승인 없이 명령에 닿는 경로 · 거절 갈래의 효과가 있으면 등록하지 않음, 효과까지는 승인 조건 선을 지나야 → 그림을 거름</a:t>
+            </a:r>
+          </a:p>
+          <a:p>
+            <a:r>
+              <a:t>· 실행: 조치마다 승인 역할(팬 최대 운전 운전원, 핀 세척 설비보전팀장)</a:t>
+            </a:r>
+          </a:p>
+          <a:p>
+            <a:r>
+              <a:t>· 권한이 모자란 승인은 거부되고 감사 기록에 남음</a:t>
+            </a:r>
+          </a:p>
+          <a:p>
+            <a:r>
+              <a:t>· 에이전트의 쓰기는 판단 제출 하나, 명령 모양 값은 거부</a:t>
+            </a:r>
+          </a:p>
+          <a:p>
+            <a:r>
+              <a:t>· 승인자 · 역할 값은 승인 순간 서버가 채움 → 행동을 거름</a:t>
+            </a:r>
+          </a:p>
+          <a:p>
+            <a:r>
+              <a:t>· 승인 상자를 그려 넣는 것만으로 지켜지지 않는다, 두 검사가 함께 지킨다</a:t>
+            </a:r>
+          </a:p>
+          <a:p>
+            <a:r>
+              <a:t>[다음] 고친 흐름이 쓰이는 때</a:t>
             </a:r>
           </a:p>
         </p:txBody>
@@ -2732,7 +3662,42 @@
           <a:lstStyle/>
           <a:p>
             <a:r>
-              <a:t>BPM의 개선 단계에서 흐름을 고쳤다면, 고친 내용은 언제부터 쓰일까요? 표의 왼쪽이 하는 일, 가운데가 바뀌는 것, 오른쪽이 그대로인 것입니다. 첫 줄, 고친 정의를 판본으로 등록하면 새 판본이 하나 쌓입니다. 저장된 판본은 고치지 않아요. 지난 처리 건이 어떤 판본으로 돌았는지 나중에 되짚으려면 그때 모습 그대로 남아야 하니까요. 등록만으로는 경보를 받는 흐름이 바뀌지 않습니다. 둘째 줄, 배포를 해야 그 경보를 받을 판본이 정해져요. 같은 경보에 배포된 흐름이 여럿이면 가장 최근에 배포한 흐름이 받습니다. 그래서 여러 사람이 한 환경에서 배포하면 서로의 경보 경로를 바꿀 수 있어요. 수업 포털에서는 여러분이 일반 BPMN을 등록하거나 배포하지 않고, 준비된 흐름을 실행합니다. 셋째 줄, 배포한 뒤에 오는 경보부터 새 판본으로 처리 건이 열립니다. 강조한 넷째 줄, 이미 진행 중인 처리 건은 바뀌지 않고 열릴 때의 판본으로 끝까지 가요. 다만 마지막 줄처럼, 판본을 고정한다고 센서 값까지 얼려 두는 건 아닙니다. 승인할 때는 지금의 조건을 다시 확인해요.</a:t>
+              <a:t>[짚을 곳] 표 다섯 줄(일) → 가운데(바뀌는 것) → 오른쪽(그대로인 것) → 강조한 넷째 줄</a:t>
+            </a:r>
+          </a:p>
+          <a:p>
+            <a:r>
+              <a:t>· 판본 등록: 새 판본이 쌓임, 저장된 판본은 고치지 않음(지난 처리 건을 되짚으려고), 등록만으론 경보 흐름이 안 바뀜</a:t>
+            </a:r>
+          </a:p>
+          <a:p>
+            <a:r>
+              <a:t>· 배포: 그 경보를 받을 판본이 정해짐, 같은 경보에 여럿이면 가장 최근 배포 → 한 환경에서 서로의 경로를 바꿀 수 있음</a:t>
+            </a:r>
+          </a:p>
+          <a:p>
+            <a:r>
+              <a:t>· 수업 포털에선 학생이 일반 BPMN을 등록 · 배포하지 않고 준비된 흐름을 실행</a:t>
+            </a:r>
+          </a:p>
+          <a:p>
+            <a:r>
+              <a:t>· 배포 뒤 오는 경보부터 새 판본으로 처리 건이 열림</a:t>
+            </a:r>
+          </a:p>
+          <a:p>
+            <a:r>
+              <a:t>· 진행 중인 처리 건은 열릴 때의 판본으로 끝까지</a:t>
+            </a:r>
+          </a:p>
+          <a:p>
+            <a:r>
+              <a:t>· 판본 고정이 센서 값을 얼리지 않는다, 승인할 때 현재 조건을 다시 확인</a:t>
+            </a:r>
+          </a:p>
+          <a:p>
+            <a:r>
+              <a:t>[다음] 물음마다 볼 기록</a:t>
             </a:r>
           </a:p>
         </p:txBody>
@@ -2802,7 +3767,42 @@
           <a:lstStyle/>
           <a:p>
             <a:r>
-              <a:t>마지막은 기록입니다. 처리 건이 끝난 뒤 담당자가 묻는 말에 따라 볼 기록이 다릅니다. 표의 왼쪽이 물음, 가운데가 볼 기록, 오른쪽이 거기 남는 값이에요. 위 세 줄은 처리 기록입니다. 처리 건 한 건 안에서 일어난 일을 차례로 적은 거예요. 누가 어느 추천안을 승인했는지는 승인 접수 기록에 승인한 역할과 판단 번호로 남습니다. 그 번호로 운전원이 본 추천안과 근거까지 거슬러 갈 수 있죠. 승인이 다음 단계로 넘어갔는지는 승인 전달 기록, 무엇으로 끝났는지는 결과 보고 기록에 있습니다. 아래 세 줄은 감사 기록이에요. 누가 무엇을 결정했는지 나중에 확인하려고 처리 건 밖의 일까지 남기는 기록입니다. 처리 건이 언제 열렸는지, 그 판본이 언제 배포됐는지가 여기 있어요. 강조한 마지막 줄, 권한 없는 쪽이 승인을 시도했다가 거부된 일도 감사 기록에 남습니다. 그래서 끝난 처리 건 하나를 되짚을 때는 상태와 판본에 더해 이 두 기록을 함께 봐요. 업무가 어떻게 끝났는지뿐 아니라 누가 무엇을 결정했는지까지 확인할 수 있습니다.</a:t>
+              <a:t>[짚을 곳] 표 위 세 줄(처리 기록) → 아래 세 줄(감사 기록) → 강조한 마지막 줄</a:t>
+            </a:r>
+          </a:p>
+          <a:p>
+            <a:r>
+              <a:t>· 처리 기록: 처리 건 한 건 안의 일을 차례로</a:t>
+            </a:r>
+          </a:p>
+          <a:p>
+            <a:r>
+              <a:t>· 누가 승인했나 → APPROVAL_ACCEPTED(승인 역할 · 판단 id → 추천안 · 근거까지 거슬러)</a:t>
+            </a:r>
+          </a:p>
+          <a:p>
+            <a:r>
+              <a:t>· 다음 단계로 넘어갔나 → APPROVAL_DELIVERY, 무엇으로 끝났나 → RESULT_REPORT</a:t>
+            </a:r>
+          </a:p>
+          <a:p>
+            <a:r>
+              <a:t>· 감사 기록(Audit Log): 누가 무엇을 결정했는지 처리 건 밖의 일까지</a:t>
+            </a:r>
+          </a:p>
+          <a:p>
+            <a:r>
+              <a:t>· INSTANCE_STARTED(처리 건 시작) · DEFINITION_DEPLOYED(판본 배포) · DECISION_DENIED(권한 없는 승인 시도의 거부)</a:t>
+            </a:r>
+          </a:p>
+          <a:p>
+            <a:r>
+              <a:t>· 끝난 처리 건은 상태 · 판본 + 두 기록을 함께 → 누가 무엇을 결정했는지까지</a:t>
+            </a:r>
+          </a:p>
+          <a:p>
+            <a:r>
+              <a:t>[다음] 응용, 다음 담당자가 이어 볼 일</a:t>
             </a:r>
           </a:p>
         </p:txBody>
@@ -2872,7 +3872,32 @@
           <a:lstStyle/>
           <a:p>
             <a:r>
-              <a:t>첫 단원은 쿨러 사건에서 에이전트가 추천안을 막 제출한 순간에서 출발합니다. 이 순간 업무는 어디까지 왔고, 남은 일은 누가 이어 갈까요? 실제 처리 기록으로 확인하고, 단계 하나를 맡은 에이전트와 흐름 전체를 이끄는 쪽이 각각 무엇을 책임지는지 가려 보겠습니다.</a:t>
+              <a:t>[짚을 곳] 단원 번호 01 → 제목 → 부제</a:t>
+            </a:r>
+          </a:p>
+          <a:p>
+            <a:r>
+              <a:t>· 출발: 에이전트가 추천안을 막 제출한 순간</a:t>
+            </a:r>
+          </a:p>
+          <a:p>
+            <a:r>
+              <a:t>· 물음: 업무는 어디까지 왔고 남은 일은 누가 잇나</a:t>
+            </a:r>
+          </a:p>
+          <a:p>
+            <a:r>
+              <a:t>· 실제 처리 기록으로 확인</a:t>
+            </a:r>
+          </a:p>
+          <a:p>
+            <a:r>
+              <a:t>· 단계 하나를 맡은 에이전트와 흐름 전체를 이끄는 쪽의 책임 가르기</a:t>
+            </a:r>
+          </a:p>
+          <a:p>
+            <a:r>
+              <a:t>[다음] 쿨러 사건의 단계 기록</a:t>
             </a:r>
           </a:p>
         </p:txBody>
@@ -2942,7 +3967,37 @@
           <a:lstStyle/>
           <a:p>
             <a:r>
-              <a:t>이 단원의 응용입니다. 쿨러 사건의 처리 건은 정상으로 끝났습니다. 그러면 다음 담당자에게는 할 일이 없을까요? 표의 왼쪽이 기록, 가운데가 그 기록이 뜻하는 것, 오른쪽이 다음 담당자가 이어 볼 일이에요. 첫 줄, 냉각 명령이 끝났고 안전 연동 검사도 통과했습니다. 설비가 명령을 실행했다고 답한 거예요. 유온이 실제로 내려왔는지는 이 기록이 아니라 재관측 기록으로 봅니다. 둘째 줄, 재관측에서 유온이 회복 기준 55도 아래로 내려왔고 경보도 해제됐어요. 그런데 팬 최대 운전은 유온을 당장 낮추는 완화 조치라, 핀에 낀 오염은 그대로 남아 있습니다. 셋째 줄, 작업지시가 CMMS에 등록돼 핀 세척 작업이 배정됐어요. 배정된 것이지 세척이 끝난 건 아닙니다. 정비 담당이 세척 완료를 확인해야 하죠. 강조한 마지막 줄, 결과 보고가 정상이고 처리 건이 끝났어도, 팬을 100퍼센트로 이어서 돌리는 건 SOP가 정한 24시간 이내라는 제한이 계속 걸려 있습니다. 정상으로 끝난 처리 건도 명령 처리, 회복, 작업지시 등록이 각각 다른 사실이에요. 그 차이를 읽어야 다음 담당자에게 무엇이 끝났고 무엇이 남았는지 정확히 넘길 수 있습니다.</a:t>
+              <a:t>[짚을 곳] 표 네 줄(기록) → 가운데(뜻) → 오른쪽(다음 담당자가 이어 볼 일) → 강조한 넷째 줄</a:t>
+            </a:r>
+          </a:p>
+          <a:p>
+            <a:r>
+              <a:t>· 냉각 명령 DONE · 인터록 PASS: 설비가 실행했다고 답함 → 유온 회복은 재관측 기록으로</a:t>
+            </a:r>
+          </a:p>
+          <a:p>
+            <a:r>
+              <a:t>· 재관측 회복 · 경보 해제: 유온이 55 ℃ 아래로 → 팬 최대 운전은 완화 조치, 핀 오염은 남아 있음</a:t>
+            </a:r>
+          </a:p>
+          <a:p>
+            <a:r>
+              <a:t>· 작업지시 등록: WO-1010-C058 배정 → 세척 완료는 정비 담당이 확인</a:t>
+            </a:r>
+          </a:p>
+          <a:p>
+            <a:r>
+              <a:t>· 결과 보고 정상 · COMPLETED: 이 처리 건의 흐름이 끝남 → 팬 100 % 연속 운전 24시간 이내(SOP) 제한은 계속</a:t>
+            </a:r>
+          </a:p>
+          <a:p>
+            <a:r>
+              <a:t>· 명령 처리 · 회복 · 작업지시 등록은 각각 다른 사실, 그 차이로 끝난 것과 남은 것을 넘긴다</a:t>
+            </a:r>
+          </a:p>
+          <a:p>
+            <a:r>
+              <a:t>[다음] 실습 일곱</a:t>
             </a:r>
           </a:p>
         </p:txBody>
@@ -3012,7 +4067,32 @@
           <a:lstStyle/>
           <a:p>
             <a:r>
-              <a:t>여기까지 배운 것을 이제 일곱 가지 실습으로 직접 해 보겠습니다. 첫 실습은 웹 BPMN 편집기의 기본 조작이에요. 정비 요청이 담당자에게 넘어가는 작은 흐름으로, 시작과 작업과 끝을 놓고 선으로 잇고, 작업을 사용자 작업으로 바꾸고 이름과 식별자를 읽습니다. 결과물은 bpmn 파일 하나예요. 저장한 파일을 다시 열어 요소와 이름과 연결 방향이 그대로인지 확인하고, 화면에 보이는 이름과 요소 식별자가 다르다는 것도 함께 봅니다.</a:t>
+              <a:t>[짚을 곳] 실습 구분 → 제목</a:t>
+            </a:r>
+          </a:p>
+          <a:p>
+            <a:r>
+              <a:t>· 목적: 웹 BPMN 편집기의 기본 조작 익히기</a:t>
+            </a:r>
+          </a:p>
+          <a:p>
+            <a:r>
+              <a:t>· 앞 이론과의 연결: 이벤트 · 작업 · 시퀀스 흐름, 사용자 작업, 표시 이름 vs 요소 식별자</a:t>
+            </a:r>
+          </a:p>
+          <a:p>
+            <a:r>
+              <a:t>· 소재: 정비 요청이 담당자에게 넘어가는 작은 흐름</a:t>
+            </a:r>
+          </a:p>
+          <a:p>
+            <a:r>
+              <a:t>· 결과물: .bpmn 파일 하나</a:t>
+            </a:r>
+          </a:p>
+          <a:p>
+            <a:r>
+              <a:t>[다음] 할 일과 성공 기준</a:t>
             </a:r>
           </a:p>
         </p:txBody>
@@ -3082,7 +4162,37 @@
           <a:lstStyle/>
           <a:p>
             <a:r>
-              <a:t>41~42장 통합 발화는 41장 발표자 노트를 따른다.</a:t>
+              <a:t>[짚을 곳] 카드 셋 왼쪽부터 → 강조한 산출물 · 성공 기준 카드</a:t>
+            </a:r>
+          </a:p>
+          <a:p>
+            <a:r>
+              <a:t>· 목표 · 입력: 배치 · 연결 · 수정 · 속성 확인, 정비 요청이 담당자에게 넘어가는 흐름</a:t>
+            </a:r>
+          </a:p>
+          <a:p>
+            <a:r>
+              <a:t>· 할 일: 시작 · 작업 · 끝을 놓고 시퀀스 흐름으로 잇기, 작업을 사용자 작업으로 바꾸고 이름 · ID 읽기</a:t>
+            </a:r>
+          </a:p>
+          <a:p>
+            <a:r>
+              <a:t>· 산출물: .bpmn 파일 하나</a:t>
+            </a:r>
+          </a:p>
+          <a:p>
+            <a:r>
+              <a:t>· 성공 기준: 다시 열어도 요소 · 이름 · 연결 방향이 같다</a:t>
+            </a:r>
+          </a:p>
+          <a:p>
+            <a:r>
+              <a:t>· 주의: 화면에 보이는 이름과 요소 ID는 다르다</a:t>
+            </a:r>
+          </a:p>
+          <a:p>
+            <a:r>
+              <a:t>[다음] 실습 2, 승인 업무 작도</a:t>
             </a:r>
           </a:p>
         </p:txBody>
@@ -3152,7 +4262,32 @@
           <a:lstStyle/>
           <a:p>
             <a:r>
-              <a:t>두 번째 실습에서는 그 흐름을 이어받아 승인 업무를 그립니다. 정비 요청을 확인한 뒤 승인 여부 게이트웨이에서 승인 종료와 반려 종료로 가릅니다. 두 갈래를 각각 따라가서 둘 다 자기 끝에 닿는지, 가위표가 있는 배타 게이트웨이인지, 끊긴 선이나 건너뛴 작업이 없는지 확인해요. 결과물은 승인 업무 파일과, 경로마다 시작과 결정과 끝을 적은 기록입니다.</a:t>
+              <a:t>[짚을 곳] 실습 구분 → 제목</a:t>
+            </a:r>
+          </a:p>
+          <a:p>
+            <a:r>
+              <a:t>· 목적: 앞 흐름을 이어받아 승인 업무를 그린다</a:t>
+            </a:r>
+          </a:p>
+          <a:p>
+            <a:r>
+              <a:t>· 앞 이론과의 연결: 배타 게이트웨이, 갈래마다 자기 끝</a:t>
+            </a:r>
+          </a:p>
+          <a:p>
+            <a:r>
+              <a:t>· 소재: 정비 요청 확인 → 승인 여부 → 승인 종료 · 반려 종료</a:t>
+            </a:r>
+          </a:p>
+          <a:p>
+            <a:r>
+              <a:t>· 결과물: 승인 업무 파일과 경로별 기록</a:t>
+            </a:r>
+          </a:p>
+          <a:p>
+            <a:r>
+              <a:t>[다음] 두 갈래와 성공 기준</a:t>
             </a:r>
           </a:p>
         </p:txBody>
@@ -3222,7 +4357,37 @@
           <a:lstStyle/>
           <a:p>
             <a:r>
-              <a:t>43~44장 통합 발화는 43장 발표자 노트를 따른다.</a:t>
+              <a:t>[짚을 곳] 흐름 넷 왼쪽부터 → 강조한 성공 기준 칸</a:t>
+            </a:r>
+          </a:p>
+          <a:p>
+            <a:r>
+              <a:t>· 입력: 앞 실습의 기본 흐름, 정비 요청 한 건</a:t>
+            </a:r>
+          </a:p>
+          <a:p>
+            <a:r>
+              <a:t>· 그릴 흐름: 요청 확인 → 승인 여부 → 승인 종료 · 반려 종료</a:t>
+            </a:r>
+          </a:p>
+          <a:p>
+            <a:r>
+              <a:t>· 산출물: 승인 업무 파일 + 경로별 시작 · 결정 · 끝 기록</a:t>
+            </a:r>
+          </a:p>
+          <a:p>
+            <a:r>
+              <a:t>· 성공 기준: 두 갈래가 각자 끝에 닿음, 가위표 배타 게이트웨이, 끊긴 선 · 건너뛴 작업 없음</a:t>
+            </a:r>
+          </a:p>
+          <a:p>
+            <a:r>
+              <a:t>· 갈래를 하나씩 직접 따라가 본다</a:t>
+            </a:r>
+          </a:p>
+          <a:p>
+            <a:r>
+              <a:t>[다음] 실습 3, 설비 이상 대응 작도</a:t>
             </a:r>
           </a:p>
         </p:txBody>
@@ -3292,7 +4457,32 @@
           <a:lstStyle/>
           <a:p>
             <a:r>
-              <a:t>세 번째 실습에서는 승인 업무를 설비 이상 대응으로 넓힙니다. 쿨러 경보에서 진단과 조치 제안, 운전원 승인, PLC 명령, 효과 재확인, 보고까지를 풀 하나의 세 레인에 나눠 그려요. 제공된 참조 흐름은 대조할 때만 쓰고 완성본으로 바꿔 쓰지 않습니다. 확인할 것은 추천과 명령 사이에 사람의 승인이 놓였는지, 명령 뒤에 효과를 다시 확인하는지예요. 결과물은 설비 이상 대응 초안과, 작업 이름과 요소 식별자와 레인을 맞춘 기록입니다.</a:t>
+              <a:t>[짚을 곳] 실습 구분 → 제목</a:t>
+            </a:r>
+          </a:p>
+          <a:p>
+            <a:r>
+              <a:t>· 목적: 승인 업무를 설비 이상 대응으로 넓힌다</a:t>
+            </a:r>
+          </a:p>
+          <a:p>
+            <a:r>
+              <a:t>· 앞 이론과의 연결: 풀 하나 · 레인 셋, 사용자 · 서비스 작업, 명령 앞의 승인</a:t>
+            </a:r>
+          </a:p>
+          <a:p>
+            <a:r>
+              <a:t>· 범위: 쿨러 경보 → 진단 · 제안 → 운전원 승인 → PLC 명령 → 효과 재확인 → 보고</a:t>
+            </a:r>
+          </a:p>
+          <a:p>
+            <a:r>
+              <a:t>· 제공 참조 흐름은 대조용, 완성본으로 바꿔 쓰지 않는다</a:t>
+            </a:r>
+          </a:p>
+          <a:p>
+            <a:r>
+              <a:t>[다음] 그릴 범위와 성공 기준</a:t>
             </a:r>
           </a:p>
         </p:txBody>
@@ -3362,7 +4552,32 @@
           <a:lstStyle/>
           <a:p>
             <a:r>
-              <a:t>45~46장 통합 발화는 45장 발표자 노트를 따른다.</a:t>
+              <a:t>[짚을 곳] 카드 셋 왼쪽부터 → 강조한 산출물 · 성공 기준 카드</a:t>
+            </a:r>
+          </a:p>
+          <a:p>
+            <a:r>
+              <a:t>· 입력: 앞 실습의 승인 업무 흐름, 참조 흐름은 대조용</a:t>
+            </a:r>
+          </a:p>
+          <a:p>
+            <a:r>
+              <a:t>· 그릴 범위: 경보 → 진단 · 제안 → 승인 → PLC 명령 → 재확인 → 보고, 풀 하나에 레인 셋</a:t>
+            </a:r>
+          </a:p>
+          <a:p>
+            <a:r>
+              <a:t>· 산출물: 설비 이상 대응 초안 파일 + 요소 ID · 레인 대응 기록</a:t>
+            </a:r>
+          </a:p>
+          <a:p>
+            <a:r>
+              <a:t>· 성공 기준: 추천과 명령 사이에 사람의 승인, 명령 뒤에 효과 재확인</a:t>
+            </a:r>
+          </a:p>
+          <a:p>
+            <a:r>
+              <a:t>[다음] 실습 4, 승인 조건과 예외</a:t>
             </a:r>
           </a:p>
         </p:txBody>
@@ -3432,7 +4647,27 @@
           <a:lstStyle/>
           <a:p>
             <a:r>
-              <a:t>네 번째 실습에서는 그 초안에 예외를 넣어 안전한 흐름으로 만듭니다. 승인과 거절을 가르고, 거절은 거절 보고를 거쳐 반려 종료로 닫아요. 운전원 승인에는 비중단형 경계 타이머를 붙여 승인 지연 알림 갈래를 엽니다. 거절 갈래에서 명령으로 가는 선이 없는지, 알림이 승인 작업을 끊지 않는지 그림과 저장한 파일 양쪽에서 확인하세요. 그리고 갈림의 조건과 기본 흐름, 10분 기한은 선 이름만으로 생기지 않으니 조건 계획에 따로 적어 둡니다.</a:t>
+              <a:t>[짚을 곳] 실습 구분 → 제목</a:t>
+            </a:r>
+          </a:p>
+          <a:p>
+            <a:r>
+              <a:t>· 목적: 초안에 예외를 넣어 안전한 흐름으로</a:t>
+            </a:r>
+          </a:p>
+          <a:p>
+            <a:r>
+              <a:t>· 앞 이론과의 연결: 승인 · 거절 갈림과 반려 종료, 비중단형 경계 타이머, 선 이름 vs 조건</a:t>
+            </a:r>
+          </a:p>
+          <a:p>
+            <a:r>
+              <a:t>· 그림과 저장한 파일 양쪽에서 확인한다</a:t>
+            </a:r>
+          </a:p>
+          <a:p>
+            <a:r>
+              <a:t>[다음] 더할 것과 확인할 경계</a:t>
             </a:r>
           </a:p>
         </p:txBody>
@@ -3502,7 +4737,32 @@
           <a:lstStyle/>
           <a:p>
             <a:r>
-              <a:t>47~48장 통합 발화는 47장 발표자 노트를 따른다.</a:t>
+              <a:t>[짚을 곳] 표 세 줄(더할 것) → 가운데(그림에 그릴 것) → 오른쪽(확인할 경계) → 강조한 셋째 줄</a:t>
+            </a:r>
+          </a:p>
+          <a:p>
+            <a:r>
+              <a:t>· 승인 · 거절 분기: 승인 → 냉각 명령, 거절 → 거절 보고 → 반려 종료, 거절 갈래에 명령이 없어야</a:t>
+            </a:r>
+          </a:p>
+          <a:p>
+            <a:r>
+              <a:t>· 승인 지연 알림: 운전원 승인에 비중단형 경계 타이머 → 알림 → 알림 끝, 알림이 승인 작업을 끊지 않아야</a:t>
+            </a:r>
+          </a:p>
+          <a:p>
+            <a:r>
+              <a:t>· 조건과 기한: 갈림의 조건 · 기본 흐름 · 10분 기한을 조건 계획에 따로 적는다</a:t>
+            </a:r>
+          </a:p>
+          <a:p>
+            <a:r>
+              <a:t>· 선 이름만으로 조건이 생기지 않는다</a:t>
+            </a:r>
+          </a:p>
+          <a:p>
+            <a:r>
+              <a:t>[다음] 실습 5, 실행 연결 비교</a:t>
             </a:r>
           </a:p>
         </p:txBody>
@@ -3572,7 +4832,27 @@
           <a:lstStyle/>
           <a:p>
             <a:r>
-              <a:t>다섯 번째 실습에서는 직접 그린 흐름을 포털에 등록된 기준 흐름과 견줍니다. 제공 매핑에서 시작 이벤트, 에이전트 단계, 운전원 승인, 설비 명령, 재관측이 각각 어떤 실행 기능과 맡을 쪽에 연결돼 있는지 찾고, 내 그림의 작업 옆에 표시해요. 그림에 없는 조건과 기한과 담당은 따로 적습니다. 여기서 가릴 것은 내 파일은 비교하려고 그린 그림이고, 실제로 실행되는 건 포털에 등록된 정의라는 점이에요. 수업에서 내 그림을 포털에 등록하거나 배포하지는 않습니다.</a:t>
+              <a:t>[짚을 곳] 실습 구분 → 제목</a:t>
+            </a:r>
+          </a:p>
+          <a:p>
+            <a:r>
+              <a:t>· 목적: 직접 그린 흐름을 포털에 등록된 기준 흐름과 견준다</a:t>
+            </a:r>
+          </a:p>
+          <a:p>
+            <a:r>
+              <a:t>· 앞 이론과의 연결: 작업마다 붙는 실행 기능, 그림 파일 vs 실행 정의</a:t>
+            </a:r>
+          </a:p>
+          <a:p>
+            <a:r>
+              <a:t>· 내 파일은 비교용 그림, 실행되는 건 포털에 등록된 정의, 수업에서 내 그림을 등록 · 배포하지 않음</a:t>
+            </a:r>
+          </a:p>
+          <a:p>
+            <a:r>
+              <a:t>[다음] 찾을 것과 표시할 것</a:t>
             </a:r>
           </a:p>
         </p:txBody>
@@ -3642,7 +4922,37 @@
           <a:lstStyle/>
           <a:p>
             <a:r>
-              <a:t>화면의 표는 쿨러 사건 한 건이 실제로 지나간 기록입니다. 위에서 아래로 일어난 순서이고, 가운데 열이 그 단계를 맡은 쪽과 남은 기록, 오른쪽 열이 그 단계가 끝났을 때 생긴 것이에요. 첫 줄, 쿨러 성능 저하 경보가 나면서 이 업무가 하나의 처리 건으로 열렸습니다. 둘째 줄에서 냉각 긴급 대응 에이전트가 원인을 가리고 팬 최대 운전을 추천했죠. 판단 기록 번호도 남았습니다. 여기까지가 앞 회차에서 다룬 부분이에요. 강조한 셋째 줄부터가 이번 회차의 이야기입니다. 운전원이 추천안을 보고 승인했고, 그 승인이 있어야 넷째 줄 냉각 명령이 SCADA를 거쳐 PLC로 갑니다. 다섯째 줄 재관측에서는 유온을 다시 읽어서 60도를 넘던 값이 50도 남짓으로 내려온 것과 경보 해제를 확인했어요. 여섯째 줄에서 CMMS에 쿨러 핀 세척 작업지시가 등록되고, 마지막 줄 결과 보고로 처리 건이 끝났습니다. 가운데 열을 위에서 아래로 다시 훑어보세요. 에이전트, 운전원, SCADA, CMMS, 그리고 흐름을 이끄는 시스템까지, 맡은 쪽이 단계마다 다릅니다. 추천안이 제출된 순간에는 이 가운데 앞의 두 줄만 끝난 거예요. 나머지 다섯 일은 각기 다른 담당이 앞 단계의 결과를 받아야 시작됩니다.</a:t>
+              <a:t>[짚을 곳] 표 일곱 줄 위에서 아래(일어난 순서) → 가운데(맡은 쪽 · 기록) → 강조한 셋째 줄</a:t>
+            </a:r>
+          </a:p>
+          <a:p>
+            <a:r>
+              <a:t>· 경보 ALT-hyd01-0014-e0a1 · 11:13:08 → 처리 건 하나가 열림</a:t>
+            </a:r>
+          </a:p>
+          <a:p>
+            <a:r>
+              <a:t>· 냉각 긴급 대응 에이전트: 판단 DEC-1010-002-408b, 팬 최대 운전 추천(앞 회차까지)</a:t>
+            </a:r>
+          </a:p>
+          <a:p>
+            <a:r>
+              <a:t>· 셋째 줄부터 이번 회차: 운전원 승인 11:14:56 → 냉각 명령(SCADA → PLC, CMD-1010-0001-b94a · 인터록 PASS)</a:t>
+            </a:r>
+          </a:p>
+          <a:p>
+            <a:r>
+              <a:t>· 재관측 61.4 → 51.5 ℃ · 경보 해제 → 작업지시 WO-1010-C058 → 결과 보고 정상</a:t>
+            </a:r>
+          </a:p>
+          <a:p>
+            <a:r>
+              <a:t>· 맡은 쪽이 단계마다 다르다, 추천안 제출 순간엔 앞 두 줄만 끝남</a:t>
+            </a:r>
+          </a:p>
+          <a:p>
+            <a:r>
+              <a:t>[다음] 끝났다고 말하는 자리</a:t>
             </a:r>
           </a:p>
         </p:txBody>
@@ -3712,7 +5022,37 @@
           <a:lstStyle/>
           <a:p>
             <a:r>
-              <a:t>49~50장 통합 발화는 49장 발표자 노트를 따른다.</a:t>
+              <a:t>[짚을 곳] 표 다섯 줄 → 가운데(제공 매핑에서) → 오른쪽(내 그림에 표시할 것) → 강조한 마지막 줄</a:t>
+            </a:r>
+          </a:p>
+          <a:p>
+            <a:r>
+              <a:t>· 시작 이벤트: 경보 패턴 COOLER_DEGRADATION → 쿨러 경보 시작</a:t>
+            </a:r>
+          </a:p>
+          <a:p>
+            <a:r>
+              <a:t>· 에이전트 단계: 판단 · 제안 부품, 냉각 대응 에이전트 → 진단 · 제안 작업</a:t>
+            </a:r>
+          </a:p>
+          <a:p>
+            <a:r>
+              <a:t>· 운전원 승인: 승인 · 거절 부품, 운전원 역할 → 사용자 작업</a:t>
+            </a:r>
+          </a:p>
+          <a:p>
+            <a:r>
+              <a:t>· 설비 명령 · 재관측: PLC 명령 · 재관측 부품 → 서비스 작업 둘</a:t>
+            </a:r>
+          </a:p>
+          <a:p>
+            <a:r>
+              <a:t>· 조건 · 기한 · 담당은 매핑에 있다 → 그림에 없는 값을 따로 적는다</a:t>
+            </a:r>
+          </a:p>
+          <a:p>
+            <a:r>
+              <a:t>[다음] 실습 6, 연결 검사와 수정</a:t>
             </a:r>
           </a:p>
         </p:txBody>
@@ -3782,7 +5122,27 @@
           <a:lstStyle/>
           <a:p>
             <a:r>
-              <a:t>여섯 번째 실습은 내 그림을 스스로 검사하고 고치는 일입니다. 승인 경로, 반려 경로, 지연 알림 갈래를 하나씩 따라가며 갈래마다 끝 이벤트에 닿는지 보고, 제공 기준 그림과 매핑에 견줘 작업마다 담당 역할과 실행 기능이 빠지지 않았는지 확인해요. 실행 정의로 가져올 때 걸리는 모양도 이때 점검표로 씁니다. 실제로 찾은 문제만 고치고, 고친 그림을 저장한 뒤 다시 열어 연결이 그대로인지 확인합니다. 결과물은 고친 파일과 수정 기록이에요.</a:t>
+              <a:t>[짚을 곳] 실습 구분 → 제목</a:t>
+            </a:r>
+          </a:p>
+          <a:p>
+            <a:r>
+              <a:t>· 목적: 내 그림을 스스로 검사하고 고친다</a:t>
+            </a:r>
+          </a:p>
+          <a:p>
+            <a:r>
+              <a:t>· 앞 이론과의 연결: 갈래마다 끝 이벤트, 담당 역할 · 실행 기능, 가져올 때 걸리는 그림 점검표</a:t>
+            </a:r>
+          </a:p>
+          <a:p>
+            <a:r>
+              <a:t>· 실제로 찾은 문제만 고친다</a:t>
+            </a:r>
+          </a:p>
+          <a:p>
+            <a:r>
+              <a:t>[다음] 따라갈 경로와 대조할 것</a:t>
             </a:r>
           </a:p>
         </p:txBody>
@@ -3852,7 +5212,32 @@
           <a:lstStyle/>
           <a:p>
             <a:r>
-              <a:t>51~52장 통합 발화는 51장 발표자 노트를 따른다.</a:t>
+              <a:t>[짚을 곳] 카드 셋 왼쪽부터 → 강조한 산출물 · 성공 기준 카드</a:t>
+            </a:r>
+          </a:p>
+          <a:p>
+            <a:r>
+              <a:t>· 따라갈 경로: 승인 · 반려 · 지연 알림 갈래, 갈래마다 끝 이벤트에 닿나</a:t>
+            </a:r>
+          </a:p>
+          <a:p>
+            <a:r>
+              <a:t>· 대조할 것: 제공 기준 BPMN과 매핑, 작업별 담당 역할 · 실행 기능 누락</a:t>
+            </a:r>
+          </a:p>
+          <a:p>
+            <a:r>
+              <a:t>· 산출물: 고친 .bpmn과 수정 기록</a:t>
+            </a:r>
+          </a:p>
+          <a:p>
+            <a:r>
+              <a:t>· 성공 기준: 저장 뒤 다시 열어도 연결 그대로, 실제로 찾은 문제만 고침</a:t>
+            </a:r>
+          </a:p>
+          <a:p>
+            <a:r>
+              <a:t>[다음] 실습 7, 이벤트와 처리 결과</a:t>
             </a:r>
           </a:p>
         </p:txBody>
@@ -3922,7 +5307,27 @@
           <a:lstStyle/>
           <a:p>
             <a:r>
-              <a:t>마지막 실습에서는 포털의 준비된 냉각 대응 시나리오 A를 실행하고, 열린 처리 건 하나를 끝까지 따라갑니다. 판단과 운전원 승인, 명령과 재관측, 작업지시와 보고를 차례로 확인하면서, 승인 대기와 오류, 명령 처리와 온도 회복, 작업지시 등록과 정비 완료를 각각 가려요. 거절이나 보류, 지연은 이번에 실제로 남은 기록인지 제공된 사례인지 구분해 비교합니다. 남길 것은 정의와 판본과 처리 건과 결과, 그리고 내 그림에서 대응하는 작업, 마지막으로 다음 담당자가 이어 볼 일과 그 근거예요. 이제 일곱 실습을 차례로 진행하고, 마친 뒤 같은 이론의 복습으로 돌아오겠습니다.</a:t>
+              <a:t>[짚을 곳] 실습 구분 → 제목</a:t>
+            </a:r>
+          </a:p>
+          <a:p>
+            <a:r>
+              <a:t>· 목적: 포털의 준비된 냉각 대응 시나리오 A로 처리 건 하나를 끝까지 따라간다</a:t>
+            </a:r>
+          </a:p>
+          <a:p>
+            <a:r>
+              <a:t>· 앞 이론과의 연결: 토큰 · 변수, 상태 · 끝 이벤트 · 결과 보고, 처리 기록 · 감사 기록</a:t>
+            </a:r>
+          </a:p>
+          <a:p>
+            <a:r>
+              <a:t>· 거절 · 보류 · 지연은 실제 기록인지 제공 사례인지 구분</a:t>
+            </a:r>
+          </a:p>
+          <a:p>
+            <a:r>
+              <a:t>[다음] 따라갈 것과 남길 기록</a:t>
             </a:r>
           </a:p>
         </p:txBody>
@@ -3992,7 +5397,37 @@
           <a:lstStyle/>
           <a:p>
             <a:r>
-              <a:t>53~54장 통합 발화는 53장 발표자 노트를 따른다.</a:t>
+              <a:t>[짚을 곳] 표 다섯 줄 → 가운데(기록에서 확인할 것) → 오른쪽(구별할 짝) → 강조한 마지막 줄</a:t>
+            </a:r>
+          </a:p>
+          <a:p>
+            <a:r>
+              <a:t>· 판단 → 승인: 추천안 · 판단 번호 · 승인 대기(승인 대기 vs 오류)</a:t>
+            </a:r>
+          </a:p>
+          <a:p>
+            <a:r>
+              <a:t>· 명령 → 재관측: 명령 처리 · 유온 회복 · 경보 해제(명령 처리 vs 온도 회복)</a:t>
+            </a:r>
+          </a:p>
+          <a:p>
+            <a:r>
+              <a:t>· 작업지시 · 보고: 작업지시 번호 · 결과 보고 · 끝(작업지시 등록 vs 정비 완료)</a:t>
+            </a:r>
+          </a:p>
+          <a:p>
+            <a:r>
+              <a:t>· 거절 · 보류 · 지연: 실행한 것 vs 사례로 본 것</a:t>
+            </a:r>
+          </a:p>
+          <a:p>
+            <a:r>
+              <a:t>· 남길 기록: 정의 · 판본 · 처리 건 · 결과 + 내 BPMN의 대응 작업 + 다음 담당자가 이어 볼 일과 근거</a:t>
+            </a:r>
+          </a:p>
+          <a:p>
+            <a:r>
+              <a:t>[다음] 실습 1~7 진행</a:t>
             </a:r>
           </a:p>
         </p:txBody>
@@ -4062,7 +5497,42 @@
           <a:lstStyle/>
           <a:p>
             <a:r>
-              <a:t>실습에서 그린 그림과 처리 건 기록을 손에 들고 이번 회차를 되짚어 보겠습니다. 표의 왼쪽 물음마다 답이 어디에 있는지, 오른쪽의 헷갈리기 쉬운 짝을 먼저 스스로 가려 보세요. 첫째, 추천안이 나와도 업무는 끝나지 않았습니다. Task 하나가 끝났을 뿐이고, 완료는 End-to-End의 끝 이벤트와 결과 보고에서 봐요. 둘째, 선 이름이 승인이라고 조건이 걸린 게 아닙니다. 조건은 연결 값에 있었죠. 셋째, 알림이 나가도 승인은 계속 기다립니다. 비중단형 타이머라서 알림 갈래만 끝나요. 넷째, 운전원 승인에 머문 처리 건은 오류가 아니라 토큰이 사용자 작업에 머문 실행 중 상태입니다. 다섯째, 끝남 상태는 실행이 끝났다는 뜻일 뿐이라, 성공인지는 끝 이벤트와 결과 보고와 단계 상태로 가립니다. 마지막으로 작업지시가 등록됐다고 정비가 끝난 건 아니에요. 세척 완료는 정비 쪽에서 따로 확인합니다.</a:t>
+              <a:t>[짚을 곳] 오른쪽 짝 열을 먼저 스스로 가르기 → 여섯 줄 위에서 아래로 → 강조한 마지막 줄</a:t>
+            </a:r>
+          </a:p>
+          <a:p>
+            <a:r>
+              <a:t>· 추천안이 나오면 끝? → End-to-End의 끝 이벤트 · 결과 보고(Task vs End-to-End)</a:t>
+            </a:r>
+          </a:p>
+          <a:p>
+            <a:r>
+              <a:t>· 선 이름이 「승인」이면 조건? → 연결 값의 approval == '승인'(선 이름 vs 실행 조건)</a:t>
+            </a:r>
+          </a:p>
+          <a:p>
+            <a:r>
+              <a:t>· 알림 뒤에도 기다리나 → 비중단형 경계 타이머(알림 vs 종료)</a:t>
+            </a:r>
+          </a:p>
+          <a:p>
+            <a:r>
+              <a:t>· 승인에 머문 처리 건은 오류? → 토큰이 사용자 작업에 머문 RUNNING(승인 대기 vs 오류)</a:t>
+            </a:r>
+          </a:p>
+          <a:p>
+            <a:r>
+              <a:t>· COMPLETED면 성공? → 끝 이벤트 · 결과 보고 · 단계 상태(실행 종료 vs 업무 성공)</a:t>
+            </a:r>
+          </a:p>
+          <a:p>
+            <a:r>
+              <a:t>· 작업지시 등록이면 정비 끝? → CMMS의 작업 완료 확인(등록 vs 완료)</a:t>
+            </a:r>
+          </a:p>
+          <a:p>
+            <a:r>
+              <a:t>[다음] 용어 정리</a:t>
             </a:r>
           </a:p>
         </p:txBody>
@@ -4132,7 +5602,37 @@
           <a:lstStyle/>
           <a:p>
             <a:r>
-              <a:t>용어를 정식 명칭과 뜻으로 정리하겠습니다. 비즈니스 프로세스는 원하는 결과를 내기 위해 관련된 작업과 흐름을 정한 묶음이고, 오케스트레이션은 중앙의 조정자가 작업의 순서와 호출을 이끄는 방식이에요. BPM은 프로세스를 분석, 설계, 실행, 모니터링, 개선으로 되풀이해 관리하는 방법이고, BPMN은 도형과 선의 뜻을 정해 업무 프로세스를 그리는 표기 표준입니다. 배타 게이트웨이는 조건이 참인 한 갈래로만 보내는 갈림이고, 기본 흐름은 어느 조건도 맞지 않을 때 가는 선이에요. 경계 이벤트는 작업 테두리에 붙어 그 작업이 진행 중일 때 생기는 일에 반응하는 이벤트고요. 프로세스 엔진은 정의를 읽어 실행하는 소프트웨어, 인스턴스는 정의에 따라 수행되는 한 건, 곧 처리 건입니다. 토큰은 흐름의 현재 위치를 나타내는 표식, 프로세스 변수는 처리 건이 지닌 이름 붙은 값이에요. 마지막으로 판본은 바꾸지 않고 쌓는 정의의 한 벌이고, 감사 기록은 처리 건의 시작, 판본의 배포, 거부된 승인 같은 결정을 남기는 기록입니다.</a:t>
+              <a:t>[짚을 곳] 표 아홉 줄 위에서 아래로, 오른쪽 정식 명칭 · 풀이</a:t>
+            </a:r>
+          </a:p>
+          <a:p>
+            <a:r>
+              <a:t>· 비즈니스 프로세스(Business Process) · 오케스트레이션(Orchestration)</a:t>
+            </a:r>
+          </a:p>
+          <a:p>
+            <a:r>
+              <a:t>· BPM(Business Process Management) · BPMN(Business Process Model and Notation)</a:t>
+            </a:r>
+          </a:p>
+          <a:p>
+            <a:r>
+              <a:t>· 배타 게이트웨이 · 기본 흐름(Exclusive Gateway · Default Flow)</a:t>
+            </a:r>
+          </a:p>
+          <a:p>
+            <a:r>
+              <a:t>· 경계 이벤트(Boundary Event) · 프로세스 엔진 · 인스턴스(Process Engine · Process Instance)</a:t>
+            </a:r>
+          </a:p>
+          <a:p>
+            <a:r>
+              <a:t>· 토큰 · 프로세스 변수(Token · Process Variable) · 판본 · 감사 기록(Version · Audit Log)</a:t>
+            </a:r>
+          </a:p>
+          <a:p>
+            <a:r>
+              <a:t>[다음] 퀴즈 세 문제</a:t>
             </a:r>
           </a:p>
         </p:txBody>
@@ -4202,7 +5702,27 @@
           <a:lstStyle/>
           <a:p>
             <a:r>
-              <a:t>이제 퀴즈 세 문제로 배운 구분을 판단에 써 보겠습니다. 문제마다 답을 고를 시간을 드리고, 세 문제를 다 본 뒤에 정답과 까닭을 확인하겠습니다.</a:t>
+              <a:t>[짚을 곳] 간지 제목 → 부제</a:t>
+            </a:r>
+          </a:p>
+          <a:p>
+            <a:r>
+              <a:t>· 세 문제: 기록의 뜻, 그림과 실행 정의의 구별, 명령을 만드는 책임의 자리</a:t>
+            </a:r>
+          </a:p>
+          <a:p>
+            <a:r>
+              <a:t>· 문제마다 보기를 읽고 20초 멈춤</a:t>
+            </a:r>
+          </a:p>
+          <a:p>
+            <a:r>
+              <a:t>· 정답과 까닭은 세 문제를 다 본 뒤에</a:t>
+            </a:r>
+          </a:p>
+          <a:p>
+            <a:r>
+              <a:t>[다음] 첫 문제</a:t>
             </a:r>
           </a:p>
         </p:txBody>
@@ -4272,7 +5792,32 @@
           <a:lstStyle/>
           <a:p>
             <a:r>
-              <a:t>첫 번째 문제입니다. 쿨러 사건의 처리 건이 결과 보고 정상, 상태 끝남으로 끝났고, 작업지시가 등록돼 있어요. 정비 담당자에게 넘기는 말로 맞는 것은 무엇일까요? 1번, 핀 세척까지 끝났으니 따로 확인할 일이 없다. 2번, 팬 최대 운전으로 핀 오염이 제거됐다. 3번, 유온은 기준 아래로 회복됐고, 핀 세척 작업지시가 배정돼 세척 완료 확인이 남았다. 4번, 처리 건이 끝났으니 팬 100퍼센트 운전 제한도 풀렸다.</a:t>
+              <a:t>[짚을 곳] 상황(결과 보고 정상 · COMPLETED, 작업지시 WO-1010-C058 등록) → 보기 넷 → 20초</a:t>
+            </a:r>
+          </a:p>
+          <a:p>
+            <a:r>
+              <a:t>· 물음의 요지: 정비 담당자에게 넘기는 말</a:t>
+            </a:r>
+          </a:p>
+          <a:p>
+            <a:r>
+              <a:t>· 생각할 거리: 명령 처리 · 유온 회복 · 작업지시 등록은 각각 무엇을 말하나</a:t>
+            </a:r>
+          </a:p>
+          <a:p>
+            <a:r>
+              <a:t>· 생각할 거리: 완화 조치와 근본 조치의 차이</a:t>
+            </a:r>
+          </a:p>
+          <a:p>
+            <a:r>
+              <a:t>· 생각할 거리: 처리 건의 끝과 SOP의 운전 제한</a:t>
+            </a:r>
+          </a:p>
+          <a:p>
+            <a:r>
+              <a:t>[다음] 둘째 문제</a:t>
             </a:r>
           </a:p>
         </p:txBody>
@@ -4342,7 +5887,32 @@
           <a:lstStyle/>
           <a:p>
             <a:r>
-              <a:t>두 번째 문제입니다. 편집기에서 승인 여부 게이트웨이의 두 선 이름을 승인과 거절로 적었고, 연결 값에는 조건을 넣지 않았어요. 이 상태에 대한 설명으로 맞는 것은 무엇일까요? 1번, 선 이름은 표시일 뿐이라, 조건과 기본 흐름을 연결 값에 정해야 실행에서 갈린다. 2번, 엔진이 선 이름을 읽어 승인일 때만 냉각 명령으로 간다. 3번, 배타 게이트웨이를 그렸으니 거절 선이 저절로 기본 흐름이 된다. 4번, 에이전트가 추천안을 보고 갈래를 고른다.</a:t>
+              <a:t>[짚을 곳] 상황(승인? 두 선 이름만 「승인」 · 「거절」, 연결 값엔 조건 없음) → 보기 넷 → 20초</a:t>
+            </a:r>
+          </a:p>
+          <a:p>
+            <a:r>
+              <a:t>· 물음의 요지: 이 상태에 대한 맞는 설명</a:t>
+            </a:r>
+          </a:p>
+          <a:p>
+            <a:r>
+              <a:t>· 생각할 거리: 엔진은 선 이름을 읽나</a:t>
+            </a:r>
+          </a:p>
+          <a:p>
+            <a:r>
+              <a:t>· 생각할 거리: 기본 흐름은 저절로 정해지나</a:t>
+            </a:r>
+          </a:p>
+          <a:p>
+            <a:r>
+              <a:t>· 생각할 거리: 갈래를 고르는 것은 에이전트인가, 조건인가</a:t>
+            </a:r>
+          </a:p>
+          <a:p>
+            <a:r>
+              <a:t>[다음] 셋째 문제</a:t>
             </a:r>
           </a:p>
         </p:txBody>
@@ -4412,7 +5982,42 @@
           <a:lstStyle/>
           <a:p>
             <a:r>
-              <a:t>그러면 업무가 끝났다는 말은 어디서 해야 할까요? 화면 왼쪽이 Task, 오른쪽이 End-to-End입니다. Task는 프로세스 안의 작업 하나예요. 에이전트의 원인 진단과 냉각 조치 제안이 Task 하나입니다. 셋째 줄을 보면, 이 Task가 끝났을 때 남은 건 추천안뿐이고 설비 명령은 하나도 없었어요. 그런데 이 Task 하나가 처리 건 전체 시간의 절반 남짓을 썼습니다. 시간을 가장 많이 쓴 단계가 끝났는데도 업무는 앞부분만 끝난 거죠. 오른쪽 End-to-End는 우리말로 종단 간, 시작 사건에서 최종 결과까지 전체를 말합니다. 이게 끝났을 때는 명령이 처리됐고, 유온이 회복됐고, 작업지시가 남았어요. 그래서 업무가 끝났는지는 Task가 아니라 End-to-End의 끝에서 판단합니다. 오른쪽 넷째 줄, 경계도 함께 정해야 합니다. 이 처리 건은 작업지시를 등록하고 보고하는 데서 끝나요. 핀 세척이 실제로 끝났다는 것까지 담고 있지는 않습니다. 개선 효과를 견줄 때도 시작과 끝을 같게 잡아야, 작업 하나가 빨라진 것을 업무 전체가 나아진 것으로 착각하지 않아요.</a:t>
+              <a:t>[짚을 곳] 왼쪽 Task → 강조한 오른쪽 End-to-End → 오른쪽 넷째 줄(경계)</a:t>
+            </a:r>
+          </a:p>
+          <a:p>
+            <a:r>
+              <a:t>· Task: 프로세스 안의 작업 하나(원인 진단 · 냉각 조치 제안)</a:t>
+            </a:r>
+          </a:p>
+          <a:p>
+            <a:r>
+              <a:t>· Task가 끝나면 추천안뿐, 설비 명령 없음, 그런데 처리 건 시간의 절반 남짓</a:t>
+            </a:r>
+          </a:p>
+          <a:p>
+            <a:r>
+              <a:t>· End-to-End(종단 간): 시작 사건에서 최종 결과까지, 끝나면 명령 처리 · 유온 회복 · 작업지시</a:t>
+            </a:r>
+          </a:p>
+          <a:p>
+            <a:r>
+              <a:t>· 업무 완료는 Task가 아니라 End-to-End의 끝에서 판단</a:t>
+            </a:r>
+          </a:p>
+          <a:p>
+            <a:r>
+              <a:t>· 경계: 이 처리 건은 작업지시 등록까지, 세척 완료는 밖</a:t>
+            </a:r>
+          </a:p>
+          <a:p>
+            <a:r>
+              <a:t>· 개선을 견줄 때도 같은 경계로 → 작업 하나가 빨라진 걸 업무 전체로 착각하지 않게</a:t>
+            </a:r>
+          </a:p>
+          <a:p>
+            <a:r>
+              <a:t>[다음] 용어 셋</a:t>
             </a:r>
           </a:p>
         </p:txBody>
@@ -4482,7 +6087,32 @@
           <a:lstStyle/>
           <a:p>
             <a:r>
-              <a:t>마지막 문제입니다. 에이전트가 추천안을 제출하면서 팬 속도 100퍼센트라는 명령 값을 함께 넣었어요. 이 제출의 처리로 맞는 것은 무엇일까요? 1번, 엔진이 그 값으로 바로 냉각 명령 작업을 연다. 2번, 운전원이 승인하면 에이전트가 PLC에 직접 보낸다. 3번, 승인을 기다리는 동안 SCADA가 미리 실행해 둔다. 4번, 명령 모양의 값이 든 제출은 거부되고, 명령은 승인 뒤 프로세스 쪽에서만 만들어진다.</a:t>
+              <a:t>[짚을 곳] 상황(에이전트가 추천안 제출에 「팬 속도 100 %」 명령 값을 넣음) → 보기 넷 → 20초</a:t>
+            </a:r>
+          </a:p>
+          <a:p>
+            <a:r>
+              <a:t>· 물음의 요지: 이 제출의 처리</a:t>
+            </a:r>
+          </a:p>
+          <a:p>
+            <a:r>
+              <a:t>· 생각할 거리: 에이전트의 쓰기는 무엇 하나인가</a:t>
+            </a:r>
+          </a:p>
+          <a:p>
+            <a:r>
+              <a:t>· 생각할 거리: 설비 명령은 언제, 누가 만드나</a:t>
+            </a:r>
+          </a:p>
+          <a:p>
+            <a:r>
+              <a:t>· 생각할 거리: 승인을 기다리는 동안 미리 실행되는 것이 있나</a:t>
+            </a:r>
+          </a:p>
+          <a:p>
+            <a:r>
+              <a:t>[다음] 정답과 판단 기준</a:t>
             </a:r>
           </a:p>
         </p:txBody>
@@ -4552,7 +6182,42 @@
           <a:lstStyle/>
           <a:p>
             <a:r>
-              <a:t>고른 답과 까닭을 맞춰 보겠습니다. 첫 문제는 3번이에요. 명령 처리, 유온 회복, 작업지시 등록은 서로 다른 사실이었죠. 1번은 작업지시 등록을 세척 완료로 읽었고, 2번은 완화 조치를 근본 조치로 읽었어요. 4번은 처리 건의 끝과 SOP의 운전 제한을 섞은 겁니다. 처리 건이 끝나도 24시간 제한은 그대로예요. 두 번째는 1번입니다. 갈림은 연결 값의 조건과 기본 흐름이 정하고, 선 이름은 그림의 표시예요. 2번처럼 엔진이 이름을 읽어 주지 않고, 3번처럼 거절 선이 저절로 기본 흐름이 되지도 않습니다. 4번은 판단하는 쪽과 갈림을 정하는 조건을 섞은 거고요. 세 번째는 4번이에요. 에이전트의 쓰기는 판단 제출 하나뿐이라, 명령 모양의 값이 들어 있으면 그 제출 자체를 받지 않습니다. 설비 명령은 승인을 거친 뒤 프로세스 쪽에서만 만들어져요. 1번과 3번은 승인 전에 명령이 나간다는 거고, 2번은 에이전트에게 실행 권한이 있다는 거라 모두 이 회차에서 본 책임의 자리와 맞지 않습니다. 이번 회차에서는 추천안 뒤에 남은 업무를 프로세스로 정의하고, BPMN으로 그려 그림과 실행 정의를 가르고, 처리 건의 실행과 통제를 기록으로 읽었습니다. 다음 회차에서는 같은 설계 원리를 설비 조치 밖으로 넓혀, 정기 점검과 예비품 부족에서 시작하는 정비와 구매 업무를 연결하고 그 실행 결과를 검증해 보겠습니다. 수고 많으셨습니다.</a:t>
+              <a:t>[짚을 곳] 표 세 줄(문항 · 판단 기준 · 정답) 위에서 아래로</a:t>
+            </a:r>
+          </a:p>
+          <a:p>
+            <a:r>
+              <a:t>· Quiz 1 정답 3: 명령 처리 · 회복 · 작업지시 등록은 다른 사실, 세척 완료와 SOP 운전 제한은 이어서 확인</a:t>
+            </a:r>
+          </a:p>
+          <a:p>
+            <a:r>
+              <a:t>· Quiz 1 오답: 1 등록을 세척 완료로, 2 완화를 근본 조치로, 4 처리 건의 끝과 24시간 제한을 섞음</a:t>
+            </a:r>
+          </a:p>
+          <a:p>
+            <a:r>
+              <a:t>· Quiz 2 정답 1: 갈림은 연결 값의 조건과 기본 흐름이 정함, 2 엔진은 이름을 안 읽음, 3 거절 선이 저절로 기본 흐름이 되지 않음, 4 판단과 조건을 섞음</a:t>
+            </a:r>
+          </a:p>
+          <a:p>
+            <a:r>
+              <a:t>· Quiz 3 정답 4: 에이전트의 쓰기는 판단 제출뿐, 명령 모양 값이 든 제출은 거부, 명령은 승인 뒤 프로세스만</a:t>
+            </a:r>
+          </a:p>
+          <a:p>
+            <a:r>
+              <a:t>· Quiz 3 오답: 1 · 3 승인 전 명령, 2 에이전트에게 실행 권한</a:t>
+            </a:r>
+          </a:p>
+          <a:p>
+            <a:r>
+              <a:t>· 맺음: 추천안 뒤의 업무를 프로세스로 정의하고, BPMN으로 그려 그림과 실행 정의를 가르고, 처리 건의 실행과 통제를 기록으로 읽었다</a:t>
+            </a:r>
+          </a:p>
+          <a:p>
+            <a:r>
+              <a:t>[다음] 맺음</a:t>
             </a:r>
           </a:p>
         </p:txBody>
@@ -4622,7 +6287,37 @@
           <a:lstStyle/>
           <a:p>
             <a:r>
-              <a:t>이제 용어를 셋 세우겠습니다. 첫 줄 비즈니스 프로세스는 원하는 결과를 내기 위해 관련된 작업과 그 흐름을 정한 묶음입니다. 작업을 늘어놓은 목록이 아니라, 무엇으로 시작해서 무엇으로 끝났다고 보는지가 정해진 묶음이에요. 쿨러 경보로 시작해 결과 보고로 끝나는 긴급 대응 프로세스가 그 예입니다. 둘째 줄 처리 건은 경보 한 건에 대해 그 프로세스가 실제로 한 번 수행되는 단위예요. 프로세스는 경보가 올 때마다 쓰는 틀이고, 처리 건은 경보마다 하나씩 열립니다. 쿨러 사건도 처리 건 하나였죠. 틀과 건을 나눠 두면, 이 경보는 지금 어디까지 왔는지를 건마다 따로 볼 수 있습니다. 셋째 줄 오케스트레이션은 중앙의 조정자가 작업의 순서와 호출을 이끄는 방식입니다. 에이전트, 사람, 시스템은 각자 자기 작업만 하고, 다음이 누구 차례인지는 조정자가 열어요. 앞 장에서 단계마다 담당이 달랐는데, 그 사이를 잇는 일을 한 곳이 맡는 겁니다. 이 조정자를 실제로 맡는 소프트웨어는 뒤에서 이름을 붙이겠습니다.</a:t>
+              <a:t>[짚을 곳] 풀이 세 줄 위에서 아래로 → 오른쪽 영어 이름</a:t>
+            </a:r>
+          </a:p>
+          <a:p>
+            <a:r>
+              <a:t>· 비즈니스 프로세스(Business Process): 원하는 결과를 내려고 작업과 흐름을 정한 묶음, 시작 사건과 끝난 조건이 있음</a:t>
+            </a:r>
+          </a:p>
+          <a:p>
+            <a:r>
+              <a:t>· 예: 쿨러 경보로 시작해 결과 보고로 끝나는 긴급 대응 프로세스</a:t>
+            </a:r>
+          </a:p>
+          <a:p>
+            <a:r>
+              <a:t>· 처리 건: 경보 한 건에 프로세스가 한 번 수행되는 단위, 틀과 건을 나눠 건마다 진행을 본다</a:t>
+            </a:r>
+          </a:p>
+          <a:p>
+            <a:r>
+              <a:t>· 오케스트레이션(Orchestration): 중앙의 조정자가 순서와 호출을 이끄는 방식</a:t>
+            </a:r>
+          </a:p>
+          <a:p>
+            <a:r>
+              <a:t>· 에이전트 · 사람 · 시스템은 자기 작업만, 다음 차례는 조정자가 연다</a:t>
+            </a:r>
+          </a:p>
+          <a:p>
+            <a:r>
+              <a:t>[다음] 에이전트에게 맡기면 안 되나</a:t>
             </a:r>
           </a:p>
         </p:txBody>
@@ -4692,7 +6387,42 @@
           <a:lstStyle/>
           <a:p>
             <a:r>
-              <a:t>그럼 이 연결을 판단을 잘하는 에이전트에게 맡기면 되지 않을까요? 화면의 표는 같은 물음에 에이전트와 흐름을 이끄는 쪽이 각각 무엇을 맡는지 가로로 견준 겁니다. 첫 줄, 에이전트는 지식과 값을 읽어 추천안을 내고, 흐름을 이끄는 쪽은 그 추천안을 승인 작업으로 넘깁니다. 둘째 줄이 중요해요. 에이전트는 같은 입력을 받아도 거치는 과정이나 표현, 걸리는 시간이 달라질 수 있습니다. 반면 승인 전에는 명령이 없다는 순서는 매번 똑같이 지켜져야 하죠. 셋째 줄을 보면, 이 시스템에서 에이전트의 쓰기는 판단을 제출하는 것 하나뿐이고, 명령 작업은 흐름을 이끄는 쪽이 승인 뒤에만 엽니다. 넷째 줄, 운전원 응답이 늦어질 때 기한을 재고 알림을 보내는 것도 흐름 쪽이에요. 그리고 마지막 줄, 이 처리 건이 어디까지 왔는지는 처리 건 하나에 단계와 결과와 끝이 함께 남아서 한 곳에서 확인됩니다. 그러니까 에이전트는 단계 하나의 판단을, 흐름을 이끄는 쪽은 차례와 금지와 기다림과 기록을 맡습니다. 판단이 아무리 좋아도 이 책임까지 에이전트 한쪽에 몰아 두지는 않아요.</a:t>
+              <a:t>[짚을 곳] 표 다섯 물음 → 가운데(에이전트) vs 오른쪽(흐름을 이끄는 쪽) → 강조한 마지막 줄</a:t>
+            </a:r>
+          </a:p>
+          <a:p>
+            <a:r>
+              <a:t>· 원인과 조치: 에이전트는 추천안, 흐름 쪽은 승인 작업에 넘김</a:t>
+            </a:r>
+          </a:p>
+          <a:p>
+            <a:r>
+              <a:t>· 같은 입력: 에이전트는 과정 · 표현 · 시간이 달라질 수 있음, 흐름의 순서와 조건은 매번 같음</a:t>
+            </a:r>
+          </a:p>
+          <a:p>
+            <a:r>
+              <a:t>· 승인 전 명령: 에이전트의 쓰기는 판단 제출 하나, 명령 작업은 승인 뒤에만 흐름 쪽이 연다</a:t>
+            </a:r>
+          </a:p>
+          <a:p>
+            <a:r>
+              <a:t>· 응답 지연: 흐름 쪽이 기한 뒤 알림, 승인은 계속 기다림</a:t>
+            </a:r>
+          </a:p>
+          <a:p>
+            <a:r>
+              <a:t>· 어디까지 왔나: 처리 건 하나에 단계 · 결과 · 끝이 한 곳에</a:t>
+            </a:r>
+          </a:p>
+          <a:p>
+            <a:r>
+              <a:t>· 판단이 좋아도 차례 · 금지 · 기다림 · 기록의 책임은 에이전트에 몰지 않는다</a:t>
+            </a:r>
+          </a:p>
+          <a:p>
+            <a:r>
+              <a:t>[다음] 승인을 건너뛰자는 요구</a:t>
             </a:r>
           </a:p>
         </p:txBody>
@@ -4762,7 +6492,37 @@
           <a:lstStyle/>
           <a:p>
             <a:r>
-              <a:t>이 단원의 판단 문제입니다. 팬 최대 운전이 늘 1순위로 추천되니까, 이 조치만은 운전원 승인 없이 바로 명령하자는 요구가 나왔다고 해 보죠. 흐름을 설계하는 쪽의 판단으로 맞는 것은 무엇일까요? 1번, 추천 점수가 기준을 넘으면 승인 작업을 빼도 된다. 2번, 승인 작업은 두되, 기한이 지나면 자동으로 승인한다. 3번, 승인은 설비를 움직일 권한의 자리라 유지하고, 지연은 알림과 담당 배정으로 다룬다. 4번, 에이전트에게 명령 도구를 주고 실행 뒤에 보고하게 한다. 답은 3번입니다. 승인은 추천이 맞는지 한 번 더 보는 자리이기도 하지만, 그보다 먼저 설비를 움직여도 된다고 책임지고 결정하는 자리예요. 점수가 높다는 건 그 결정을 대신할 근거가 되지 않습니다. 실제로 이 시스템은 승인 없이 설비 명령에 닿는 흐름을 등록하는 단계에서부터 받아들이지 않아요. 2번은 시간이 지났다는 이유로 사람의 결정을 없애는 거라, 1번과 같은 결과입니다. 4번은 판단하는 쪽에 실행 권한까지 주는 거고요. 정말 문제가 승인이 늦는 데 있다면, 고칠 곳은 승인 자리가 아니라 누가 언제 알림을 받고 누가 맡는지입니다.</a:t>
+              <a:t>[짚을 곳] 상황(팬 최대 운전이 늘 1순위 → 승인 없이 바로 명령) → 보기 넷 → 20초</a:t>
+            </a:r>
+          </a:p>
+          <a:p>
+            <a:r>
+              <a:t>· 정답 3: 승인은 설비를 움직일 권한의 자리라 유지, 지연은 알림 · 담당 배정으로</a:t>
+            </a:r>
+          </a:p>
+          <a:p>
+            <a:r>
+              <a:t>· 점수가 높다는 것은 그 결정을 대신할 근거가 아니다</a:t>
+            </a:r>
+          </a:p>
+          <a:p>
+            <a:r>
+              <a:t>· 이 시스템은 승인 없이 명령에 닿는 흐름을 등록 단계에서 거절</a:t>
+            </a:r>
+          </a:p>
+          <a:p>
+            <a:r>
+              <a:t>· 2: 시간으로 사람의 결정을 없앰 = 1과 같은 결과, 4: 판단하는 쪽에 실행 권한까지</a:t>
+            </a:r>
+          </a:p>
+          <a:p>
+            <a:r>
+              <a:t>· 문제가 승인 지연이라면 고칠 곳은 알림과 담당</a:t>
+            </a:r>
+          </a:p>
+          <a:p>
+            <a:r>
+              <a:t>[다음] 둘째 단원, 프로세스의 정의</a:t>
             </a:r>
           </a:p>
         </p:txBody>
@@ -13661,7 +15421,7 @@
       </p:sp>
       <p:pic>
         <p:nvPicPr>
-          <p:cNvPr id="6" name="Picture 5" descr="illust_7339602621393044893_1793113376.png"/>
+          <p:cNvPr id="6" name="Picture 5" descr="illust_4335498206698083307_1793113376.png"/>
           <p:cNvPicPr>
             <a:picLocks noChangeAspect="1"/>
           </p:cNvPicPr>

--- a/산출물/실전반/이론/06회차/실전반_06일차.pptx
+++ b/산출물/실전반/이론/06회차/실전반_06일차.pptx
@@ -4277,7 +4277,7 @@
           </a:p>
           <a:p>
             <a:r>
-              <a:t>· 소재: 정비 요청 확인 → 승인 여부 → 승인 종료 · 반려 종료</a:t>
+              <a:t>· 소재: 정비 요청 확인 → 승인 여부 → 승인 종료 · 반려 종료(「반려 종료」는 실라버스가 정한 이 실습의 끝 이름, 기준 흐름의 거절 종결에 해당)</a:t>
             </a:r>
           </a:p>
           <a:p>

--- a/산출물/실전반/이론/06회차/실전반_06일차.pptx
+++ b/산출물/실전반/이론/06회차/실전반_06일차.pptx
@@ -2172,7 +2172,7 @@
           </a:p>
           <a:p>
             <a:r>
-              <a:t>· 중단형(실선 겹테두리): 작업을 끊고 다른 갈래, 기준 흐름의 선택 시간 초과 → 상급자 호출 = 결정을 넘김</a:t>
+              <a:t>· 중단형(실선 겹테두리): 작업을 끊고 다른 갈래, 원래 들어 있던 다른 설비 이상 대응 흐름의 선택 시간 초과 → 상급자 호출 = 결정을 넘김</a:t>
             </a:r>
           </a:p>
           <a:p>
@@ -2472,7 +2472,7 @@
           </a:p>
           <a:p>
             <a:r>
-              <a:t>· 정답 4: 승인 작업에 중단형 타이머, 기한 뒤 상급자 결정 작업으로(기준 흐름의 상급자 호출과 같은 모양)</a:t>
+              <a:t>· 정답 4: 승인 작업에 중단형 타이머, 기한 뒤 상급자 결정 작업으로(원래 있던 다른 대응 흐름의 상급자 호출과 같은 모양)</a:t>
             </a:r>
           </a:p>
           <a:p>
@@ -4277,7 +4277,7 @@
           </a:p>
           <a:p>
             <a:r>
-              <a:t>· 소재: 정비 요청 확인 → 승인 여부 → 승인 종료 · 반려 종료(「반려 종료」는 실라버스가 정한 이 실습의 끝 이름, 기준 흐름의 거절 종결에 해당)</a:t>
+              <a:t>· 소재: 정비 요청 확인 → 승인 여부 → 승인 종료 · 반려 종료(「반려 종료」는 실라버스가 정한 이 실습의 끝 이름, 수업 흐름 「냉각 긴급 대응」의 거절 종결에 해당)</a:t>
             </a:r>
           </a:p>
           <a:p>
@@ -4837,7 +4837,7 @@
           </a:p>
           <a:p>
             <a:r>
-              <a:t>· 목적: 직접 그린 흐름을 포털에 등록된 기준 흐름과 견준다</a:t>
+              <a:t>· 목적: 직접 그린 흐름을 포털에 등록된 기준 흐름과 견준다(여기서 기준 흐름 = 강사가 배포해 둔 수업 흐름 「냉각 긴급 대응」과 그 제공 매핑. 포털 흐름 배포 화면의 「기준 흐름」, 곧 아무 흐름도 배포되지 않았을 때 경보를 받는 원래 흐름과는 다른 것)</a:t>
             </a:r>
           </a:p>
           <a:p>
@@ -15421,7 +15421,7 @@
       </p:sp>
       <p:pic>
         <p:nvPicPr>
-          <p:cNvPr id="6" name="Picture 5" descr="illust_4335498206698083307_1793113376.png"/>
+          <p:cNvPr id="6" name="Picture 5" descr="illust_2546410421468525302_1793113376.png"/>
           <p:cNvPicPr>
             <a:picLocks noChangeAspect="1"/>
           </p:cNvPicPr>
@@ -22698,8 +22698,8 @@
         </p:nvSpPr>
         <p:spPr>
           <a:xfrm>
-            <a:off x="548640" y="2556700"/>
-            <a:ext cx="5181447" cy="2869311"/>
+            <a:off x="548640" y="2367533"/>
+            <a:ext cx="5181447" cy="3247644"/>
           </a:xfrm>
           <a:prstGeom prst="roundRect">
             <a:avLst>
@@ -22729,7 +22729,7 @@
         </p:nvSpPr>
         <p:spPr>
           <a:xfrm>
-            <a:off x="822959" y="2757868"/>
+            <a:off x="822959" y="2568702"/>
             <a:ext cx="4724247" cy="731520"/>
           </a:xfrm>
           <a:prstGeom prst="rect">
@@ -22768,8 +22768,8 @@
         </p:nvSpPr>
         <p:spPr>
           <a:xfrm>
-            <a:off x="822959" y="3608260"/>
-            <a:ext cx="4632807" cy="1269111"/>
+            <a:off x="822959" y="3419093"/>
+            <a:ext cx="4632807" cy="1647444"/>
           </a:xfrm>
           <a:prstGeom prst="rect">
             <a:avLst/>
@@ -22780,7 +22780,7 @@
           <a:bodyPr wrap="square" anchor="t"/>
           <a:lstStyle/>
           <a:p>
-            <a:pPr algn="l" eaLnBrk="0" marL="177165" indent="-177165">
+            <a:pPr algn="l" eaLnBrk="0" marL="188595" indent="-188595">
               <a:lnSpc>
                 <a:spcPct val="110000"/>
               </a:lnSpc>
@@ -22789,7 +22789,7 @@
               </a:spcAft>
             </a:pPr>
             <a:r>
-              <a:rPr sz="1550" b="0">
+              <a:rPr sz="1650" b="0">
                 <a:solidFill>
                   <a:srgbClr val="1F2A3A"/>
                 </a:solidFill>
@@ -22801,7 +22801,7 @@
             </a:r>
           </a:p>
           <a:p>
-            <a:pPr algn="l" eaLnBrk="0" marL="177165" indent="-177165">
+            <a:pPr algn="l" eaLnBrk="0" marL="188595" indent="-188595">
               <a:lnSpc>
                 <a:spcPct val="110000"/>
               </a:lnSpc>
@@ -22810,7 +22810,7 @@
               </a:spcAft>
             </a:pPr>
             <a:r>
-              <a:rPr sz="1550" b="0">
+              <a:rPr sz="1650" b="0">
                 <a:solidFill>
                   <a:srgbClr val="1F2A3A"/>
                 </a:solidFill>
@@ -22822,7 +22822,7 @@
             </a:r>
           </a:p>
           <a:p>
-            <a:pPr algn="l" eaLnBrk="0" marL="177165" indent="-177165">
+            <a:pPr algn="l" eaLnBrk="0" marL="188595" indent="-188595">
               <a:lnSpc>
                 <a:spcPct val="110000"/>
               </a:lnSpc>
@@ -22831,7 +22831,7 @@
               </a:spcAft>
             </a:pPr>
             <a:r>
-              <a:rPr sz="1550" b="0">
+              <a:rPr sz="1650" b="0">
                 <a:solidFill>
                   <a:srgbClr val="1F2A3A"/>
                 </a:solidFill>
@@ -22839,7 +22839,7 @@
                 <a:ea typeface="맑은 고딕"/>
                 <a:cs typeface="맑은 고딕"/>
               </a:rPr>
-              <a:t>• 예: 기준 흐름의 선택 시간 초과 → 상급자 호출</a:t>
+              <a:t>• 예: 원래 있던 다른 대응 흐름의 선택 시간 초과 → 상급자 호출</a:t>
             </a:r>
           </a:p>
         </p:txBody>
@@ -22852,7 +22852,7 @@
         </p:nvSpPr>
         <p:spPr>
           <a:xfrm>
-            <a:off x="868680" y="4968811"/>
+            <a:off x="868680" y="5157978"/>
             <a:ext cx="1325879" cy="292608"/>
           </a:xfrm>
           <a:prstGeom prst="roundRect">
@@ -22883,7 +22883,7 @@
         </p:nvSpPr>
         <p:spPr>
           <a:xfrm>
-            <a:off x="868680" y="4968811"/>
+            <a:off x="868680" y="5157978"/>
             <a:ext cx="1325879" cy="292608"/>
           </a:xfrm>
           <a:prstGeom prst="rect">
@@ -22922,8 +22922,8 @@
         </p:nvSpPr>
         <p:spPr>
           <a:xfrm>
-            <a:off x="6461607" y="2556700"/>
-            <a:ext cx="5181447" cy="2869311"/>
+            <a:off x="6461607" y="2367533"/>
+            <a:ext cx="5181447" cy="3247644"/>
           </a:xfrm>
           <a:prstGeom prst="roundRect">
             <a:avLst>
@@ -22955,7 +22955,7 @@
         </p:nvSpPr>
         <p:spPr>
           <a:xfrm>
-            <a:off x="6735927" y="2757868"/>
+            <a:off x="6735927" y="2568702"/>
             <a:ext cx="4724247" cy="731520"/>
           </a:xfrm>
           <a:prstGeom prst="rect">
@@ -22994,8 +22994,8 @@
         </p:nvSpPr>
         <p:spPr>
           <a:xfrm>
-            <a:off x="6735927" y="3608260"/>
-            <a:ext cx="4632807" cy="1269111"/>
+            <a:off x="6735927" y="3419093"/>
+            <a:ext cx="4632807" cy="1647444"/>
           </a:xfrm>
           <a:prstGeom prst="rect">
             <a:avLst/>
@@ -23006,7 +23006,7 @@
           <a:bodyPr wrap="square" anchor="t"/>
           <a:lstStyle/>
           <a:p>
-            <a:pPr algn="l" eaLnBrk="0" marL="177165" indent="-177165">
+            <a:pPr algn="l" eaLnBrk="0" marL="188595" indent="-188595">
               <a:lnSpc>
                 <a:spcPct val="110000"/>
               </a:lnSpc>
@@ -23015,7 +23015,7 @@
               </a:spcAft>
             </a:pPr>
             <a:r>
-              <a:rPr sz="1550" b="0">
+              <a:rPr sz="1650" b="0">
                 <a:solidFill>
                   <a:srgbClr val="1F2A3A"/>
                 </a:solidFill>
@@ -23027,7 +23027,7 @@
             </a:r>
           </a:p>
           <a:p>
-            <a:pPr algn="l" eaLnBrk="0" marL="177165" indent="-177165">
+            <a:pPr algn="l" eaLnBrk="0" marL="188595" indent="-188595">
               <a:lnSpc>
                 <a:spcPct val="110000"/>
               </a:lnSpc>
@@ -23036,7 +23036,7 @@
               </a:spcAft>
             </a:pPr>
             <a:r>
-              <a:rPr sz="1550" b="0">
+              <a:rPr sz="1650" b="0">
                 <a:solidFill>
                   <a:srgbClr val="1F2A3A"/>
                 </a:solidFill>
@@ -23048,7 +23048,7 @@
             </a:r>
           </a:p>
           <a:p>
-            <a:pPr algn="l" eaLnBrk="0" marL="177165" indent="-177165">
+            <a:pPr algn="l" eaLnBrk="0" marL="188595" indent="-188595">
               <a:lnSpc>
                 <a:spcPct val="110000"/>
               </a:lnSpc>
@@ -23057,7 +23057,7 @@
               </a:spcAft>
             </a:pPr>
             <a:r>
-              <a:rPr sz="1550" b="0">
+              <a:rPr sz="1650" b="0">
                 <a:solidFill>
                   <a:srgbClr val="1F2A3A"/>
                 </a:solidFill>
@@ -23078,7 +23078,7 @@
         </p:nvSpPr>
         <p:spPr>
           <a:xfrm>
-            <a:off x="6781647" y="4968811"/>
+            <a:off x="6781647" y="5157978"/>
             <a:ext cx="1828800" cy="292608"/>
           </a:xfrm>
           <a:prstGeom prst="roundRect">
@@ -23109,7 +23109,7 @@
         </p:nvSpPr>
         <p:spPr>
           <a:xfrm>
-            <a:off x="6781647" y="4968811"/>
+            <a:off x="6781647" y="5157978"/>
             <a:ext cx="1828800" cy="292608"/>
           </a:xfrm>
           <a:prstGeom prst="rect">
